--- a/Explicacion.pptx
+++ b/Explicacion.pptx
@@ -2,7 +2,7 @@
 <file path=ppt/presentation.xml><?xml version="1.0" encoding="utf-8"?>
 <p:presentation xmlns:a="http://schemas.openxmlformats.org/drawingml/2006/main" xmlns:r="http://schemas.openxmlformats.org/officeDocument/2006/relationships" xmlns:p="http://schemas.openxmlformats.org/presentationml/2006/main" saveSubsetFonts="1" autoCompressPictures="0">
   <p:sldMasterIdLst>
-    <p:sldMasterId id="2147483648" r:id="rId1"/>
+    <p:sldMasterId id="2147483780" r:id="rId1"/>
   </p:sldMasterIdLst>
   <p:sldIdLst>
     <p:sldId id="256" r:id="rId2"/>
@@ -20,9 +20,9 @@
   <p:notesSz cx="6858000" cy="9144000"/>
   <p:defaultTextStyle>
     <a:defPPr>
-      <a:defRPr lang="en-PR"/>
+      <a:defRPr lang="en-US"/>
     </a:defPPr>
-    <a:lvl1pPr marL="0" algn="l" defTabSz="914400" rtl="0" eaLnBrk="1" latinLnBrk="0" hangingPunct="1">
+    <a:lvl1pPr marL="0" algn="l" defTabSz="457200" rtl="0" eaLnBrk="1" latinLnBrk="0" hangingPunct="1">
       <a:defRPr sz="1800" kern="1200">
         <a:solidFill>
           <a:schemeClr val="tx1"/>
@@ -32,7 +32,7 @@
         <a:cs typeface="+mn-cs"/>
       </a:defRPr>
     </a:lvl1pPr>
-    <a:lvl2pPr marL="457200" algn="l" defTabSz="914400" rtl="0" eaLnBrk="1" latinLnBrk="0" hangingPunct="1">
+    <a:lvl2pPr marL="457200" algn="l" defTabSz="457200" rtl="0" eaLnBrk="1" latinLnBrk="0" hangingPunct="1">
       <a:defRPr sz="1800" kern="1200">
         <a:solidFill>
           <a:schemeClr val="tx1"/>
@@ -42,7 +42,7 @@
         <a:cs typeface="+mn-cs"/>
       </a:defRPr>
     </a:lvl2pPr>
-    <a:lvl3pPr marL="914400" algn="l" defTabSz="914400" rtl="0" eaLnBrk="1" latinLnBrk="0" hangingPunct="1">
+    <a:lvl3pPr marL="914400" algn="l" defTabSz="457200" rtl="0" eaLnBrk="1" latinLnBrk="0" hangingPunct="1">
       <a:defRPr sz="1800" kern="1200">
         <a:solidFill>
           <a:schemeClr val="tx1"/>
@@ -52,7 +52,7 @@
         <a:cs typeface="+mn-cs"/>
       </a:defRPr>
     </a:lvl3pPr>
-    <a:lvl4pPr marL="1371600" algn="l" defTabSz="914400" rtl="0" eaLnBrk="1" latinLnBrk="0" hangingPunct="1">
+    <a:lvl4pPr marL="1371600" algn="l" defTabSz="457200" rtl="0" eaLnBrk="1" latinLnBrk="0" hangingPunct="1">
       <a:defRPr sz="1800" kern="1200">
         <a:solidFill>
           <a:schemeClr val="tx1"/>
@@ -62,7 +62,7 @@
         <a:cs typeface="+mn-cs"/>
       </a:defRPr>
     </a:lvl4pPr>
-    <a:lvl5pPr marL="1828800" algn="l" defTabSz="914400" rtl="0" eaLnBrk="1" latinLnBrk="0" hangingPunct="1">
+    <a:lvl5pPr marL="1828800" algn="l" defTabSz="457200" rtl="0" eaLnBrk="1" latinLnBrk="0" hangingPunct="1">
       <a:defRPr sz="1800" kern="1200">
         <a:solidFill>
           <a:schemeClr val="tx1"/>
@@ -72,7 +72,7 @@
         <a:cs typeface="+mn-cs"/>
       </a:defRPr>
     </a:lvl5pPr>
-    <a:lvl6pPr marL="2286000" algn="l" defTabSz="914400" rtl="0" eaLnBrk="1" latinLnBrk="0" hangingPunct="1">
+    <a:lvl6pPr marL="2286000" algn="l" defTabSz="457200" rtl="0" eaLnBrk="1" latinLnBrk="0" hangingPunct="1">
       <a:defRPr sz="1800" kern="1200">
         <a:solidFill>
           <a:schemeClr val="tx1"/>
@@ -82,7 +82,7 @@
         <a:cs typeface="+mn-cs"/>
       </a:defRPr>
     </a:lvl6pPr>
-    <a:lvl7pPr marL="2743200" algn="l" defTabSz="914400" rtl="0" eaLnBrk="1" latinLnBrk="0" hangingPunct="1">
+    <a:lvl7pPr marL="2743200" algn="l" defTabSz="457200" rtl="0" eaLnBrk="1" latinLnBrk="0" hangingPunct="1">
       <a:defRPr sz="1800" kern="1200">
         <a:solidFill>
           <a:schemeClr val="tx1"/>
@@ -92,7 +92,7 @@
         <a:cs typeface="+mn-cs"/>
       </a:defRPr>
     </a:lvl7pPr>
-    <a:lvl8pPr marL="3200400" algn="l" defTabSz="914400" rtl="0" eaLnBrk="1" latinLnBrk="0" hangingPunct="1">
+    <a:lvl8pPr marL="3200400" algn="l" defTabSz="457200" rtl="0" eaLnBrk="1" latinLnBrk="0" hangingPunct="1">
       <a:defRPr sz="1800" kern="1200">
         <a:solidFill>
           <a:schemeClr val="tx1"/>
@@ -102,7 +102,7 @@
         <a:cs typeface="+mn-cs"/>
       </a:defRPr>
     </a:lvl8pPr>
-    <a:lvl9pPr marL="3657600" algn="l" defTabSz="914400" rtl="0" eaLnBrk="1" latinLnBrk="0" hangingPunct="1">
+    <a:lvl9pPr marL="3657600" algn="l" defTabSz="457200" rtl="0" eaLnBrk="1" latinLnBrk="0" hangingPunct="1">
       <a:defRPr sz="1800" kern="1200">
         <a:solidFill>
           <a:schemeClr val="tx1"/>
@@ -113,6 +113,11 @@
       </a:defRPr>
     </a:lvl9pPr>
   </p:defaultTextStyle>
+  <p:extLst>
+    <p:ext uri="{EFAFB233-063F-42B5-8137-9DF3F51BA10A}">
+      <p15:sldGuideLst xmlns:p15="http://schemas.microsoft.com/office/powerpoint/2012/main"/>
+    </p:ext>
+  </p:extLst>
 </p:presentation>
 </file>
 
@@ -135,13 +140,111 @@
       </p:grpSpPr>
       <p:sp>
         <p:nvSpPr>
-          <p:cNvPr id="2" name="Title 1">
-            <a:extLst>
-              <a:ext uri="{FF2B5EF4-FFF2-40B4-BE49-F238E27FC236}">
-                <a16:creationId xmlns:a16="http://schemas.microsoft.com/office/drawing/2014/main" id="{0C82ADAE-940D-BF8A-2116-E1FDBBE0D071}"/>
-              </a:ext>
-            </a:extLst>
-          </p:cNvPr>
+          <p:cNvPr id="11" name="Freeform 6"/>
+          <p:cNvSpPr/>
+          <p:nvPr/>
+        </p:nvSpPr>
+        <p:spPr bwMode="auto">
+          <a:xfrm>
+            <a:off x="0" y="-3175"/>
+            <a:ext cx="12192000" cy="5203825"/>
+          </a:xfrm>
+          <a:custGeom>
+            <a:avLst/>
+            <a:gdLst/>
+            <a:ahLst/>
+            <a:cxnLst/>
+            <a:rect l="0" t="0" r="r" b="b"/>
+            <a:pathLst>
+              <a:path w="5760" h="3278">
+                <a:moveTo>
+                  <a:pt x="5760" y="0"/>
+                </a:moveTo>
+                <a:lnTo>
+                  <a:pt x="0" y="0"/>
+                </a:lnTo>
+                <a:lnTo>
+                  <a:pt x="0" y="3090"/>
+                </a:lnTo>
+                <a:lnTo>
+                  <a:pt x="943" y="3090"/>
+                </a:lnTo>
+                <a:lnTo>
+                  <a:pt x="1123" y="3270"/>
+                </a:lnTo>
+                <a:lnTo>
+                  <a:pt x="1123" y="3270"/>
+                </a:lnTo>
+                <a:lnTo>
+                  <a:pt x="1127" y="3272"/>
+                </a:lnTo>
+                <a:lnTo>
+                  <a:pt x="1133" y="3275"/>
+                </a:lnTo>
+                <a:lnTo>
+                  <a:pt x="1139" y="3278"/>
+                </a:lnTo>
+                <a:lnTo>
+                  <a:pt x="1144" y="3278"/>
+                </a:lnTo>
+                <a:lnTo>
+                  <a:pt x="1150" y="3278"/>
+                </a:lnTo>
+                <a:lnTo>
+                  <a:pt x="1155" y="3275"/>
+                </a:lnTo>
+                <a:lnTo>
+                  <a:pt x="1161" y="3272"/>
+                </a:lnTo>
+                <a:lnTo>
+                  <a:pt x="1165" y="3270"/>
+                </a:lnTo>
+                <a:lnTo>
+                  <a:pt x="1345" y="3090"/>
+                </a:lnTo>
+                <a:lnTo>
+                  <a:pt x="5760" y="3090"/>
+                </a:lnTo>
+                <a:lnTo>
+                  <a:pt x="5760" y="0"/>
+                </a:lnTo>
+                <a:close/>
+              </a:path>
+            </a:pathLst>
+          </a:custGeom>
+          <a:ln/>
+          <a:effectLst/>
+          <a:extLst>
+            <a:ext uri="{91240B29-F687-4f45-9708-019B960494DF}">
+              <a14:hiddenLine xmlns:a14="http://schemas.microsoft.com/office/drawing/2010/main" xmlns="" w="9525">
+                <a:solidFill>
+                  <a:srgbClr val="000000"/>
+                </a:solidFill>
+                <a:round/>
+                <a:headEnd/>
+                <a:tailEnd/>
+              </a14:hiddenLine>
+            </a:ext>
+          </a:extLst>
+        </p:spPr>
+        <p:style>
+          <a:lnRef idx="1">
+            <a:schemeClr val="accent1"/>
+          </a:lnRef>
+          <a:fillRef idx="3">
+            <a:schemeClr val="accent1"/>
+          </a:fillRef>
+          <a:effectRef idx="2">
+            <a:schemeClr val="accent1"/>
+          </a:effectRef>
+          <a:fontRef idx="minor">
+            <a:schemeClr val="lt1"/>
+          </a:fontRef>
+        </p:style>
+      </p:sp>
+      <p:sp>
+        <p:nvSpPr>
+          <p:cNvPr id="2" name="Title 1"/>
           <p:cNvSpPr>
             <a:spLocks noGrp="1"/>
           </p:cNvSpPr>
@@ -151,15 +254,15 @@
         </p:nvSpPr>
         <p:spPr>
           <a:xfrm>
-            <a:off x="1524000" y="1122363"/>
-            <a:ext cx="9144000" cy="2387600"/>
+            <a:off x="810001" y="1449147"/>
+            <a:ext cx="10572000" cy="2971051"/>
           </a:xfrm>
         </p:spPr>
         <p:txBody>
-          <a:bodyPr anchor="b"/>
+          <a:bodyPr/>
           <a:lstStyle>
-            <a:lvl1pPr algn="ctr">
-              <a:defRPr sz="6000"/>
+            <a:lvl1pPr>
+              <a:defRPr sz="5400"/>
             </a:lvl1pPr>
           </a:lstStyle>
           <a:p>
@@ -167,19 +270,13 @@
               <a:rPr lang="en-US"/>
               <a:t>Click to edit Master title style</a:t>
             </a:r>
-            <a:endParaRPr lang="en-PR"/>
-          </a:p>
-        </p:txBody>
-      </p:sp>
-      <p:sp>
-        <p:nvSpPr>
-          <p:cNvPr id="3" name="Subtitle 2">
-            <a:extLst>
-              <a:ext uri="{FF2B5EF4-FFF2-40B4-BE49-F238E27FC236}">
-                <a16:creationId xmlns:a16="http://schemas.microsoft.com/office/drawing/2014/main" id="{2DED0263-6EB4-5928-79CC-02AA1C777FDF}"/>
-              </a:ext>
-            </a:extLst>
-          </p:cNvPr>
+            <a:endParaRPr lang="en-US" dirty="0"/>
+          </a:p>
+        </p:txBody>
+      </p:sp>
+      <p:sp>
+        <p:nvSpPr>
+          <p:cNvPr id="3" name="Subtitle 2"/>
           <p:cNvSpPr>
             <a:spLocks noGrp="1"/>
           </p:cNvSpPr>
@@ -189,48 +286,100 @@
         </p:nvSpPr>
         <p:spPr>
           <a:xfrm>
-            <a:off x="1524000" y="3602038"/>
-            <a:ext cx="9144000" cy="1655762"/>
+            <a:off x="810001" y="5280847"/>
+            <a:ext cx="10572000" cy="434974"/>
           </a:xfrm>
         </p:spPr>
         <p:txBody>
-          <a:bodyPr/>
+          <a:bodyPr anchor="t"/>
           <a:lstStyle>
-            <a:lvl1pPr marL="0" indent="0" algn="ctr">
+            <a:lvl1pPr marL="0" indent="0" algn="l">
               <a:buNone/>
-              <a:defRPr sz="2400"/>
+              <a:defRPr>
+                <a:solidFill>
+                  <a:schemeClr val="tx1"/>
+                </a:solidFill>
+              </a:defRPr>
             </a:lvl1pPr>
             <a:lvl2pPr marL="457200" indent="0" algn="ctr">
               <a:buNone/>
-              <a:defRPr sz="2000"/>
+              <a:defRPr>
+                <a:solidFill>
+                  <a:schemeClr val="tx1">
+                    <a:tint val="75000"/>
+                  </a:schemeClr>
+                </a:solidFill>
+              </a:defRPr>
             </a:lvl2pPr>
             <a:lvl3pPr marL="914400" indent="0" algn="ctr">
               <a:buNone/>
-              <a:defRPr sz="1800"/>
+              <a:defRPr>
+                <a:solidFill>
+                  <a:schemeClr val="tx1">
+                    <a:tint val="75000"/>
+                  </a:schemeClr>
+                </a:solidFill>
+              </a:defRPr>
             </a:lvl3pPr>
             <a:lvl4pPr marL="1371600" indent="0" algn="ctr">
               <a:buNone/>
-              <a:defRPr sz="1600"/>
+              <a:defRPr>
+                <a:solidFill>
+                  <a:schemeClr val="tx1">
+                    <a:tint val="75000"/>
+                  </a:schemeClr>
+                </a:solidFill>
+              </a:defRPr>
             </a:lvl4pPr>
             <a:lvl5pPr marL="1828800" indent="0" algn="ctr">
               <a:buNone/>
-              <a:defRPr sz="1600"/>
+              <a:defRPr>
+                <a:solidFill>
+                  <a:schemeClr val="tx1">
+                    <a:tint val="75000"/>
+                  </a:schemeClr>
+                </a:solidFill>
+              </a:defRPr>
             </a:lvl5pPr>
             <a:lvl6pPr marL="2286000" indent="0" algn="ctr">
               <a:buNone/>
-              <a:defRPr sz="1600"/>
+              <a:defRPr>
+                <a:solidFill>
+                  <a:schemeClr val="tx1">
+                    <a:tint val="75000"/>
+                  </a:schemeClr>
+                </a:solidFill>
+              </a:defRPr>
             </a:lvl6pPr>
             <a:lvl7pPr marL="2743200" indent="0" algn="ctr">
               <a:buNone/>
-              <a:defRPr sz="1600"/>
+              <a:defRPr>
+                <a:solidFill>
+                  <a:schemeClr val="tx1">
+                    <a:tint val="75000"/>
+                  </a:schemeClr>
+                </a:solidFill>
+              </a:defRPr>
             </a:lvl7pPr>
             <a:lvl8pPr marL="3200400" indent="0" algn="ctr">
               <a:buNone/>
-              <a:defRPr sz="1600"/>
+              <a:defRPr>
+                <a:solidFill>
+                  <a:schemeClr val="tx1">
+                    <a:tint val="75000"/>
+                  </a:schemeClr>
+                </a:solidFill>
+              </a:defRPr>
             </a:lvl8pPr>
             <a:lvl9pPr marL="3657600" indent="0" algn="ctr">
               <a:buNone/>
-              <a:defRPr sz="1600"/>
+              <a:defRPr>
+                <a:solidFill>
+                  <a:schemeClr val="tx1">
+                    <a:tint val="75000"/>
+                  </a:schemeClr>
+                </a:solidFill>
+              </a:defRPr>
             </a:lvl9pPr>
           </a:lstStyle>
           <a:p>
@@ -238,19 +387,13 @@
               <a:rPr lang="en-US"/>
               <a:t>Click to edit Master subtitle style</a:t>
             </a:r>
-            <a:endParaRPr lang="en-PR"/>
-          </a:p>
-        </p:txBody>
-      </p:sp>
-      <p:sp>
-        <p:nvSpPr>
-          <p:cNvPr id="4" name="Date Placeholder 3">
-            <a:extLst>
-              <a:ext uri="{FF2B5EF4-FFF2-40B4-BE49-F238E27FC236}">
-                <a16:creationId xmlns:a16="http://schemas.microsoft.com/office/drawing/2014/main" id="{D987E251-6091-6671-4971-D35AE82D6EAA}"/>
-              </a:ext>
-            </a:extLst>
-          </p:cNvPr>
+            <a:endParaRPr lang="en-US" dirty="0"/>
+          </a:p>
+        </p:txBody>
+      </p:sp>
+      <p:sp>
+        <p:nvSpPr>
+          <p:cNvPr id="4" name="Date Placeholder 3"/>
           <p:cNvSpPr>
             <a:spLocks noGrp="1"/>
           </p:cNvSpPr>
@@ -265,7 +408,7 @@
           <a:p>
             <a:fld id="{2660491B-4C7C-DB4F-95AC-F6744A00D18F}" type="datetimeFigureOut">
               <a:rPr lang="en-PR" smtClean="0"/>
-              <a:t>4/12/26</a:t>
+              <a:t>4/13/26</a:t>
             </a:fld>
             <a:endParaRPr lang="en-PR"/>
           </a:p>
@@ -273,13 +416,7 @@
       </p:sp>
       <p:sp>
         <p:nvSpPr>
-          <p:cNvPr id="5" name="Footer Placeholder 4">
-            <a:extLst>
-              <a:ext uri="{FF2B5EF4-FFF2-40B4-BE49-F238E27FC236}">
-                <a16:creationId xmlns:a16="http://schemas.microsoft.com/office/drawing/2014/main" id="{65416E94-BAF3-74A0-EFF9-9ACC7CEA84A8}"/>
-              </a:ext>
-            </a:extLst>
-          </p:cNvPr>
+          <p:cNvPr id="5" name="Footer Placeholder 4"/>
           <p:cNvSpPr>
             <a:spLocks noGrp="1"/>
           </p:cNvSpPr>
@@ -298,13 +435,7 @@
       </p:sp>
       <p:sp>
         <p:nvSpPr>
-          <p:cNvPr id="6" name="Slide Number Placeholder 5">
-            <a:extLst>
-              <a:ext uri="{FF2B5EF4-FFF2-40B4-BE49-F238E27FC236}">
-                <a16:creationId xmlns:a16="http://schemas.microsoft.com/office/drawing/2014/main" id="{159B40BB-30AA-B7A0-67F1-8B4D36A1007B}"/>
-              </a:ext>
-            </a:extLst>
-          </p:cNvPr>
+          <p:cNvPr id="6" name="Slide Number Placeholder 5"/>
           <p:cNvSpPr>
             <a:spLocks noGrp="1"/>
           </p:cNvSpPr>
@@ -328,7 +459,7 @@
     </p:spTree>
     <p:extLst>
       <p:ext uri="{BB962C8B-B14F-4D97-AF65-F5344CB8AC3E}">
-        <p14:creationId xmlns:p14="http://schemas.microsoft.com/office/powerpoint/2010/main" val="1989148330"/>
+        <p14:creationId xmlns:p14="http://schemas.microsoft.com/office/powerpoint/2010/main" val="416105526"/>
       </p:ext>
     </p:extLst>
   </p:cSld>
@@ -339,6 +470,1181 @@
 </file>
 
 <file path=ppt/slideLayouts/slideLayout10.xml><?xml version="1.0" encoding="utf-8"?>
+<p:sldLayout xmlns:a="http://schemas.openxmlformats.org/drawingml/2006/main" xmlns:r="http://schemas.openxmlformats.org/officeDocument/2006/relationships" xmlns:p="http://schemas.openxmlformats.org/presentationml/2006/main" preserve="1">
+  <p:cSld name="Panoramic Picture with Caption">
+    <p:spTree>
+      <p:nvGrpSpPr>
+        <p:cNvPr id="1" name=""/>
+        <p:cNvGrpSpPr/>
+        <p:nvPr/>
+      </p:nvGrpSpPr>
+      <p:grpSpPr>
+        <a:xfrm>
+          <a:off x="0" y="0"/>
+          <a:ext cx="0" cy="0"/>
+          <a:chOff x="0" y="0"/>
+          <a:chExt cx="0" cy="0"/>
+        </a:xfrm>
+      </p:grpSpPr>
+      <p:sp>
+        <p:nvSpPr>
+          <p:cNvPr id="2" name="Title 1"/>
+          <p:cNvSpPr>
+            <a:spLocks noGrp="1"/>
+          </p:cNvSpPr>
+          <p:nvPr>
+            <p:ph type="title"/>
+          </p:nvPr>
+        </p:nvSpPr>
+        <p:spPr>
+          <a:xfrm>
+            <a:off x="810000" y="4800600"/>
+            <a:ext cx="10561418" cy="566738"/>
+          </a:xfrm>
+        </p:spPr>
+        <p:txBody>
+          <a:bodyPr anchor="b">
+            <a:normAutofit/>
+          </a:bodyPr>
+          <a:lstStyle>
+            <a:lvl1pPr algn="l">
+              <a:defRPr sz="2400" b="0"/>
+            </a:lvl1pPr>
+          </a:lstStyle>
+          <a:p>
+            <a:r>
+              <a:rPr lang="en-US"/>
+              <a:t>Click to edit Master title style</a:t>
+            </a:r>
+            <a:endParaRPr lang="en-US" dirty="0"/>
+          </a:p>
+        </p:txBody>
+      </p:sp>
+      <p:sp>
+        <p:nvSpPr>
+          <p:cNvPr id="15" name="Picture Placeholder 14"/>
+          <p:cNvSpPr>
+            <a:spLocks noGrp="1" noChangeAspect="1"/>
+          </p:cNvSpPr>
+          <p:nvPr>
+            <p:ph type="pic" sz="quarter" idx="13"/>
+          </p:nvPr>
+        </p:nvSpPr>
+        <p:spPr bwMode="auto">
+          <a:xfrm>
+            <a:off x="0" y="0"/>
+            <a:ext cx="12192000" cy="4800600"/>
+          </a:xfrm>
+          <a:custGeom>
+            <a:avLst/>
+            <a:gdLst/>
+            <a:ahLst/>
+            <a:cxnLst/>
+            <a:rect l="0" t="0" r="r" b="b"/>
+            <a:pathLst>
+              <a:path w="5760" h="3289">
+                <a:moveTo>
+                  <a:pt x="5760" y="0"/>
+                </a:moveTo>
+                <a:lnTo>
+                  <a:pt x="0" y="0"/>
+                </a:lnTo>
+                <a:lnTo>
+                  <a:pt x="0" y="3100"/>
+                </a:lnTo>
+                <a:lnTo>
+                  <a:pt x="943" y="3100"/>
+                </a:lnTo>
+                <a:lnTo>
+                  <a:pt x="1123" y="3281"/>
+                </a:lnTo>
+                <a:lnTo>
+                  <a:pt x="1123" y="3281"/>
+                </a:lnTo>
+                <a:lnTo>
+                  <a:pt x="1127" y="3283"/>
+                </a:lnTo>
+                <a:lnTo>
+                  <a:pt x="1133" y="3286"/>
+                </a:lnTo>
+                <a:lnTo>
+                  <a:pt x="1139" y="3289"/>
+                </a:lnTo>
+                <a:lnTo>
+                  <a:pt x="1144" y="3289"/>
+                </a:lnTo>
+                <a:lnTo>
+                  <a:pt x="1150" y="3289"/>
+                </a:lnTo>
+                <a:lnTo>
+                  <a:pt x="1155" y="3286"/>
+                </a:lnTo>
+                <a:lnTo>
+                  <a:pt x="1161" y="3283"/>
+                </a:lnTo>
+                <a:lnTo>
+                  <a:pt x="1165" y="3281"/>
+                </a:lnTo>
+                <a:lnTo>
+                  <a:pt x="1345" y="3100"/>
+                </a:lnTo>
+                <a:lnTo>
+                  <a:pt x="5760" y="3100"/>
+                </a:lnTo>
+                <a:lnTo>
+                  <a:pt x="5760" y="0"/>
+                </a:lnTo>
+                <a:close/>
+              </a:path>
+            </a:pathLst>
+          </a:custGeom>
+          <a:noFill/>
+          <a:ln>
+            <a:solidFill>
+              <a:schemeClr val="tx2"/>
+            </a:solidFill>
+          </a:ln>
+        </p:spPr>
+        <p:style>
+          <a:lnRef idx="1">
+            <a:schemeClr val="accent1"/>
+          </a:lnRef>
+          <a:fillRef idx="3">
+            <a:schemeClr val="accent1"/>
+          </a:fillRef>
+          <a:effectRef idx="2">
+            <a:schemeClr val="accent1"/>
+          </a:effectRef>
+          <a:fontRef idx="minor">
+            <a:schemeClr val="lt1"/>
+          </a:fontRef>
+        </p:style>
+        <p:txBody>
+          <a:bodyPr wrap="square" numCol="1" anchor="t" anchorCtr="0" compatLnSpc="1">
+            <a:prstTxWarp prst="textNoShape">
+              <a:avLst/>
+            </a:prstTxWarp>
+            <a:normAutofit/>
+          </a:bodyPr>
+          <a:lstStyle>
+            <a:lvl1pPr marL="0" indent="0" algn="ctr">
+              <a:buFontTx/>
+              <a:buNone/>
+              <a:defRPr sz="1600"/>
+            </a:lvl1pPr>
+          </a:lstStyle>
+          <a:p>
+            <a:r>
+              <a:rPr lang="en-US"/>
+              <a:t>Click icon to add picture</a:t>
+            </a:r>
+            <a:endParaRPr lang="en-US" dirty="0"/>
+          </a:p>
+        </p:txBody>
+      </p:sp>
+      <p:sp>
+        <p:nvSpPr>
+          <p:cNvPr id="4" name="Text Placeholder 3"/>
+          <p:cNvSpPr>
+            <a:spLocks noGrp="1"/>
+          </p:cNvSpPr>
+          <p:nvPr>
+            <p:ph type="body" sz="half" idx="2"/>
+          </p:nvPr>
+        </p:nvSpPr>
+        <p:spPr>
+          <a:xfrm>
+            <a:off x="810000" y="5367338"/>
+            <a:ext cx="10561418" cy="493712"/>
+          </a:xfrm>
+        </p:spPr>
+        <p:txBody>
+          <a:bodyPr>
+            <a:normAutofit/>
+          </a:bodyPr>
+          <a:lstStyle>
+            <a:lvl1pPr marL="0" indent="0">
+              <a:buNone/>
+              <a:defRPr sz="1200"/>
+            </a:lvl1pPr>
+            <a:lvl2pPr marL="457200" indent="0">
+              <a:buNone/>
+              <a:defRPr sz="1200"/>
+            </a:lvl2pPr>
+            <a:lvl3pPr marL="914400" indent="0">
+              <a:buNone/>
+              <a:defRPr sz="1000"/>
+            </a:lvl3pPr>
+            <a:lvl4pPr marL="1371600" indent="0">
+              <a:buNone/>
+              <a:defRPr sz="900"/>
+            </a:lvl4pPr>
+            <a:lvl5pPr marL="1828800" indent="0">
+              <a:buNone/>
+              <a:defRPr sz="900"/>
+            </a:lvl5pPr>
+            <a:lvl6pPr marL="2286000" indent="0">
+              <a:buNone/>
+              <a:defRPr sz="900"/>
+            </a:lvl6pPr>
+            <a:lvl7pPr marL="2743200" indent="0">
+              <a:buNone/>
+              <a:defRPr sz="900"/>
+            </a:lvl7pPr>
+            <a:lvl8pPr marL="3200400" indent="0">
+              <a:buNone/>
+              <a:defRPr sz="900"/>
+            </a:lvl8pPr>
+            <a:lvl9pPr marL="3657600" indent="0">
+              <a:buNone/>
+              <a:defRPr sz="900"/>
+            </a:lvl9pPr>
+          </a:lstStyle>
+          <a:p>
+            <a:pPr lvl="0"/>
+            <a:r>
+              <a:rPr lang="en-US"/>
+              <a:t>Click to edit Master text styles</a:t>
+            </a:r>
+          </a:p>
+        </p:txBody>
+      </p:sp>
+      <p:sp>
+        <p:nvSpPr>
+          <p:cNvPr id="5" name="Date Placeholder 4"/>
+          <p:cNvSpPr>
+            <a:spLocks noGrp="1"/>
+          </p:cNvSpPr>
+          <p:nvPr>
+            <p:ph type="dt" sz="half" idx="10"/>
+          </p:nvPr>
+        </p:nvSpPr>
+        <p:spPr/>
+        <p:txBody>
+          <a:bodyPr/>
+          <a:lstStyle/>
+          <a:p>
+            <a:fld id="{2660491B-4C7C-DB4F-95AC-F6744A00D18F}" type="datetimeFigureOut">
+              <a:rPr lang="en-PR" smtClean="0"/>
+              <a:t>4/13/26</a:t>
+            </a:fld>
+            <a:endParaRPr lang="en-PR"/>
+          </a:p>
+        </p:txBody>
+      </p:sp>
+      <p:sp>
+        <p:nvSpPr>
+          <p:cNvPr id="6" name="Footer Placeholder 5"/>
+          <p:cNvSpPr>
+            <a:spLocks noGrp="1"/>
+          </p:cNvSpPr>
+          <p:nvPr>
+            <p:ph type="ftr" sz="quarter" idx="11"/>
+          </p:nvPr>
+        </p:nvSpPr>
+        <p:spPr/>
+        <p:txBody>
+          <a:bodyPr/>
+          <a:lstStyle/>
+          <a:p>
+            <a:endParaRPr lang="en-PR"/>
+          </a:p>
+        </p:txBody>
+      </p:sp>
+      <p:sp>
+        <p:nvSpPr>
+          <p:cNvPr id="7" name="Slide Number Placeholder 6"/>
+          <p:cNvSpPr>
+            <a:spLocks noGrp="1"/>
+          </p:cNvSpPr>
+          <p:nvPr>
+            <p:ph type="sldNum" sz="quarter" idx="12"/>
+          </p:nvPr>
+        </p:nvSpPr>
+        <p:spPr/>
+        <p:txBody>
+          <a:bodyPr/>
+          <a:lstStyle/>
+          <a:p>
+            <a:fld id="{349C4F4D-F1AD-F54B-BB02-21FBD21EDCE1}" type="slidenum">
+              <a:rPr lang="en-PR" smtClean="0"/>
+              <a:t>‹#›</a:t>
+            </a:fld>
+            <a:endParaRPr lang="en-PR"/>
+          </a:p>
+        </p:txBody>
+      </p:sp>
+    </p:spTree>
+    <p:extLst>
+      <p:ext uri="{BB962C8B-B14F-4D97-AF65-F5344CB8AC3E}">
+        <p14:creationId xmlns:p14="http://schemas.microsoft.com/office/powerpoint/2010/main" val="2420502612"/>
+      </p:ext>
+    </p:extLst>
+  </p:cSld>
+  <p:clrMapOvr>
+    <a:masterClrMapping/>
+  </p:clrMapOvr>
+</p:sldLayout>
+</file>
+
+<file path=ppt/slideLayouts/slideLayout11.xml><?xml version="1.0" encoding="utf-8"?>
+<p:sldLayout xmlns:a="http://schemas.openxmlformats.org/drawingml/2006/main" xmlns:r="http://schemas.openxmlformats.org/officeDocument/2006/relationships" xmlns:p="http://schemas.openxmlformats.org/presentationml/2006/main" preserve="1">
+  <p:cSld name="Quote with Caption">
+    <p:spTree>
+      <p:nvGrpSpPr>
+        <p:cNvPr id="1" name=""/>
+        <p:cNvGrpSpPr/>
+        <p:nvPr/>
+      </p:nvGrpSpPr>
+      <p:grpSpPr>
+        <a:xfrm>
+          <a:off x="0" y="0"/>
+          <a:ext cx="0" cy="0"/>
+          <a:chOff x="0" y="0"/>
+          <a:chExt cx="0" cy="0"/>
+        </a:xfrm>
+      </p:grpSpPr>
+      <p:sp>
+        <p:nvSpPr>
+          <p:cNvPr id="8" name="Freeform 6"/>
+          <p:cNvSpPr>
+            <a:spLocks noChangeAspect="1"/>
+          </p:cNvSpPr>
+          <p:nvPr/>
+        </p:nvSpPr>
+        <p:spPr bwMode="auto">
+          <a:xfrm>
+            <a:off x="631697" y="1081456"/>
+            <a:ext cx="6332416" cy="3239188"/>
+          </a:xfrm>
+          <a:custGeom>
+            <a:avLst/>
+            <a:gdLst/>
+            <a:ahLst/>
+            <a:cxnLst/>
+            <a:rect l="0" t="0" r="r" b="b"/>
+            <a:pathLst>
+              <a:path w="3384" h="2308">
+                <a:moveTo>
+                  <a:pt x="3340" y="0"/>
+                </a:moveTo>
+                <a:lnTo>
+                  <a:pt x="44" y="0"/>
+                </a:lnTo>
+                <a:lnTo>
+                  <a:pt x="44" y="0"/>
+                </a:lnTo>
+                <a:lnTo>
+                  <a:pt x="34" y="0"/>
+                </a:lnTo>
+                <a:lnTo>
+                  <a:pt x="26" y="4"/>
+                </a:lnTo>
+                <a:lnTo>
+                  <a:pt x="20" y="8"/>
+                </a:lnTo>
+                <a:lnTo>
+                  <a:pt x="12" y="12"/>
+                </a:lnTo>
+                <a:lnTo>
+                  <a:pt x="8" y="20"/>
+                </a:lnTo>
+                <a:lnTo>
+                  <a:pt x="4" y="26"/>
+                </a:lnTo>
+                <a:lnTo>
+                  <a:pt x="0" y="34"/>
+                </a:lnTo>
+                <a:lnTo>
+                  <a:pt x="0" y="44"/>
+                </a:lnTo>
+                <a:lnTo>
+                  <a:pt x="0" y="2076"/>
+                </a:lnTo>
+                <a:lnTo>
+                  <a:pt x="0" y="2076"/>
+                </a:lnTo>
+                <a:lnTo>
+                  <a:pt x="0" y="2086"/>
+                </a:lnTo>
+                <a:lnTo>
+                  <a:pt x="4" y="2094"/>
+                </a:lnTo>
+                <a:lnTo>
+                  <a:pt x="8" y="2100"/>
+                </a:lnTo>
+                <a:lnTo>
+                  <a:pt x="12" y="2108"/>
+                </a:lnTo>
+                <a:lnTo>
+                  <a:pt x="20" y="2112"/>
+                </a:lnTo>
+                <a:lnTo>
+                  <a:pt x="26" y="2116"/>
+                </a:lnTo>
+                <a:lnTo>
+                  <a:pt x="34" y="2120"/>
+                </a:lnTo>
+                <a:lnTo>
+                  <a:pt x="44" y="2120"/>
+                </a:lnTo>
+                <a:lnTo>
+                  <a:pt x="474" y="2120"/>
+                </a:lnTo>
+                <a:lnTo>
+                  <a:pt x="650" y="2296"/>
+                </a:lnTo>
+                <a:lnTo>
+                  <a:pt x="650" y="2296"/>
+                </a:lnTo>
+                <a:lnTo>
+                  <a:pt x="656" y="2300"/>
+                </a:lnTo>
+                <a:lnTo>
+                  <a:pt x="664" y="2304"/>
+                </a:lnTo>
+                <a:lnTo>
+                  <a:pt x="672" y="2308"/>
+                </a:lnTo>
+                <a:lnTo>
+                  <a:pt x="680" y="2308"/>
+                </a:lnTo>
+                <a:lnTo>
+                  <a:pt x="688" y="2308"/>
+                </a:lnTo>
+                <a:lnTo>
+                  <a:pt x="696" y="2304"/>
+                </a:lnTo>
+                <a:lnTo>
+                  <a:pt x="704" y="2300"/>
+                </a:lnTo>
+                <a:lnTo>
+                  <a:pt x="710" y="2296"/>
+                </a:lnTo>
+                <a:lnTo>
+                  <a:pt x="886" y="2120"/>
+                </a:lnTo>
+                <a:lnTo>
+                  <a:pt x="3340" y="2120"/>
+                </a:lnTo>
+                <a:lnTo>
+                  <a:pt x="3340" y="2120"/>
+                </a:lnTo>
+                <a:lnTo>
+                  <a:pt x="3350" y="2120"/>
+                </a:lnTo>
+                <a:lnTo>
+                  <a:pt x="3358" y="2116"/>
+                </a:lnTo>
+                <a:lnTo>
+                  <a:pt x="3364" y="2112"/>
+                </a:lnTo>
+                <a:lnTo>
+                  <a:pt x="3372" y="2108"/>
+                </a:lnTo>
+                <a:lnTo>
+                  <a:pt x="3376" y="2100"/>
+                </a:lnTo>
+                <a:lnTo>
+                  <a:pt x="3380" y="2094"/>
+                </a:lnTo>
+                <a:lnTo>
+                  <a:pt x="3384" y="2086"/>
+                </a:lnTo>
+                <a:lnTo>
+                  <a:pt x="3384" y="2076"/>
+                </a:lnTo>
+                <a:lnTo>
+                  <a:pt x="3384" y="44"/>
+                </a:lnTo>
+                <a:lnTo>
+                  <a:pt x="3384" y="44"/>
+                </a:lnTo>
+                <a:lnTo>
+                  <a:pt x="3384" y="34"/>
+                </a:lnTo>
+                <a:lnTo>
+                  <a:pt x="3380" y="26"/>
+                </a:lnTo>
+                <a:lnTo>
+                  <a:pt x="3376" y="20"/>
+                </a:lnTo>
+                <a:lnTo>
+                  <a:pt x="3372" y="12"/>
+                </a:lnTo>
+                <a:lnTo>
+                  <a:pt x="3364" y="8"/>
+                </a:lnTo>
+                <a:lnTo>
+                  <a:pt x="3358" y="4"/>
+                </a:lnTo>
+                <a:lnTo>
+                  <a:pt x="3350" y="0"/>
+                </a:lnTo>
+                <a:lnTo>
+                  <a:pt x="3340" y="0"/>
+                </a:lnTo>
+                <a:lnTo>
+                  <a:pt x="3340" y="0"/>
+                </a:lnTo>
+                <a:close/>
+              </a:path>
+            </a:pathLst>
+          </a:custGeom>
+          <a:ln>
+            <a:solidFill>
+              <a:schemeClr val="accent1"/>
+            </a:solidFill>
+          </a:ln>
+        </p:spPr>
+        <p:style>
+          <a:lnRef idx="1">
+            <a:schemeClr val="accent1"/>
+          </a:lnRef>
+          <a:fillRef idx="3">
+            <a:schemeClr val="accent1"/>
+          </a:fillRef>
+          <a:effectRef idx="2">
+            <a:schemeClr val="accent1"/>
+          </a:effectRef>
+          <a:fontRef idx="minor">
+            <a:schemeClr val="lt1"/>
+          </a:fontRef>
+        </p:style>
+      </p:sp>
+      <p:sp>
+        <p:nvSpPr>
+          <p:cNvPr id="2" name="Title 1"/>
+          <p:cNvSpPr>
+            <a:spLocks noGrp="1"/>
+          </p:cNvSpPr>
+          <p:nvPr>
+            <p:ph type="title"/>
+          </p:nvPr>
+        </p:nvSpPr>
+        <p:spPr>
+          <a:xfrm>
+            <a:off x="850985" y="1238502"/>
+            <a:ext cx="5893840" cy="2645912"/>
+          </a:xfrm>
+        </p:spPr>
+        <p:txBody>
+          <a:bodyPr anchor="b"/>
+          <a:lstStyle>
+            <a:lvl1pPr algn="l">
+              <a:defRPr sz="4200" b="1" cap="none"/>
+            </a:lvl1pPr>
+          </a:lstStyle>
+          <a:p>
+            <a:r>
+              <a:rPr lang="en-US"/>
+              <a:t>Click to edit Master title style</a:t>
+            </a:r>
+            <a:endParaRPr lang="en-US" dirty="0"/>
+          </a:p>
+        </p:txBody>
+      </p:sp>
+      <p:sp>
+        <p:nvSpPr>
+          <p:cNvPr id="3" name="Text Placeholder 2"/>
+          <p:cNvSpPr>
+            <a:spLocks noGrp="1"/>
+          </p:cNvSpPr>
+          <p:nvPr>
+            <p:ph type="body" idx="1"/>
+          </p:nvPr>
+        </p:nvSpPr>
+        <p:spPr>
+          <a:xfrm>
+            <a:off x="853190" y="4443680"/>
+            <a:ext cx="5891636" cy="713241"/>
+          </a:xfrm>
+        </p:spPr>
+        <p:txBody>
+          <a:bodyPr anchor="t">
+            <a:noAutofit/>
+          </a:bodyPr>
+          <a:lstStyle>
+            <a:lvl1pPr marL="0" indent="0" algn="l">
+              <a:buNone/>
+              <a:defRPr sz="1800">
+                <a:solidFill>
+                  <a:schemeClr val="tx1"/>
+                </a:solidFill>
+              </a:defRPr>
+            </a:lvl1pPr>
+            <a:lvl2pPr marL="457200" indent="0">
+              <a:buNone/>
+              <a:defRPr sz="1800">
+                <a:solidFill>
+                  <a:schemeClr val="tx1">
+                    <a:tint val="75000"/>
+                  </a:schemeClr>
+                </a:solidFill>
+              </a:defRPr>
+            </a:lvl2pPr>
+            <a:lvl3pPr marL="914400" indent="0">
+              <a:buNone/>
+              <a:defRPr sz="1600">
+                <a:solidFill>
+                  <a:schemeClr val="tx1">
+                    <a:tint val="75000"/>
+                  </a:schemeClr>
+                </a:solidFill>
+              </a:defRPr>
+            </a:lvl3pPr>
+            <a:lvl4pPr marL="1371600" indent="0">
+              <a:buNone/>
+              <a:defRPr sz="1400">
+                <a:solidFill>
+                  <a:schemeClr val="tx1">
+                    <a:tint val="75000"/>
+                  </a:schemeClr>
+                </a:solidFill>
+              </a:defRPr>
+            </a:lvl4pPr>
+            <a:lvl5pPr marL="1828800" indent="0">
+              <a:buNone/>
+              <a:defRPr sz="1400">
+                <a:solidFill>
+                  <a:schemeClr val="tx1">
+                    <a:tint val="75000"/>
+                  </a:schemeClr>
+                </a:solidFill>
+              </a:defRPr>
+            </a:lvl5pPr>
+            <a:lvl6pPr marL="2286000" indent="0">
+              <a:buNone/>
+              <a:defRPr sz="1400">
+                <a:solidFill>
+                  <a:schemeClr val="tx1">
+                    <a:tint val="75000"/>
+                  </a:schemeClr>
+                </a:solidFill>
+              </a:defRPr>
+            </a:lvl6pPr>
+            <a:lvl7pPr marL="2743200" indent="0">
+              <a:buNone/>
+              <a:defRPr sz="1400">
+                <a:solidFill>
+                  <a:schemeClr val="tx1">
+                    <a:tint val="75000"/>
+                  </a:schemeClr>
+                </a:solidFill>
+              </a:defRPr>
+            </a:lvl7pPr>
+            <a:lvl8pPr marL="3200400" indent="0">
+              <a:buNone/>
+              <a:defRPr sz="1400">
+                <a:solidFill>
+                  <a:schemeClr val="tx1">
+                    <a:tint val="75000"/>
+                  </a:schemeClr>
+                </a:solidFill>
+              </a:defRPr>
+            </a:lvl8pPr>
+            <a:lvl9pPr marL="3657600" indent="0">
+              <a:buNone/>
+              <a:defRPr sz="1400">
+                <a:solidFill>
+                  <a:schemeClr val="tx1">
+                    <a:tint val="75000"/>
+                  </a:schemeClr>
+                </a:solidFill>
+              </a:defRPr>
+            </a:lvl9pPr>
+          </a:lstStyle>
+          <a:p>
+            <a:pPr lvl="0"/>
+            <a:r>
+              <a:rPr lang="en-US"/>
+              <a:t>Click to edit Master text styles</a:t>
+            </a:r>
+          </a:p>
+        </p:txBody>
+      </p:sp>
+      <p:sp>
+        <p:nvSpPr>
+          <p:cNvPr id="9" name="Text Placeholder 5"/>
+          <p:cNvSpPr>
+            <a:spLocks noGrp="1"/>
+          </p:cNvSpPr>
+          <p:nvPr>
+            <p:ph type="body" sz="quarter" idx="16"/>
+          </p:nvPr>
+        </p:nvSpPr>
+        <p:spPr>
+          <a:xfrm>
+            <a:off x="7574642" y="1081456"/>
+            <a:ext cx="3810001" cy="4075465"/>
+          </a:xfrm>
+        </p:spPr>
+        <p:txBody>
+          <a:bodyPr anchor="t"/>
+          <a:lstStyle>
+            <a:lvl1pPr marL="0" indent="0">
+              <a:buFontTx/>
+              <a:buNone/>
+              <a:defRPr/>
+            </a:lvl1pPr>
+          </a:lstStyle>
+          <a:p>
+            <a:pPr lvl="0"/>
+            <a:r>
+              <a:rPr lang="en-US"/>
+              <a:t>Click to edit Master text styles</a:t>
+            </a:r>
+          </a:p>
+        </p:txBody>
+      </p:sp>
+      <p:sp>
+        <p:nvSpPr>
+          <p:cNvPr id="4" name="Date Placeholder 3"/>
+          <p:cNvSpPr>
+            <a:spLocks noGrp="1"/>
+          </p:cNvSpPr>
+          <p:nvPr>
+            <p:ph type="dt" sz="half" idx="10"/>
+          </p:nvPr>
+        </p:nvSpPr>
+        <p:spPr/>
+        <p:txBody>
+          <a:bodyPr/>
+          <a:lstStyle/>
+          <a:p>
+            <a:fld id="{2660491B-4C7C-DB4F-95AC-F6744A00D18F}" type="datetimeFigureOut">
+              <a:rPr lang="en-PR" smtClean="0"/>
+              <a:t>4/13/26</a:t>
+            </a:fld>
+            <a:endParaRPr lang="en-PR"/>
+          </a:p>
+        </p:txBody>
+      </p:sp>
+      <p:sp>
+        <p:nvSpPr>
+          <p:cNvPr id="5" name="Footer Placeholder 4"/>
+          <p:cNvSpPr>
+            <a:spLocks noGrp="1"/>
+          </p:cNvSpPr>
+          <p:nvPr>
+            <p:ph type="ftr" sz="quarter" idx="11"/>
+          </p:nvPr>
+        </p:nvSpPr>
+        <p:spPr/>
+        <p:txBody>
+          <a:bodyPr/>
+          <a:lstStyle/>
+          <a:p>
+            <a:endParaRPr lang="en-PR"/>
+          </a:p>
+        </p:txBody>
+      </p:sp>
+      <p:sp>
+        <p:nvSpPr>
+          <p:cNvPr id="6" name="Slide Number Placeholder 5"/>
+          <p:cNvSpPr>
+            <a:spLocks noGrp="1"/>
+          </p:cNvSpPr>
+          <p:nvPr>
+            <p:ph type="sldNum" sz="quarter" idx="12"/>
+          </p:nvPr>
+        </p:nvSpPr>
+        <p:spPr/>
+        <p:txBody>
+          <a:bodyPr/>
+          <a:lstStyle/>
+          <a:p>
+            <a:fld id="{349C4F4D-F1AD-F54B-BB02-21FBD21EDCE1}" type="slidenum">
+              <a:rPr lang="en-PR" smtClean="0"/>
+              <a:t>‹#›</a:t>
+            </a:fld>
+            <a:endParaRPr lang="en-PR"/>
+          </a:p>
+        </p:txBody>
+      </p:sp>
+    </p:spTree>
+    <p:extLst>
+      <p:ext uri="{BB962C8B-B14F-4D97-AF65-F5344CB8AC3E}">
+        <p14:creationId xmlns:p14="http://schemas.microsoft.com/office/powerpoint/2010/main" val="2119662066"/>
+      </p:ext>
+    </p:extLst>
+  </p:cSld>
+  <p:clrMapOvr>
+    <a:masterClrMapping/>
+  </p:clrMapOvr>
+</p:sldLayout>
+</file>
+
+<file path=ppt/slideLayouts/slideLayout12.xml><?xml version="1.0" encoding="utf-8"?>
+<p:sldLayout xmlns:a="http://schemas.openxmlformats.org/drawingml/2006/main" xmlns:r="http://schemas.openxmlformats.org/officeDocument/2006/relationships" xmlns:p="http://schemas.openxmlformats.org/presentationml/2006/main" preserve="1">
+  <p:cSld name="Name Card">
+    <p:spTree>
+      <p:nvGrpSpPr>
+        <p:cNvPr id="1" name=""/>
+        <p:cNvGrpSpPr/>
+        <p:nvPr/>
+      </p:nvGrpSpPr>
+      <p:grpSpPr>
+        <a:xfrm>
+          <a:off x="0" y="0"/>
+          <a:ext cx="0" cy="0"/>
+          <a:chOff x="0" y="0"/>
+          <a:chExt cx="0" cy="0"/>
+        </a:xfrm>
+      </p:grpSpPr>
+      <p:sp>
+        <p:nvSpPr>
+          <p:cNvPr id="9" name="Freeform 6"/>
+          <p:cNvSpPr>
+            <a:spLocks noChangeAspect="1"/>
+          </p:cNvSpPr>
+          <p:nvPr/>
+        </p:nvSpPr>
+        <p:spPr bwMode="auto">
+          <a:xfrm>
+            <a:off x="1140884" y="2286585"/>
+            <a:ext cx="4895115" cy="2503972"/>
+          </a:xfrm>
+          <a:custGeom>
+            <a:avLst/>
+            <a:gdLst/>
+            <a:ahLst/>
+            <a:cxnLst/>
+            <a:rect l="0" t="0" r="r" b="b"/>
+            <a:pathLst>
+              <a:path w="3384" h="2308">
+                <a:moveTo>
+                  <a:pt x="3340" y="0"/>
+                </a:moveTo>
+                <a:lnTo>
+                  <a:pt x="44" y="0"/>
+                </a:lnTo>
+                <a:lnTo>
+                  <a:pt x="44" y="0"/>
+                </a:lnTo>
+                <a:lnTo>
+                  <a:pt x="34" y="0"/>
+                </a:lnTo>
+                <a:lnTo>
+                  <a:pt x="26" y="4"/>
+                </a:lnTo>
+                <a:lnTo>
+                  <a:pt x="20" y="8"/>
+                </a:lnTo>
+                <a:lnTo>
+                  <a:pt x="12" y="12"/>
+                </a:lnTo>
+                <a:lnTo>
+                  <a:pt x="8" y="20"/>
+                </a:lnTo>
+                <a:lnTo>
+                  <a:pt x="4" y="26"/>
+                </a:lnTo>
+                <a:lnTo>
+                  <a:pt x="0" y="34"/>
+                </a:lnTo>
+                <a:lnTo>
+                  <a:pt x="0" y="44"/>
+                </a:lnTo>
+                <a:lnTo>
+                  <a:pt x="0" y="2076"/>
+                </a:lnTo>
+                <a:lnTo>
+                  <a:pt x="0" y="2076"/>
+                </a:lnTo>
+                <a:lnTo>
+                  <a:pt x="0" y="2086"/>
+                </a:lnTo>
+                <a:lnTo>
+                  <a:pt x="4" y="2094"/>
+                </a:lnTo>
+                <a:lnTo>
+                  <a:pt x="8" y="2100"/>
+                </a:lnTo>
+                <a:lnTo>
+                  <a:pt x="12" y="2108"/>
+                </a:lnTo>
+                <a:lnTo>
+                  <a:pt x="20" y="2112"/>
+                </a:lnTo>
+                <a:lnTo>
+                  <a:pt x="26" y="2116"/>
+                </a:lnTo>
+                <a:lnTo>
+                  <a:pt x="34" y="2120"/>
+                </a:lnTo>
+                <a:lnTo>
+                  <a:pt x="44" y="2120"/>
+                </a:lnTo>
+                <a:lnTo>
+                  <a:pt x="474" y="2120"/>
+                </a:lnTo>
+                <a:lnTo>
+                  <a:pt x="650" y="2296"/>
+                </a:lnTo>
+                <a:lnTo>
+                  <a:pt x="650" y="2296"/>
+                </a:lnTo>
+                <a:lnTo>
+                  <a:pt x="656" y="2300"/>
+                </a:lnTo>
+                <a:lnTo>
+                  <a:pt x="664" y="2304"/>
+                </a:lnTo>
+                <a:lnTo>
+                  <a:pt x="672" y="2308"/>
+                </a:lnTo>
+                <a:lnTo>
+                  <a:pt x="680" y="2308"/>
+                </a:lnTo>
+                <a:lnTo>
+                  <a:pt x="688" y="2308"/>
+                </a:lnTo>
+                <a:lnTo>
+                  <a:pt x="696" y="2304"/>
+                </a:lnTo>
+                <a:lnTo>
+                  <a:pt x="704" y="2300"/>
+                </a:lnTo>
+                <a:lnTo>
+                  <a:pt x="710" y="2296"/>
+                </a:lnTo>
+                <a:lnTo>
+                  <a:pt x="886" y="2120"/>
+                </a:lnTo>
+                <a:lnTo>
+                  <a:pt x="3340" y="2120"/>
+                </a:lnTo>
+                <a:lnTo>
+                  <a:pt x="3340" y="2120"/>
+                </a:lnTo>
+                <a:lnTo>
+                  <a:pt x="3350" y="2120"/>
+                </a:lnTo>
+                <a:lnTo>
+                  <a:pt x="3358" y="2116"/>
+                </a:lnTo>
+                <a:lnTo>
+                  <a:pt x="3364" y="2112"/>
+                </a:lnTo>
+                <a:lnTo>
+                  <a:pt x="3372" y="2108"/>
+                </a:lnTo>
+                <a:lnTo>
+                  <a:pt x="3376" y="2100"/>
+                </a:lnTo>
+                <a:lnTo>
+                  <a:pt x="3380" y="2094"/>
+                </a:lnTo>
+                <a:lnTo>
+                  <a:pt x="3384" y="2086"/>
+                </a:lnTo>
+                <a:lnTo>
+                  <a:pt x="3384" y="2076"/>
+                </a:lnTo>
+                <a:lnTo>
+                  <a:pt x="3384" y="44"/>
+                </a:lnTo>
+                <a:lnTo>
+                  <a:pt x="3384" y="44"/>
+                </a:lnTo>
+                <a:lnTo>
+                  <a:pt x="3384" y="34"/>
+                </a:lnTo>
+                <a:lnTo>
+                  <a:pt x="3380" y="26"/>
+                </a:lnTo>
+                <a:lnTo>
+                  <a:pt x="3376" y="20"/>
+                </a:lnTo>
+                <a:lnTo>
+                  <a:pt x="3372" y="12"/>
+                </a:lnTo>
+                <a:lnTo>
+                  <a:pt x="3364" y="8"/>
+                </a:lnTo>
+                <a:lnTo>
+                  <a:pt x="3358" y="4"/>
+                </a:lnTo>
+                <a:lnTo>
+                  <a:pt x="3350" y="0"/>
+                </a:lnTo>
+                <a:lnTo>
+                  <a:pt x="3340" y="0"/>
+                </a:lnTo>
+                <a:lnTo>
+                  <a:pt x="3340" y="0"/>
+                </a:lnTo>
+                <a:close/>
+              </a:path>
+            </a:pathLst>
+          </a:custGeom>
+          <a:ln>
+            <a:solidFill>
+              <a:schemeClr val="accent1"/>
+            </a:solidFill>
+          </a:ln>
+        </p:spPr>
+        <p:style>
+          <a:lnRef idx="1">
+            <a:schemeClr val="accent1"/>
+          </a:lnRef>
+          <a:fillRef idx="3">
+            <a:schemeClr val="accent1"/>
+          </a:fillRef>
+          <a:effectRef idx="2">
+            <a:schemeClr val="accent1"/>
+          </a:effectRef>
+          <a:fontRef idx="minor">
+            <a:schemeClr val="lt1"/>
+          </a:fontRef>
+        </p:style>
+      </p:sp>
+      <p:sp>
+        <p:nvSpPr>
+          <p:cNvPr id="38" name="Title 1"/>
+          <p:cNvSpPr>
+            <a:spLocks noGrp="1"/>
+          </p:cNvSpPr>
+          <p:nvPr>
+            <p:ph type="title"/>
+          </p:nvPr>
+        </p:nvSpPr>
+        <p:spPr>
+          <a:xfrm>
+            <a:off x="1357089" y="2435957"/>
+            <a:ext cx="4382521" cy="2007789"/>
+          </a:xfrm>
+        </p:spPr>
+        <p:txBody>
+          <a:bodyPr/>
+          <a:lstStyle>
+            <a:lvl1pPr>
+              <a:defRPr sz="3200"/>
+            </a:lvl1pPr>
+          </a:lstStyle>
+          <a:p>
+            <a:r>
+              <a:rPr lang="en-US"/>
+              <a:t>Click to edit Master title style</a:t>
+            </a:r>
+            <a:endParaRPr lang="en-US" dirty="0"/>
+          </a:p>
+        </p:txBody>
+      </p:sp>
+      <p:sp>
+        <p:nvSpPr>
+          <p:cNvPr id="6" name="Text Placeholder 5"/>
+          <p:cNvSpPr>
+            <a:spLocks noGrp="1"/>
+          </p:cNvSpPr>
+          <p:nvPr>
+            <p:ph type="body" sz="quarter" idx="16"/>
+          </p:nvPr>
+        </p:nvSpPr>
+        <p:spPr>
+          <a:xfrm>
+            <a:off x="6156000" y="2286000"/>
+            <a:ext cx="4880300" cy="2295525"/>
+          </a:xfrm>
+        </p:spPr>
+        <p:txBody>
+          <a:bodyPr anchor="t"/>
+          <a:lstStyle>
+            <a:lvl1pPr marL="0" indent="0">
+              <a:buFontTx/>
+              <a:buNone/>
+              <a:defRPr/>
+            </a:lvl1pPr>
+          </a:lstStyle>
+          <a:p>
+            <a:pPr lvl="0"/>
+            <a:r>
+              <a:rPr lang="en-US"/>
+              <a:t>Click to edit Master text styles</a:t>
+            </a:r>
+          </a:p>
+        </p:txBody>
+      </p:sp>
+      <p:sp>
+        <p:nvSpPr>
+          <p:cNvPr id="2" name="Date Placeholder 1"/>
+          <p:cNvSpPr>
+            <a:spLocks noGrp="1"/>
+          </p:cNvSpPr>
+          <p:nvPr>
+            <p:ph type="dt" sz="half" idx="10"/>
+          </p:nvPr>
+        </p:nvSpPr>
+        <p:spPr/>
+        <p:txBody>
+          <a:bodyPr/>
+          <a:lstStyle/>
+          <a:p>
+            <a:fld id="{2660491B-4C7C-DB4F-95AC-F6744A00D18F}" type="datetimeFigureOut">
+              <a:rPr lang="en-PR" smtClean="0"/>
+              <a:t>4/13/26</a:t>
+            </a:fld>
+            <a:endParaRPr lang="en-PR"/>
+          </a:p>
+        </p:txBody>
+      </p:sp>
+      <p:sp>
+        <p:nvSpPr>
+          <p:cNvPr id="3" name="Footer Placeholder 2"/>
+          <p:cNvSpPr>
+            <a:spLocks noGrp="1"/>
+          </p:cNvSpPr>
+          <p:nvPr>
+            <p:ph type="ftr" sz="quarter" idx="11"/>
+          </p:nvPr>
+        </p:nvSpPr>
+        <p:spPr/>
+        <p:txBody>
+          <a:bodyPr/>
+          <a:lstStyle/>
+          <a:p>
+            <a:endParaRPr lang="en-PR"/>
+          </a:p>
+        </p:txBody>
+      </p:sp>
+      <p:sp>
+        <p:nvSpPr>
+          <p:cNvPr id="4" name="Slide Number Placeholder 3"/>
+          <p:cNvSpPr>
+            <a:spLocks noGrp="1"/>
+          </p:cNvSpPr>
+          <p:nvPr>
+            <p:ph type="sldNum" sz="quarter" idx="12"/>
+          </p:nvPr>
+        </p:nvSpPr>
+        <p:spPr/>
+        <p:txBody>
+          <a:bodyPr/>
+          <a:lstStyle/>
+          <a:p>
+            <a:fld id="{349C4F4D-F1AD-F54B-BB02-21FBD21EDCE1}" type="slidenum">
+              <a:rPr lang="en-PR" smtClean="0"/>
+              <a:t>‹#›</a:t>
+            </a:fld>
+            <a:endParaRPr lang="en-PR"/>
+          </a:p>
+        </p:txBody>
+      </p:sp>
+    </p:spTree>
+    <p:extLst>
+      <p:ext uri="{BB962C8B-B14F-4D97-AF65-F5344CB8AC3E}">
+        <p14:creationId xmlns:p14="http://schemas.microsoft.com/office/powerpoint/2010/main" val="4108188059"/>
+      </p:ext>
+    </p:extLst>
+  </p:cSld>
+  <p:clrMapOvr>
+    <a:masterClrMapping/>
+  </p:clrMapOvr>
+</p:sldLayout>
+</file>
+
+<file path=ppt/slideLayouts/slideLayout13.xml><?xml version="1.0" encoding="utf-8"?>
 <p:sldLayout xmlns:a="http://schemas.openxmlformats.org/drawingml/2006/main" xmlns:r="http://schemas.openxmlformats.org/officeDocument/2006/relationships" xmlns:p="http://schemas.openxmlformats.org/presentationml/2006/main" type="vertTx" preserve="1">
   <p:cSld name="Title and Vertical Text">
     <p:spTree>
@@ -357,13 +1663,110 @@
       </p:grpSpPr>
       <p:sp>
         <p:nvSpPr>
-          <p:cNvPr id="2" name="Title 1">
-            <a:extLst>
-              <a:ext uri="{FF2B5EF4-FFF2-40B4-BE49-F238E27FC236}">
-                <a16:creationId xmlns:a16="http://schemas.microsoft.com/office/drawing/2014/main" id="{E0DDADB4-E398-CED3-25FF-A34141BCA852}"/>
-              </a:ext>
-            </a:extLst>
-          </p:cNvPr>
+          <p:cNvPr id="7" name="Freeform 6"/>
+          <p:cNvSpPr/>
+          <p:nvPr/>
+        </p:nvSpPr>
+        <p:spPr bwMode="auto">
+          <a:xfrm>
+            <a:off x="0" y="0"/>
+            <a:ext cx="12192000" cy="2185988"/>
+          </a:xfrm>
+          <a:custGeom>
+            <a:avLst/>
+            <a:gdLst/>
+            <a:ahLst/>
+            <a:cxnLst/>
+            <a:rect l="0" t="0" r="r" b="b"/>
+            <a:pathLst>
+              <a:path w="5760" h="1377">
+                <a:moveTo>
+                  <a:pt x="5760" y="0"/>
+                </a:moveTo>
+                <a:lnTo>
+                  <a:pt x="0" y="0"/>
+                </a:lnTo>
+                <a:lnTo>
+                  <a:pt x="0" y="1189"/>
+                </a:lnTo>
+                <a:lnTo>
+                  <a:pt x="943" y="1189"/>
+                </a:lnTo>
+                <a:lnTo>
+                  <a:pt x="1123" y="1369"/>
+                </a:lnTo>
+                <a:lnTo>
+                  <a:pt x="1123" y="1369"/>
+                </a:lnTo>
+                <a:lnTo>
+                  <a:pt x="1127" y="1371"/>
+                </a:lnTo>
+                <a:lnTo>
+                  <a:pt x="1133" y="1374"/>
+                </a:lnTo>
+                <a:lnTo>
+                  <a:pt x="1139" y="1377"/>
+                </a:lnTo>
+                <a:lnTo>
+                  <a:pt x="1144" y="1377"/>
+                </a:lnTo>
+                <a:lnTo>
+                  <a:pt x="1150" y="1377"/>
+                </a:lnTo>
+                <a:lnTo>
+                  <a:pt x="1155" y="1374"/>
+                </a:lnTo>
+                <a:lnTo>
+                  <a:pt x="1161" y="1371"/>
+                </a:lnTo>
+                <a:lnTo>
+                  <a:pt x="1165" y="1369"/>
+                </a:lnTo>
+                <a:lnTo>
+                  <a:pt x="1345" y="1189"/>
+                </a:lnTo>
+                <a:lnTo>
+                  <a:pt x="5760" y="1189"/>
+                </a:lnTo>
+                <a:lnTo>
+                  <a:pt x="5760" y="0"/>
+                </a:lnTo>
+                <a:close/>
+              </a:path>
+            </a:pathLst>
+          </a:custGeom>
+          <a:ln/>
+          <a:extLst>
+            <a:ext uri="{91240B29-F687-4f45-9708-019B960494DF}">
+              <a14:hiddenLine xmlns:a14="http://schemas.microsoft.com/office/drawing/2010/main" xmlns="" w="9525">
+                <a:solidFill>
+                  <a:srgbClr val="000000"/>
+                </a:solidFill>
+                <a:round/>
+                <a:headEnd/>
+                <a:tailEnd/>
+              </a14:hiddenLine>
+            </a:ext>
+          </a:extLst>
+        </p:spPr>
+        <p:style>
+          <a:lnRef idx="1">
+            <a:schemeClr val="accent1"/>
+          </a:lnRef>
+          <a:fillRef idx="3">
+            <a:schemeClr val="accent1"/>
+          </a:fillRef>
+          <a:effectRef idx="2">
+            <a:schemeClr val="accent1"/>
+          </a:effectRef>
+          <a:fontRef idx="minor">
+            <a:schemeClr val="lt1"/>
+          </a:fontRef>
+        </p:style>
+      </p:sp>
+      <p:sp>
+        <p:nvSpPr>
+          <p:cNvPr id="2" name="Title 1"/>
           <p:cNvSpPr>
             <a:spLocks noGrp="1"/>
           </p:cNvSpPr>
@@ -380,19 +1783,13 @@
               <a:rPr lang="en-US"/>
               <a:t>Click to edit Master title style</a:t>
             </a:r>
-            <a:endParaRPr lang="en-PR"/>
-          </a:p>
-        </p:txBody>
-      </p:sp>
-      <p:sp>
-        <p:nvSpPr>
-          <p:cNvPr id="3" name="Vertical Text Placeholder 2">
-            <a:extLst>
-              <a:ext uri="{FF2B5EF4-FFF2-40B4-BE49-F238E27FC236}">
-                <a16:creationId xmlns:a16="http://schemas.microsoft.com/office/drawing/2014/main" id="{6127B60B-2BCB-9781-9C37-54A5DF3E839A}"/>
-              </a:ext>
-            </a:extLst>
-          </p:cNvPr>
+            <a:endParaRPr lang="en-US" dirty="0"/>
+          </a:p>
+        </p:txBody>
+      </p:sp>
+      <p:sp>
+        <p:nvSpPr>
+          <p:cNvPr id="3" name="Vertical Text Placeholder 2"/>
           <p:cNvSpPr>
             <a:spLocks noGrp="1"/>
           </p:cNvSpPr>
@@ -402,7 +1799,7 @@
         </p:nvSpPr>
         <p:spPr/>
         <p:txBody>
-          <a:bodyPr vert="eaVert"/>
+          <a:bodyPr vert="eaVert" anchor="t"/>
           <a:lstStyle/>
           <a:p>
             <a:pPr lvl="0"/>
@@ -438,19 +1835,13 @@
               <a:rPr lang="en-US"/>
               <a:t>Fifth level</a:t>
             </a:r>
-            <a:endParaRPr lang="en-PR"/>
-          </a:p>
-        </p:txBody>
-      </p:sp>
-      <p:sp>
-        <p:nvSpPr>
-          <p:cNvPr id="4" name="Date Placeholder 3">
-            <a:extLst>
-              <a:ext uri="{FF2B5EF4-FFF2-40B4-BE49-F238E27FC236}">
-                <a16:creationId xmlns:a16="http://schemas.microsoft.com/office/drawing/2014/main" id="{D274AF57-9215-B940-F180-52C38A4EC71F}"/>
-              </a:ext>
-            </a:extLst>
-          </p:cNvPr>
+            <a:endParaRPr lang="en-US" dirty="0"/>
+          </a:p>
+        </p:txBody>
+      </p:sp>
+      <p:sp>
+        <p:nvSpPr>
+          <p:cNvPr id="4" name="Date Placeholder 3"/>
           <p:cNvSpPr>
             <a:spLocks noGrp="1"/>
           </p:cNvSpPr>
@@ -465,7 +1856,7 @@
           <a:p>
             <a:fld id="{2660491B-4C7C-DB4F-95AC-F6744A00D18F}" type="datetimeFigureOut">
               <a:rPr lang="en-PR" smtClean="0"/>
-              <a:t>4/12/26</a:t>
+              <a:t>4/13/26</a:t>
             </a:fld>
             <a:endParaRPr lang="en-PR"/>
           </a:p>
@@ -473,13 +1864,7 @@
       </p:sp>
       <p:sp>
         <p:nvSpPr>
-          <p:cNvPr id="5" name="Footer Placeholder 4">
-            <a:extLst>
-              <a:ext uri="{FF2B5EF4-FFF2-40B4-BE49-F238E27FC236}">
-                <a16:creationId xmlns:a16="http://schemas.microsoft.com/office/drawing/2014/main" id="{D47D2C0D-F350-5FB1-5A97-EB2DB17F1996}"/>
-              </a:ext>
-            </a:extLst>
-          </p:cNvPr>
+          <p:cNvPr id="5" name="Footer Placeholder 4"/>
           <p:cNvSpPr>
             <a:spLocks noGrp="1"/>
           </p:cNvSpPr>
@@ -498,13 +1883,7 @@
       </p:sp>
       <p:sp>
         <p:nvSpPr>
-          <p:cNvPr id="6" name="Slide Number Placeholder 5">
-            <a:extLst>
-              <a:ext uri="{FF2B5EF4-FFF2-40B4-BE49-F238E27FC236}">
-                <a16:creationId xmlns:a16="http://schemas.microsoft.com/office/drawing/2014/main" id="{7EB02343-4010-27D0-D20A-6A7C3EC8C255}"/>
-              </a:ext>
-            </a:extLst>
-          </p:cNvPr>
+          <p:cNvPr id="6" name="Slide Number Placeholder 5"/>
           <p:cNvSpPr>
             <a:spLocks noGrp="1"/>
           </p:cNvSpPr>
@@ -528,7 +1907,7 @@
     </p:spTree>
     <p:extLst>
       <p:ext uri="{BB962C8B-B14F-4D97-AF65-F5344CB8AC3E}">
-        <p14:creationId xmlns:p14="http://schemas.microsoft.com/office/powerpoint/2010/main" val="4236270407"/>
+        <p14:creationId xmlns:p14="http://schemas.microsoft.com/office/powerpoint/2010/main" val="960864168"/>
       </p:ext>
     </p:extLst>
   </p:cSld>
@@ -538,7 +1917,7 @@
 </p:sldLayout>
 </file>
 
-<file path=ppt/slideLayouts/slideLayout11.xml><?xml version="1.0" encoding="utf-8"?>
+<file path=ppt/slideLayouts/slideLayout14.xml><?xml version="1.0" encoding="utf-8"?>
 <p:sldLayout xmlns:a="http://schemas.openxmlformats.org/drawingml/2006/main" xmlns:r="http://schemas.openxmlformats.org/officeDocument/2006/relationships" xmlns:p="http://schemas.openxmlformats.org/presentationml/2006/main" type="vertTitleAndTx" preserve="1">
   <p:cSld name="Vertical Title and Text">
     <p:spTree>
@@ -557,13 +1936,112 @@
       </p:grpSpPr>
       <p:sp>
         <p:nvSpPr>
-          <p:cNvPr id="2" name="Vertical Title 1">
-            <a:extLst>
-              <a:ext uri="{FF2B5EF4-FFF2-40B4-BE49-F238E27FC236}">
-                <a16:creationId xmlns:a16="http://schemas.microsoft.com/office/drawing/2014/main" id="{8B31EF34-D87D-8DB5-CD40-B6CAD7E7985E}"/>
-              </a:ext>
-            </a:extLst>
-          </p:cNvPr>
+          <p:cNvPr id="12" name="Freeform 6"/>
+          <p:cNvSpPr>
+            <a:spLocks noChangeAspect="1"/>
+          </p:cNvSpPr>
+          <p:nvPr/>
+        </p:nvSpPr>
+        <p:spPr bwMode="auto">
+          <a:xfrm>
+            <a:off x="7669651" y="446089"/>
+            <a:ext cx="4522349" cy="5414962"/>
+          </a:xfrm>
+          <a:custGeom>
+            <a:avLst/>
+            <a:gdLst/>
+            <a:ahLst/>
+            <a:cxnLst/>
+            <a:rect l="0" t="0" r="r" b="b"/>
+            <a:pathLst>
+              <a:path w="2879" h="4320">
+                <a:moveTo>
+                  <a:pt x="183" y="0"/>
+                </a:moveTo>
+                <a:lnTo>
+                  <a:pt x="183" y="1197"/>
+                </a:lnTo>
+                <a:lnTo>
+                  <a:pt x="8" y="1372"/>
+                </a:lnTo>
+                <a:lnTo>
+                  <a:pt x="8" y="1372"/>
+                </a:lnTo>
+                <a:lnTo>
+                  <a:pt x="6" y="1376"/>
+                </a:lnTo>
+                <a:lnTo>
+                  <a:pt x="3" y="1382"/>
+                </a:lnTo>
+                <a:lnTo>
+                  <a:pt x="0" y="1387"/>
+                </a:lnTo>
+                <a:lnTo>
+                  <a:pt x="0" y="1393"/>
+                </a:lnTo>
+                <a:lnTo>
+                  <a:pt x="0" y="1399"/>
+                </a:lnTo>
+                <a:lnTo>
+                  <a:pt x="3" y="1404"/>
+                </a:lnTo>
+                <a:lnTo>
+                  <a:pt x="6" y="1410"/>
+                </a:lnTo>
+                <a:lnTo>
+                  <a:pt x="8" y="1414"/>
+                </a:lnTo>
+                <a:lnTo>
+                  <a:pt x="183" y="1589"/>
+                </a:lnTo>
+                <a:lnTo>
+                  <a:pt x="183" y="4320"/>
+                </a:lnTo>
+                <a:lnTo>
+                  <a:pt x="2879" y="4320"/>
+                </a:lnTo>
+                <a:lnTo>
+                  <a:pt x="2879" y="0"/>
+                </a:lnTo>
+                <a:lnTo>
+                  <a:pt x="183" y="0"/>
+                </a:lnTo>
+                <a:close/>
+              </a:path>
+            </a:pathLst>
+          </a:custGeom>
+          <a:ln/>
+          <a:extLst>
+            <a:ext uri="{91240B29-F687-4f45-9708-019B960494DF}">
+              <a14:hiddenLine xmlns:a14="http://schemas.microsoft.com/office/drawing/2010/main" xmlns="" w="9525">
+                <a:solidFill>
+                  <a:srgbClr val="000000"/>
+                </a:solidFill>
+                <a:round/>
+                <a:headEnd/>
+                <a:tailEnd/>
+              </a14:hiddenLine>
+            </a:ext>
+          </a:extLst>
+        </p:spPr>
+        <p:style>
+          <a:lnRef idx="1">
+            <a:schemeClr val="accent1"/>
+          </a:lnRef>
+          <a:fillRef idx="3">
+            <a:schemeClr val="accent1"/>
+          </a:fillRef>
+          <a:effectRef idx="2">
+            <a:schemeClr val="accent1"/>
+          </a:effectRef>
+          <a:fontRef idx="minor">
+            <a:schemeClr val="lt1"/>
+          </a:fontRef>
+        </p:style>
+      </p:sp>
+      <p:sp>
+        <p:nvSpPr>
+          <p:cNvPr id="2" name="Vertical Title 1"/>
           <p:cNvSpPr>
             <a:spLocks noGrp="1"/>
           </p:cNvSpPr>
@@ -573,8 +2051,8 @@
         </p:nvSpPr>
         <p:spPr>
           <a:xfrm>
-            <a:off x="8724900" y="365125"/>
-            <a:ext cx="2628900" cy="5811838"/>
+            <a:off x="8183540" y="586171"/>
+            <a:ext cx="2494791" cy="5134798"/>
           </a:xfrm>
         </p:spPr>
         <p:txBody>
@@ -585,19 +2063,13 @@
               <a:rPr lang="en-US"/>
               <a:t>Click to edit Master title style</a:t>
             </a:r>
-            <a:endParaRPr lang="en-PR"/>
-          </a:p>
-        </p:txBody>
-      </p:sp>
-      <p:sp>
-        <p:nvSpPr>
-          <p:cNvPr id="3" name="Vertical Text Placeholder 2">
-            <a:extLst>
-              <a:ext uri="{FF2B5EF4-FFF2-40B4-BE49-F238E27FC236}">
-                <a16:creationId xmlns:a16="http://schemas.microsoft.com/office/drawing/2014/main" id="{F4186ABA-A358-8CAA-FEE0-B117C90D16B6}"/>
-              </a:ext>
-            </a:extLst>
-          </p:cNvPr>
+            <a:endParaRPr lang="en-US" dirty="0"/>
+          </a:p>
+        </p:txBody>
+      </p:sp>
+      <p:sp>
+        <p:nvSpPr>
+          <p:cNvPr id="3" name="Vertical Text Placeholder 2"/>
           <p:cNvSpPr>
             <a:spLocks noGrp="1"/>
           </p:cNvSpPr>
@@ -607,12 +2079,12 @@
         </p:nvSpPr>
         <p:spPr>
           <a:xfrm>
-            <a:off x="838200" y="365125"/>
-            <a:ext cx="7734300" cy="5811838"/>
+            <a:off x="810001" y="446089"/>
+            <a:ext cx="6611540" cy="5414962"/>
           </a:xfrm>
         </p:spPr>
         <p:txBody>
-          <a:bodyPr vert="eaVert"/>
+          <a:bodyPr vert="eaVert" anchor="t"/>
           <a:lstStyle/>
           <a:p>
             <a:pPr lvl="0"/>
@@ -648,19 +2120,13 @@
               <a:rPr lang="en-US"/>
               <a:t>Fifth level</a:t>
             </a:r>
-            <a:endParaRPr lang="en-PR"/>
-          </a:p>
-        </p:txBody>
-      </p:sp>
-      <p:sp>
-        <p:nvSpPr>
-          <p:cNvPr id="4" name="Date Placeholder 3">
-            <a:extLst>
-              <a:ext uri="{FF2B5EF4-FFF2-40B4-BE49-F238E27FC236}">
-                <a16:creationId xmlns:a16="http://schemas.microsoft.com/office/drawing/2014/main" id="{F8935DF9-0075-645E-E3F3-8CF908CAC181}"/>
-              </a:ext>
-            </a:extLst>
-          </p:cNvPr>
+            <a:endParaRPr lang="en-US" dirty="0"/>
+          </a:p>
+        </p:txBody>
+      </p:sp>
+      <p:sp>
+        <p:nvSpPr>
+          <p:cNvPr id="4" name="Date Placeholder 3"/>
           <p:cNvSpPr>
             <a:spLocks noGrp="1"/>
           </p:cNvSpPr>
@@ -675,7 +2141,7 @@
           <a:p>
             <a:fld id="{2660491B-4C7C-DB4F-95AC-F6744A00D18F}" type="datetimeFigureOut">
               <a:rPr lang="en-PR" smtClean="0"/>
-              <a:t>4/12/26</a:t>
+              <a:t>4/13/26</a:t>
             </a:fld>
             <a:endParaRPr lang="en-PR"/>
           </a:p>
@@ -683,13 +2149,7 @@
       </p:sp>
       <p:sp>
         <p:nvSpPr>
-          <p:cNvPr id="5" name="Footer Placeholder 4">
-            <a:extLst>
-              <a:ext uri="{FF2B5EF4-FFF2-40B4-BE49-F238E27FC236}">
-                <a16:creationId xmlns:a16="http://schemas.microsoft.com/office/drawing/2014/main" id="{DFE8D8DF-F21D-7EDD-10D6-4F34ACF4C9F6}"/>
-              </a:ext>
-            </a:extLst>
-          </p:cNvPr>
+          <p:cNvPr id="5" name="Footer Placeholder 4"/>
           <p:cNvSpPr>
             <a:spLocks noGrp="1"/>
           </p:cNvSpPr>
@@ -708,13 +2168,7 @@
       </p:sp>
       <p:sp>
         <p:nvSpPr>
-          <p:cNvPr id="6" name="Slide Number Placeholder 5">
-            <a:extLst>
-              <a:ext uri="{FF2B5EF4-FFF2-40B4-BE49-F238E27FC236}">
-                <a16:creationId xmlns:a16="http://schemas.microsoft.com/office/drawing/2014/main" id="{4165F576-6604-6298-EBD5-114EA2C490A2}"/>
-              </a:ext>
-            </a:extLst>
-          </p:cNvPr>
+          <p:cNvPr id="6" name="Slide Number Placeholder 5"/>
           <p:cNvSpPr>
             <a:spLocks noGrp="1"/>
           </p:cNvSpPr>
@@ -738,7 +2192,7 @@
     </p:spTree>
     <p:extLst>
       <p:ext uri="{BB962C8B-B14F-4D97-AF65-F5344CB8AC3E}">
-        <p14:creationId xmlns:p14="http://schemas.microsoft.com/office/powerpoint/2010/main" val="1956055827"/>
+        <p14:creationId xmlns:p14="http://schemas.microsoft.com/office/powerpoint/2010/main" val="2564686151"/>
       </p:ext>
     </p:extLst>
   </p:cSld>
@@ -767,13 +2221,110 @@
       </p:grpSpPr>
       <p:sp>
         <p:nvSpPr>
-          <p:cNvPr id="2" name="Title 1">
-            <a:extLst>
-              <a:ext uri="{FF2B5EF4-FFF2-40B4-BE49-F238E27FC236}">
-                <a16:creationId xmlns:a16="http://schemas.microsoft.com/office/drawing/2014/main" id="{75ECD0F6-5FFE-DDEB-ED45-D8581B5ACAB5}"/>
-              </a:ext>
-            </a:extLst>
-          </p:cNvPr>
+          <p:cNvPr id="11" name="Freeform 6"/>
+          <p:cNvSpPr/>
+          <p:nvPr/>
+        </p:nvSpPr>
+        <p:spPr bwMode="auto">
+          <a:xfrm>
+            <a:off x="0" y="0"/>
+            <a:ext cx="12192000" cy="2185988"/>
+          </a:xfrm>
+          <a:custGeom>
+            <a:avLst/>
+            <a:gdLst/>
+            <a:ahLst/>
+            <a:cxnLst/>
+            <a:rect l="0" t="0" r="r" b="b"/>
+            <a:pathLst>
+              <a:path w="5760" h="1377">
+                <a:moveTo>
+                  <a:pt x="5760" y="0"/>
+                </a:moveTo>
+                <a:lnTo>
+                  <a:pt x="0" y="0"/>
+                </a:lnTo>
+                <a:lnTo>
+                  <a:pt x="0" y="1189"/>
+                </a:lnTo>
+                <a:lnTo>
+                  <a:pt x="943" y="1189"/>
+                </a:lnTo>
+                <a:lnTo>
+                  <a:pt x="1123" y="1369"/>
+                </a:lnTo>
+                <a:lnTo>
+                  <a:pt x="1123" y="1369"/>
+                </a:lnTo>
+                <a:lnTo>
+                  <a:pt x="1127" y="1371"/>
+                </a:lnTo>
+                <a:lnTo>
+                  <a:pt x="1133" y="1374"/>
+                </a:lnTo>
+                <a:lnTo>
+                  <a:pt x="1139" y="1377"/>
+                </a:lnTo>
+                <a:lnTo>
+                  <a:pt x="1144" y="1377"/>
+                </a:lnTo>
+                <a:lnTo>
+                  <a:pt x="1150" y="1377"/>
+                </a:lnTo>
+                <a:lnTo>
+                  <a:pt x="1155" y="1374"/>
+                </a:lnTo>
+                <a:lnTo>
+                  <a:pt x="1161" y="1371"/>
+                </a:lnTo>
+                <a:lnTo>
+                  <a:pt x="1165" y="1369"/>
+                </a:lnTo>
+                <a:lnTo>
+                  <a:pt x="1345" y="1189"/>
+                </a:lnTo>
+                <a:lnTo>
+                  <a:pt x="5760" y="1189"/>
+                </a:lnTo>
+                <a:lnTo>
+                  <a:pt x="5760" y="0"/>
+                </a:lnTo>
+                <a:close/>
+              </a:path>
+            </a:pathLst>
+          </a:custGeom>
+          <a:ln/>
+          <a:extLst>
+            <a:ext uri="{91240B29-F687-4f45-9708-019B960494DF}">
+              <a14:hiddenLine xmlns:a14="http://schemas.microsoft.com/office/drawing/2010/main" xmlns="" w="9525">
+                <a:solidFill>
+                  <a:srgbClr val="000000"/>
+                </a:solidFill>
+                <a:round/>
+                <a:headEnd/>
+                <a:tailEnd/>
+              </a14:hiddenLine>
+            </a:ext>
+          </a:extLst>
+        </p:spPr>
+        <p:style>
+          <a:lnRef idx="1">
+            <a:schemeClr val="accent1"/>
+          </a:lnRef>
+          <a:fillRef idx="3">
+            <a:schemeClr val="accent1"/>
+          </a:fillRef>
+          <a:effectRef idx="2">
+            <a:schemeClr val="accent1"/>
+          </a:effectRef>
+          <a:fontRef idx="minor">
+            <a:schemeClr val="lt1"/>
+          </a:fontRef>
+        </p:style>
+      </p:sp>
+      <p:sp>
+        <p:nvSpPr>
+          <p:cNvPr id="2" name="Title 1"/>
           <p:cNvSpPr>
             <a:spLocks noGrp="1"/>
           </p:cNvSpPr>
@@ -781,7 +2332,12 @@
             <p:ph type="title"/>
           </p:nvPr>
         </p:nvSpPr>
-        <p:spPr/>
+        <p:spPr>
+          <a:xfrm>
+            <a:off x="810000" y="447188"/>
+            <a:ext cx="10571998" cy="970450"/>
+          </a:xfrm>
+        </p:spPr>
         <p:txBody>
           <a:bodyPr/>
           <a:lstStyle/>
@@ -790,19 +2346,13 @@
               <a:rPr lang="en-US"/>
               <a:t>Click to edit Master title style</a:t>
             </a:r>
-            <a:endParaRPr lang="en-PR"/>
-          </a:p>
-        </p:txBody>
-      </p:sp>
-      <p:sp>
-        <p:nvSpPr>
-          <p:cNvPr id="3" name="Content Placeholder 2">
-            <a:extLst>
-              <a:ext uri="{FF2B5EF4-FFF2-40B4-BE49-F238E27FC236}">
-                <a16:creationId xmlns:a16="http://schemas.microsoft.com/office/drawing/2014/main" id="{B59CEB0C-4340-39E4-7739-50BCD32BA2CE}"/>
-              </a:ext>
-            </a:extLst>
-          </p:cNvPr>
+            <a:endParaRPr lang="en-US" dirty="0"/>
+          </a:p>
+        </p:txBody>
+      </p:sp>
+      <p:sp>
+        <p:nvSpPr>
+          <p:cNvPr id="3" name="Content Placeholder 2"/>
           <p:cNvSpPr>
             <a:spLocks noGrp="1"/>
           </p:cNvSpPr>
@@ -810,7 +2360,12 @@
             <p:ph idx="1"/>
           </p:nvPr>
         </p:nvSpPr>
-        <p:spPr/>
+        <p:spPr>
+          <a:xfrm>
+            <a:off x="818712" y="2222287"/>
+            <a:ext cx="10554574" cy="3636511"/>
+          </a:xfrm>
+        </p:spPr>
         <p:txBody>
           <a:bodyPr/>
           <a:lstStyle/>
@@ -848,19 +2403,13 @@
               <a:rPr lang="en-US"/>
               <a:t>Fifth level</a:t>
             </a:r>
-            <a:endParaRPr lang="en-PR"/>
-          </a:p>
-        </p:txBody>
-      </p:sp>
-      <p:sp>
-        <p:nvSpPr>
-          <p:cNvPr id="4" name="Date Placeholder 3">
-            <a:extLst>
-              <a:ext uri="{FF2B5EF4-FFF2-40B4-BE49-F238E27FC236}">
-                <a16:creationId xmlns:a16="http://schemas.microsoft.com/office/drawing/2014/main" id="{ABFA83B6-DCD1-0A84-340F-0F6B24BC3AC5}"/>
-              </a:ext>
-            </a:extLst>
-          </p:cNvPr>
+            <a:endParaRPr lang="en-US" dirty="0"/>
+          </a:p>
+        </p:txBody>
+      </p:sp>
+      <p:sp>
+        <p:nvSpPr>
+          <p:cNvPr id="4" name="Date Placeholder 3"/>
           <p:cNvSpPr>
             <a:spLocks noGrp="1"/>
           </p:cNvSpPr>
@@ -875,7 +2424,7 @@
           <a:p>
             <a:fld id="{2660491B-4C7C-DB4F-95AC-F6744A00D18F}" type="datetimeFigureOut">
               <a:rPr lang="en-PR" smtClean="0"/>
-              <a:t>4/12/26</a:t>
+              <a:t>4/13/26</a:t>
             </a:fld>
             <a:endParaRPr lang="en-PR"/>
           </a:p>
@@ -883,13 +2432,7 @@
       </p:sp>
       <p:sp>
         <p:nvSpPr>
-          <p:cNvPr id="5" name="Footer Placeholder 4">
-            <a:extLst>
-              <a:ext uri="{FF2B5EF4-FFF2-40B4-BE49-F238E27FC236}">
-                <a16:creationId xmlns:a16="http://schemas.microsoft.com/office/drawing/2014/main" id="{66314366-17A7-12BA-8090-839521D62D6A}"/>
-              </a:ext>
-            </a:extLst>
-          </p:cNvPr>
+          <p:cNvPr id="5" name="Footer Placeholder 4"/>
           <p:cNvSpPr>
             <a:spLocks noGrp="1"/>
           </p:cNvSpPr>
@@ -908,13 +2451,7 @@
       </p:sp>
       <p:sp>
         <p:nvSpPr>
-          <p:cNvPr id="6" name="Slide Number Placeholder 5">
-            <a:extLst>
-              <a:ext uri="{FF2B5EF4-FFF2-40B4-BE49-F238E27FC236}">
-                <a16:creationId xmlns:a16="http://schemas.microsoft.com/office/drawing/2014/main" id="{ABD88390-9BF1-0AED-7E76-2FF6D8852093}"/>
-              </a:ext>
-            </a:extLst>
-          </p:cNvPr>
+          <p:cNvPr id="6" name="Slide Number Placeholder 5"/>
           <p:cNvSpPr>
             <a:spLocks noGrp="1"/>
           </p:cNvSpPr>
@@ -938,7 +2475,7 @@
     </p:spTree>
     <p:extLst>
       <p:ext uri="{BB962C8B-B14F-4D97-AF65-F5344CB8AC3E}">
-        <p14:creationId xmlns:p14="http://schemas.microsoft.com/office/powerpoint/2010/main" val="536476903"/>
+        <p14:creationId xmlns:p14="http://schemas.microsoft.com/office/powerpoint/2010/main" val="3779349900"/>
       </p:ext>
     </p:extLst>
   </p:cSld>
@@ -967,13 +2504,104 @@
       </p:grpSpPr>
       <p:sp>
         <p:nvSpPr>
-          <p:cNvPr id="2" name="Title 1">
-            <a:extLst>
-              <a:ext uri="{FF2B5EF4-FFF2-40B4-BE49-F238E27FC236}">
-                <a16:creationId xmlns:a16="http://schemas.microsoft.com/office/drawing/2014/main" id="{C6259DE4-BC7A-3991-3B67-7C510C3C0760}"/>
-              </a:ext>
-            </a:extLst>
-          </p:cNvPr>
+          <p:cNvPr id="10" name="Freeform 7"/>
+          <p:cNvSpPr/>
+          <p:nvPr/>
+        </p:nvSpPr>
+        <p:spPr bwMode="auto">
+          <a:xfrm>
+            <a:off x="0" y="1"/>
+            <a:ext cx="12192000" cy="5203825"/>
+          </a:xfrm>
+          <a:custGeom>
+            <a:avLst/>
+            <a:gdLst/>
+            <a:ahLst/>
+            <a:cxnLst/>
+            <a:rect l="0" t="0" r="r" b="b"/>
+            <a:pathLst>
+              <a:path w="5760" h="3278">
+                <a:moveTo>
+                  <a:pt x="0" y="0"/>
+                </a:moveTo>
+                <a:lnTo>
+                  <a:pt x="5760" y="0"/>
+                </a:lnTo>
+                <a:lnTo>
+                  <a:pt x="5760" y="3090"/>
+                </a:lnTo>
+                <a:lnTo>
+                  <a:pt x="4817" y="3090"/>
+                </a:lnTo>
+                <a:lnTo>
+                  <a:pt x="4637" y="3270"/>
+                </a:lnTo>
+                <a:lnTo>
+                  <a:pt x="4637" y="3270"/>
+                </a:lnTo>
+                <a:lnTo>
+                  <a:pt x="4633" y="3272"/>
+                </a:lnTo>
+                <a:lnTo>
+                  <a:pt x="4627" y="3275"/>
+                </a:lnTo>
+                <a:lnTo>
+                  <a:pt x="4621" y="3278"/>
+                </a:lnTo>
+                <a:lnTo>
+                  <a:pt x="4616" y="3278"/>
+                </a:lnTo>
+                <a:lnTo>
+                  <a:pt x="4610" y="3278"/>
+                </a:lnTo>
+                <a:lnTo>
+                  <a:pt x="4605" y="3275"/>
+                </a:lnTo>
+                <a:lnTo>
+                  <a:pt x="4599" y="3272"/>
+                </a:lnTo>
+                <a:lnTo>
+                  <a:pt x="4595" y="3270"/>
+                </a:lnTo>
+                <a:lnTo>
+                  <a:pt x="4415" y="3090"/>
+                </a:lnTo>
+                <a:lnTo>
+                  <a:pt x="0" y="3090"/>
+                </a:lnTo>
+                <a:lnTo>
+                  <a:pt x="0" y="0"/>
+                </a:lnTo>
+                <a:lnTo>
+                  <a:pt x="0" y="0"/>
+                </a:lnTo>
+                <a:close/>
+              </a:path>
+            </a:pathLst>
+          </a:custGeom>
+          <a:ln>
+            <a:headEnd/>
+            <a:tailEnd/>
+          </a:ln>
+        </p:spPr>
+        <p:style>
+          <a:lnRef idx="1">
+            <a:schemeClr val="accent1"/>
+          </a:lnRef>
+          <a:fillRef idx="3">
+            <a:schemeClr val="accent1"/>
+          </a:fillRef>
+          <a:effectRef idx="2">
+            <a:schemeClr val="accent1"/>
+          </a:effectRef>
+          <a:fontRef idx="minor">
+            <a:schemeClr val="lt1"/>
+          </a:fontRef>
+        </p:style>
+      </p:sp>
+      <p:sp>
+        <p:nvSpPr>
+          <p:cNvPr id="2" name="Title 1"/>
           <p:cNvSpPr>
             <a:spLocks noGrp="1"/>
           </p:cNvSpPr>
@@ -983,15 +2611,15 @@
         </p:nvSpPr>
         <p:spPr>
           <a:xfrm>
-            <a:off x="831850" y="1709738"/>
-            <a:ext cx="10515600" cy="2852737"/>
+            <a:off x="810000" y="2951396"/>
+            <a:ext cx="10561418" cy="1468800"/>
           </a:xfrm>
         </p:spPr>
         <p:txBody>
           <a:bodyPr anchor="b"/>
           <a:lstStyle>
-            <a:lvl1pPr>
-              <a:defRPr sz="6000"/>
+            <a:lvl1pPr algn="r">
+              <a:defRPr sz="4800" b="1" cap="none"/>
             </a:lvl1pPr>
           </a:lstStyle>
           <a:p>
@@ -999,19 +2627,13 @@
               <a:rPr lang="en-US"/>
               <a:t>Click to edit Master title style</a:t>
             </a:r>
-            <a:endParaRPr lang="en-PR"/>
-          </a:p>
-        </p:txBody>
-      </p:sp>
-      <p:sp>
-        <p:nvSpPr>
-          <p:cNvPr id="3" name="Text Placeholder 2">
-            <a:extLst>
-              <a:ext uri="{FF2B5EF4-FFF2-40B4-BE49-F238E27FC236}">
-                <a16:creationId xmlns:a16="http://schemas.microsoft.com/office/drawing/2014/main" id="{6FAE3DB8-F97E-8812-3476-742384477A22}"/>
-              </a:ext>
-            </a:extLst>
-          </p:cNvPr>
+            <a:endParaRPr lang="en-US" dirty="0"/>
+          </a:p>
+        </p:txBody>
+      </p:sp>
+      <p:sp>
+        <p:nvSpPr>
+          <p:cNvPr id="3" name="Text Placeholder 2"/>
           <p:cNvSpPr>
             <a:spLocks noGrp="1"/>
           </p:cNvSpPr>
@@ -1021,99 +2643,99 @@
         </p:nvSpPr>
         <p:spPr>
           <a:xfrm>
-            <a:off x="831850" y="4589463"/>
-            <a:ext cx="10515600" cy="1500187"/>
+            <a:off x="810000" y="5281201"/>
+            <a:ext cx="10561418" cy="433955"/>
           </a:xfrm>
         </p:spPr>
         <p:txBody>
-          <a:bodyPr/>
+          <a:bodyPr anchor="t">
+            <a:noAutofit/>
+          </a:bodyPr>
           <a:lstStyle>
-            <a:lvl1pPr marL="0" indent="0">
+            <a:lvl1pPr marL="0" indent="0" algn="r">
               <a:buNone/>
-              <a:defRPr sz="2400">
+              <a:defRPr sz="1800">
                 <a:solidFill>
-                  <a:schemeClr val="tx1">
-                    <a:tint val="82000"/>
-                  </a:schemeClr>
+                  <a:schemeClr val="tx1"/>
                 </a:solidFill>
               </a:defRPr>
             </a:lvl1pPr>
             <a:lvl2pPr marL="457200" indent="0">
               <a:buNone/>
-              <a:defRPr sz="2000">
+              <a:defRPr sz="1800">
                 <a:solidFill>
                   <a:schemeClr val="tx1">
-                    <a:tint val="82000"/>
+                    <a:tint val="75000"/>
                   </a:schemeClr>
                 </a:solidFill>
               </a:defRPr>
             </a:lvl2pPr>
             <a:lvl3pPr marL="914400" indent="0">
               <a:buNone/>
-              <a:defRPr sz="1800">
+              <a:defRPr sz="1600">
                 <a:solidFill>
                   <a:schemeClr val="tx1">
-                    <a:tint val="82000"/>
+                    <a:tint val="75000"/>
                   </a:schemeClr>
                 </a:solidFill>
               </a:defRPr>
             </a:lvl3pPr>
             <a:lvl4pPr marL="1371600" indent="0">
               <a:buNone/>
-              <a:defRPr sz="1600">
+              <a:defRPr sz="1400">
                 <a:solidFill>
                   <a:schemeClr val="tx1">
-                    <a:tint val="82000"/>
+                    <a:tint val="75000"/>
                   </a:schemeClr>
                 </a:solidFill>
               </a:defRPr>
             </a:lvl4pPr>
             <a:lvl5pPr marL="1828800" indent="0">
               <a:buNone/>
-              <a:defRPr sz="1600">
+              <a:defRPr sz="1400">
                 <a:solidFill>
                   <a:schemeClr val="tx1">
-                    <a:tint val="82000"/>
+                    <a:tint val="75000"/>
                   </a:schemeClr>
                 </a:solidFill>
               </a:defRPr>
             </a:lvl5pPr>
             <a:lvl6pPr marL="2286000" indent="0">
               <a:buNone/>
-              <a:defRPr sz="1600">
+              <a:defRPr sz="1400">
                 <a:solidFill>
                   <a:schemeClr val="tx1">
-                    <a:tint val="82000"/>
+                    <a:tint val="75000"/>
                   </a:schemeClr>
                 </a:solidFill>
               </a:defRPr>
             </a:lvl6pPr>
             <a:lvl7pPr marL="2743200" indent="0">
               <a:buNone/>
-              <a:defRPr sz="1600">
+              <a:defRPr sz="1400">
                 <a:solidFill>
                   <a:schemeClr val="tx1">
-                    <a:tint val="82000"/>
+                    <a:tint val="75000"/>
                   </a:schemeClr>
                 </a:solidFill>
               </a:defRPr>
             </a:lvl7pPr>
             <a:lvl8pPr marL="3200400" indent="0">
               <a:buNone/>
-              <a:defRPr sz="1600">
+              <a:defRPr sz="1400">
                 <a:solidFill>
                   <a:schemeClr val="tx1">
-                    <a:tint val="82000"/>
+                    <a:tint val="75000"/>
                   </a:schemeClr>
                 </a:solidFill>
               </a:defRPr>
             </a:lvl8pPr>
             <a:lvl9pPr marL="3657600" indent="0">
               <a:buNone/>
-              <a:defRPr sz="1600">
+              <a:defRPr sz="1400">
                 <a:solidFill>
                   <a:schemeClr val="tx1">
-                    <a:tint val="82000"/>
+                    <a:tint val="75000"/>
                   </a:schemeClr>
                 </a:solidFill>
               </a:defRPr>
@@ -1130,13 +2752,7 @@
       </p:sp>
       <p:sp>
         <p:nvSpPr>
-          <p:cNvPr id="4" name="Date Placeholder 3">
-            <a:extLst>
-              <a:ext uri="{FF2B5EF4-FFF2-40B4-BE49-F238E27FC236}">
-                <a16:creationId xmlns:a16="http://schemas.microsoft.com/office/drawing/2014/main" id="{D8E27F1D-D48C-0377-002E-C96BEE6D06B5}"/>
-              </a:ext>
-            </a:extLst>
-          </p:cNvPr>
+          <p:cNvPr id="4" name="Date Placeholder 3"/>
           <p:cNvSpPr>
             <a:spLocks noGrp="1"/>
           </p:cNvSpPr>
@@ -1151,7 +2767,7 @@
           <a:p>
             <a:fld id="{2660491B-4C7C-DB4F-95AC-F6744A00D18F}" type="datetimeFigureOut">
               <a:rPr lang="en-PR" smtClean="0"/>
-              <a:t>4/12/26</a:t>
+              <a:t>4/13/26</a:t>
             </a:fld>
             <a:endParaRPr lang="en-PR"/>
           </a:p>
@@ -1159,13 +2775,7 @@
       </p:sp>
       <p:sp>
         <p:nvSpPr>
-          <p:cNvPr id="5" name="Footer Placeholder 4">
-            <a:extLst>
-              <a:ext uri="{FF2B5EF4-FFF2-40B4-BE49-F238E27FC236}">
-                <a16:creationId xmlns:a16="http://schemas.microsoft.com/office/drawing/2014/main" id="{26F5C1F2-1DE7-94F7-D8E1-509859D71D68}"/>
-              </a:ext>
-            </a:extLst>
-          </p:cNvPr>
+          <p:cNvPr id="5" name="Footer Placeholder 4"/>
           <p:cNvSpPr>
             <a:spLocks noGrp="1"/>
           </p:cNvSpPr>
@@ -1184,13 +2794,7 @@
       </p:sp>
       <p:sp>
         <p:nvSpPr>
-          <p:cNvPr id="6" name="Slide Number Placeholder 5">
-            <a:extLst>
-              <a:ext uri="{FF2B5EF4-FFF2-40B4-BE49-F238E27FC236}">
-                <a16:creationId xmlns:a16="http://schemas.microsoft.com/office/drawing/2014/main" id="{9066BBDD-5958-5DC0-1010-A931600EA967}"/>
-              </a:ext>
-            </a:extLst>
-          </p:cNvPr>
+          <p:cNvPr id="6" name="Slide Number Placeholder 5"/>
           <p:cNvSpPr>
             <a:spLocks noGrp="1"/>
           </p:cNvSpPr>
@@ -1214,7 +2818,7 @@
     </p:spTree>
     <p:extLst>
       <p:ext uri="{BB962C8B-B14F-4D97-AF65-F5344CB8AC3E}">
-        <p14:creationId xmlns:p14="http://schemas.microsoft.com/office/powerpoint/2010/main" val="529442634"/>
+        <p14:creationId xmlns:p14="http://schemas.microsoft.com/office/powerpoint/2010/main" val="710505508"/>
       </p:ext>
     </p:extLst>
   </p:cSld>
@@ -1243,13 +2847,110 @@
       </p:grpSpPr>
       <p:sp>
         <p:nvSpPr>
-          <p:cNvPr id="2" name="Title 1">
-            <a:extLst>
-              <a:ext uri="{FF2B5EF4-FFF2-40B4-BE49-F238E27FC236}">
-                <a16:creationId xmlns:a16="http://schemas.microsoft.com/office/drawing/2014/main" id="{3E062BE0-9553-7F9A-870E-021061430FF7}"/>
-              </a:ext>
-            </a:extLst>
-          </p:cNvPr>
+          <p:cNvPr id="8" name="Freeform 6"/>
+          <p:cNvSpPr/>
+          <p:nvPr/>
+        </p:nvSpPr>
+        <p:spPr bwMode="auto">
+          <a:xfrm>
+            <a:off x="0" y="0"/>
+            <a:ext cx="12192000" cy="2185988"/>
+          </a:xfrm>
+          <a:custGeom>
+            <a:avLst/>
+            <a:gdLst/>
+            <a:ahLst/>
+            <a:cxnLst/>
+            <a:rect l="0" t="0" r="r" b="b"/>
+            <a:pathLst>
+              <a:path w="5760" h="1377">
+                <a:moveTo>
+                  <a:pt x="5760" y="0"/>
+                </a:moveTo>
+                <a:lnTo>
+                  <a:pt x="0" y="0"/>
+                </a:lnTo>
+                <a:lnTo>
+                  <a:pt x="0" y="1189"/>
+                </a:lnTo>
+                <a:lnTo>
+                  <a:pt x="943" y="1189"/>
+                </a:lnTo>
+                <a:lnTo>
+                  <a:pt x="1123" y="1369"/>
+                </a:lnTo>
+                <a:lnTo>
+                  <a:pt x="1123" y="1369"/>
+                </a:lnTo>
+                <a:lnTo>
+                  <a:pt x="1127" y="1371"/>
+                </a:lnTo>
+                <a:lnTo>
+                  <a:pt x="1133" y="1374"/>
+                </a:lnTo>
+                <a:lnTo>
+                  <a:pt x="1139" y="1377"/>
+                </a:lnTo>
+                <a:lnTo>
+                  <a:pt x="1144" y="1377"/>
+                </a:lnTo>
+                <a:lnTo>
+                  <a:pt x="1150" y="1377"/>
+                </a:lnTo>
+                <a:lnTo>
+                  <a:pt x="1155" y="1374"/>
+                </a:lnTo>
+                <a:lnTo>
+                  <a:pt x="1161" y="1371"/>
+                </a:lnTo>
+                <a:lnTo>
+                  <a:pt x="1165" y="1369"/>
+                </a:lnTo>
+                <a:lnTo>
+                  <a:pt x="1345" y="1189"/>
+                </a:lnTo>
+                <a:lnTo>
+                  <a:pt x="5760" y="1189"/>
+                </a:lnTo>
+                <a:lnTo>
+                  <a:pt x="5760" y="0"/>
+                </a:lnTo>
+                <a:close/>
+              </a:path>
+            </a:pathLst>
+          </a:custGeom>
+          <a:ln/>
+          <a:extLst>
+            <a:ext uri="{91240B29-F687-4f45-9708-019B960494DF}">
+              <a14:hiddenLine xmlns:a14="http://schemas.microsoft.com/office/drawing/2010/main" xmlns="" w="9525">
+                <a:solidFill>
+                  <a:srgbClr val="000000"/>
+                </a:solidFill>
+                <a:round/>
+                <a:headEnd/>
+                <a:tailEnd/>
+              </a14:hiddenLine>
+            </a:ext>
+          </a:extLst>
+        </p:spPr>
+        <p:style>
+          <a:lnRef idx="1">
+            <a:schemeClr val="accent1"/>
+          </a:lnRef>
+          <a:fillRef idx="3">
+            <a:schemeClr val="accent1"/>
+          </a:fillRef>
+          <a:effectRef idx="2">
+            <a:schemeClr val="accent1"/>
+          </a:effectRef>
+          <a:fontRef idx="minor">
+            <a:schemeClr val="lt1"/>
+          </a:fontRef>
+        </p:style>
+      </p:sp>
+      <p:sp>
+        <p:nvSpPr>
+          <p:cNvPr id="2" name="Title 1"/>
           <p:cNvSpPr>
             <a:spLocks noGrp="1"/>
           </p:cNvSpPr>
@@ -1266,19 +2967,13 @@
               <a:rPr lang="en-US"/>
               <a:t>Click to edit Master title style</a:t>
             </a:r>
-            <a:endParaRPr lang="en-PR"/>
-          </a:p>
-        </p:txBody>
-      </p:sp>
-      <p:sp>
-        <p:nvSpPr>
-          <p:cNvPr id="3" name="Content Placeholder 2">
-            <a:extLst>
-              <a:ext uri="{FF2B5EF4-FFF2-40B4-BE49-F238E27FC236}">
-                <a16:creationId xmlns:a16="http://schemas.microsoft.com/office/drawing/2014/main" id="{B071D2DC-EF80-CD63-9AE9-32BD4FDB5FE8}"/>
-              </a:ext>
-            </a:extLst>
-          </p:cNvPr>
+            <a:endParaRPr lang="en-US" dirty="0"/>
+          </a:p>
+        </p:txBody>
+      </p:sp>
+      <p:sp>
+        <p:nvSpPr>
+          <p:cNvPr id="3" name="Content Placeholder 2"/>
           <p:cNvSpPr>
             <a:spLocks noGrp="1"/>
           </p:cNvSpPr>
@@ -1288,177 +2983,157 @@
         </p:nvSpPr>
         <p:spPr>
           <a:xfrm>
-            <a:off x="838200" y="1825625"/>
-            <a:ext cx="5181600" cy="4351338"/>
+            <a:off x="818712" y="2222287"/>
+            <a:ext cx="5185873" cy="3638763"/>
           </a:xfrm>
         </p:spPr>
         <p:txBody>
+          <a:bodyPr>
+            <a:normAutofit/>
+          </a:bodyPr>
+          <a:lstStyle/>
+          <a:p>
+            <a:pPr lvl="0"/>
+            <a:r>
+              <a:rPr lang="en-US"/>
+              <a:t>Click to edit Master text styles</a:t>
+            </a:r>
+          </a:p>
+          <a:p>
+            <a:pPr lvl="1"/>
+            <a:r>
+              <a:rPr lang="en-US"/>
+              <a:t>Second level</a:t>
+            </a:r>
+          </a:p>
+          <a:p>
+            <a:pPr lvl="2"/>
+            <a:r>
+              <a:rPr lang="en-US"/>
+              <a:t>Third level</a:t>
+            </a:r>
+          </a:p>
+          <a:p>
+            <a:pPr lvl="3"/>
+            <a:r>
+              <a:rPr lang="en-US"/>
+              <a:t>Fourth level</a:t>
+            </a:r>
+          </a:p>
+          <a:p>
+            <a:pPr lvl="4"/>
+            <a:r>
+              <a:rPr lang="en-US"/>
+              <a:t>Fifth level</a:t>
+            </a:r>
+            <a:endParaRPr lang="en-US" dirty="0"/>
+          </a:p>
+        </p:txBody>
+      </p:sp>
+      <p:sp>
+        <p:nvSpPr>
+          <p:cNvPr id="4" name="Content Placeholder 3"/>
+          <p:cNvSpPr>
+            <a:spLocks noGrp="1"/>
+          </p:cNvSpPr>
+          <p:nvPr>
+            <p:ph sz="half" idx="2"/>
+          </p:nvPr>
+        </p:nvSpPr>
+        <p:spPr>
+          <a:xfrm>
+            <a:off x="6187415" y="2222287"/>
+            <a:ext cx="5194583" cy="3638764"/>
+          </a:xfrm>
+        </p:spPr>
+        <p:txBody>
+          <a:bodyPr>
+            <a:normAutofit/>
+          </a:bodyPr>
+          <a:lstStyle/>
+          <a:p>
+            <a:pPr lvl="0"/>
+            <a:r>
+              <a:rPr lang="en-US"/>
+              <a:t>Click to edit Master text styles</a:t>
+            </a:r>
+          </a:p>
+          <a:p>
+            <a:pPr lvl="1"/>
+            <a:r>
+              <a:rPr lang="en-US"/>
+              <a:t>Second level</a:t>
+            </a:r>
+          </a:p>
+          <a:p>
+            <a:pPr lvl="2"/>
+            <a:r>
+              <a:rPr lang="en-US"/>
+              <a:t>Third level</a:t>
+            </a:r>
+          </a:p>
+          <a:p>
+            <a:pPr lvl="3"/>
+            <a:r>
+              <a:rPr lang="en-US"/>
+              <a:t>Fourth level</a:t>
+            </a:r>
+          </a:p>
+          <a:p>
+            <a:pPr lvl="4"/>
+            <a:r>
+              <a:rPr lang="en-US"/>
+              <a:t>Fifth level</a:t>
+            </a:r>
+            <a:endParaRPr lang="en-US" dirty="0"/>
+          </a:p>
+        </p:txBody>
+      </p:sp>
+      <p:sp>
+        <p:nvSpPr>
+          <p:cNvPr id="5" name="Date Placeholder 4"/>
+          <p:cNvSpPr>
+            <a:spLocks noGrp="1"/>
+          </p:cNvSpPr>
+          <p:nvPr>
+            <p:ph type="dt" sz="half" idx="10"/>
+          </p:nvPr>
+        </p:nvSpPr>
+        <p:spPr/>
+        <p:txBody>
           <a:bodyPr/>
           <a:lstStyle/>
           <a:p>
-            <a:pPr lvl="0"/>
-            <a:r>
-              <a:rPr lang="en-US"/>
-              <a:t>Click to edit Master text styles</a:t>
-            </a:r>
-          </a:p>
-          <a:p>
-            <a:pPr lvl="1"/>
-            <a:r>
-              <a:rPr lang="en-US"/>
-              <a:t>Second level</a:t>
-            </a:r>
-          </a:p>
-          <a:p>
-            <a:pPr lvl="2"/>
-            <a:r>
-              <a:rPr lang="en-US"/>
-              <a:t>Third level</a:t>
-            </a:r>
-          </a:p>
-          <a:p>
-            <a:pPr lvl="3"/>
-            <a:r>
-              <a:rPr lang="en-US"/>
-              <a:t>Fourth level</a:t>
-            </a:r>
-          </a:p>
-          <a:p>
-            <a:pPr lvl="4"/>
-            <a:r>
-              <a:rPr lang="en-US"/>
-              <a:t>Fifth level</a:t>
-            </a:r>
+            <a:fld id="{2660491B-4C7C-DB4F-95AC-F6744A00D18F}" type="datetimeFigureOut">
+              <a:rPr lang="en-PR" smtClean="0"/>
+              <a:t>4/13/26</a:t>
+            </a:fld>
             <a:endParaRPr lang="en-PR"/>
           </a:p>
         </p:txBody>
       </p:sp>
       <p:sp>
         <p:nvSpPr>
-          <p:cNvPr id="4" name="Content Placeholder 3">
-            <a:extLst>
-              <a:ext uri="{FF2B5EF4-FFF2-40B4-BE49-F238E27FC236}">
-                <a16:creationId xmlns:a16="http://schemas.microsoft.com/office/drawing/2014/main" id="{FAF00CE3-C6A8-2D85-4C49-BEBA1EE1BAB5}"/>
-              </a:ext>
-            </a:extLst>
-          </p:cNvPr>
-          <p:cNvSpPr>
-            <a:spLocks noGrp="1"/>
-          </p:cNvSpPr>
-          <p:nvPr>
-            <p:ph sz="half" idx="2"/>
-          </p:nvPr>
-        </p:nvSpPr>
-        <p:spPr>
-          <a:xfrm>
-            <a:off x="6172200" y="1825625"/>
-            <a:ext cx="5181600" cy="4351338"/>
-          </a:xfrm>
-        </p:spPr>
+          <p:cNvPr id="6" name="Footer Placeholder 5"/>
+          <p:cNvSpPr>
+            <a:spLocks noGrp="1"/>
+          </p:cNvSpPr>
+          <p:nvPr>
+            <p:ph type="ftr" sz="quarter" idx="11"/>
+          </p:nvPr>
+        </p:nvSpPr>
+        <p:spPr/>
         <p:txBody>
           <a:bodyPr/>
           <a:lstStyle/>
           <a:p>
-            <a:pPr lvl="0"/>
-            <a:r>
-              <a:rPr lang="en-US"/>
-              <a:t>Click to edit Master text styles</a:t>
-            </a:r>
-          </a:p>
-          <a:p>
-            <a:pPr lvl="1"/>
-            <a:r>
-              <a:rPr lang="en-US"/>
-              <a:t>Second level</a:t>
-            </a:r>
-          </a:p>
-          <a:p>
-            <a:pPr lvl="2"/>
-            <a:r>
-              <a:rPr lang="en-US"/>
-              <a:t>Third level</a:t>
-            </a:r>
-          </a:p>
-          <a:p>
-            <a:pPr lvl="3"/>
-            <a:r>
-              <a:rPr lang="en-US"/>
-              <a:t>Fourth level</a:t>
-            </a:r>
-          </a:p>
-          <a:p>
-            <a:pPr lvl="4"/>
-            <a:r>
-              <a:rPr lang="en-US"/>
-              <a:t>Fifth level</a:t>
-            </a:r>
             <a:endParaRPr lang="en-PR"/>
           </a:p>
         </p:txBody>
       </p:sp>
       <p:sp>
         <p:nvSpPr>
-          <p:cNvPr id="5" name="Date Placeholder 4">
-            <a:extLst>
-              <a:ext uri="{FF2B5EF4-FFF2-40B4-BE49-F238E27FC236}">
-                <a16:creationId xmlns:a16="http://schemas.microsoft.com/office/drawing/2014/main" id="{C5043DA9-123F-FB8A-4470-F293C1BE35B8}"/>
-              </a:ext>
-            </a:extLst>
-          </p:cNvPr>
-          <p:cNvSpPr>
-            <a:spLocks noGrp="1"/>
-          </p:cNvSpPr>
-          <p:nvPr>
-            <p:ph type="dt" sz="half" idx="10"/>
-          </p:nvPr>
-        </p:nvSpPr>
-        <p:spPr/>
-        <p:txBody>
-          <a:bodyPr/>
-          <a:lstStyle/>
-          <a:p>
-            <a:fld id="{2660491B-4C7C-DB4F-95AC-F6744A00D18F}" type="datetimeFigureOut">
-              <a:rPr lang="en-PR" smtClean="0"/>
-              <a:t>4/12/26</a:t>
-            </a:fld>
-            <a:endParaRPr lang="en-PR"/>
-          </a:p>
-        </p:txBody>
-      </p:sp>
-      <p:sp>
-        <p:nvSpPr>
-          <p:cNvPr id="6" name="Footer Placeholder 5">
-            <a:extLst>
-              <a:ext uri="{FF2B5EF4-FFF2-40B4-BE49-F238E27FC236}">
-                <a16:creationId xmlns:a16="http://schemas.microsoft.com/office/drawing/2014/main" id="{A14D434B-6B80-3C54-0146-4FFF2B227AF1}"/>
-              </a:ext>
-            </a:extLst>
-          </p:cNvPr>
-          <p:cNvSpPr>
-            <a:spLocks noGrp="1"/>
-          </p:cNvSpPr>
-          <p:nvPr>
-            <p:ph type="ftr" sz="quarter" idx="11"/>
-          </p:nvPr>
-        </p:nvSpPr>
-        <p:spPr/>
-        <p:txBody>
-          <a:bodyPr/>
-          <a:lstStyle/>
-          <a:p>
-            <a:endParaRPr lang="en-PR"/>
-          </a:p>
-        </p:txBody>
-      </p:sp>
-      <p:sp>
-        <p:nvSpPr>
-          <p:cNvPr id="7" name="Slide Number Placeholder 6">
-            <a:extLst>
-              <a:ext uri="{FF2B5EF4-FFF2-40B4-BE49-F238E27FC236}">
-                <a16:creationId xmlns:a16="http://schemas.microsoft.com/office/drawing/2014/main" id="{B03DF165-69D6-88F8-8038-27D3501276CA}"/>
-              </a:ext>
-            </a:extLst>
-          </p:cNvPr>
+          <p:cNvPr id="7" name="Slide Number Placeholder 6"/>
           <p:cNvSpPr>
             <a:spLocks noGrp="1"/>
           </p:cNvSpPr>
@@ -1482,7 +3157,7 @@
     </p:spTree>
     <p:extLst>
       <p:ext uri="{BB962C8B-B14F-4D97-AF65-F5344CB8AC3E}">
-        <p14:creationId xmlns:p14="http://schemas.microsoft.com/office/powerpoint/2010/main" val="3106551192"/>
+        <p14:creationId xmlns:p14="http://schemas.microsoft.com/office/powerpoint/2010/main" val="3861052169"/>
       </p:ext>
     </p:extLst>
   </p:cSld>
@@ -1511,66 +3186,158 @@
       </p:grpSpPr>
       <p:sp>
         <p:nvSpPr>
-          <p:cNvPr id="2" name="Title 1">
-            <a:extLst>
-              <a:ext uri="{FF2B5EF4-FFF2-40B4-BE49-F238E27FC236}">
-                <a16:creationId xmlns:a16="http://schemas.microsoft.com/office/drawing/2014/main" id="{E84E1CB0-8F5B-9857-2563-CA95F4D470A6}"/>
-              </a:ext>
-            </a:extLst>
-          </p:cNvPr>
+          <p:cNvPr id="10" name="Freeform 6"/>
+          <p:cNvSpPr/>
+          <p:nvPr/>
+        </p:nvSpPr>
+        <p:spPr bwMode="auto">
+          <a:xfrm>
+            <a:off x="0" y="0"/>
+            <a:ext cx="12192000" cy="2185988"/>
+          </a:xfrm>
+          <a:custGeom>
+            <a:avLst/>
+            <a:gdLst/>
+            <a:ahLst/>
+            <a:cxnLst/>
+            <a:rect l="0" t="0" r="r" b="b"/>
+            <a:pathLst>
+              <a:path w="5760" h="1377">
+                <a:moveTo>
+                  <a:pt x="5760" y="0"/>
+                </a:moveTo>
+                <a:lnTo>
+                  <a:pt x="0" y="0"/>
+                </a:lnTo>
+                <a:lnTo>
+                  <a:pt x="0" y="1189"/>
+                </a:lnTo>
+                <a:lnTo>
+                  <a:pt x="943" y="1189"/>
+                </a:lnTo>
+                <a:lnTo>
+                  <a:pt x="1123" y="1369"/>
+                </a:lnTo>
+                <a:lnTo>
+                  <a:pt x="1123" y="1369"/>
+                </a:lnTo>
+                <a:lnTo>
+                  <a:pt x="1127" y="1371"/>
+                </a:lnTo>
+                <a:lnTo>
+                  <a:pt x="1133" y="1374"/>
+                </a:lnTo>
+                <a:lnTo>
+                  <a:pt x="1139" y="1377"/>
+                </a:lnTo>
+                <a:lnTo>
+                  <a:pt x="1144" y="1377"/>
+                </a:lnTo>
+                <a:lnTo>
+                  <a:pt x="1150" y="1377"/>
+                </a:lnTo>
+                <a:lnTo>
+                  <a:pt x="1155" y="1374"/>
+                </a:lnTo>
+                <a:lnTo>
+                  <a:pt x="1161" y="1371"/>
+                </a:lnTo>
+                <a:lnTo>
+                  <a:pt x="1165" y="1369"/>
+                </a:lnTo>
+                <a:lnTo>
+                  <a:pt x="1345" y="1189"/>
+                </a:lnTo>
+                <a:lnTo>
+                  <a:pt x="5760" y="1189"/>
+                </a:lnTo>
+                <a:lnTo>
+                  <a:pt x="5760" y="0"/>
+                </a:lnTo>
+                <a:close/>
+              </a:path>
+            </a:pathLst>
+          </a:custGeom>
+          <a:ln/>
+          <a:extLst>
+            <a:ext uri="{91240B29-F687-4f45-9708-019B960494DF}">
+              <a14:hiddenLine xmlns:a14="http://schemas.microsoft.com/office/drawing/2010/main" xmlns="" w="9525">
+                <a:solidFill>
+                  <a:srgbClr val="000000"/>
+                </a:solidFill>
+                <a:round/>
+                <a:headEnd/>
+                <a:tailEnd/>
+              </a14:hiddenLine>
+            </a:ext>
+          </a:extLst>
+        </p:spPr>
+        <p:style>
+          <a:lnRef idx="1">
+            <a:schemeClr val="accent1"/>
+          </a:lnRef>
+          <a:fillRef idx="3">
+            <a:schemeClr val="accent1"/>
+          </a:fillRef>
+          <a:effectRef idx="2">
+            <a:schemeClr val="accent1"/>
+          </a:effectRef>
+          <a:fontRef idx="minor">
+            <a:schemeClr val="lt1"/>
+          </a:fontRef>
+        </p:style>
+      </p:sp>
+      <p:sp>
+        <p:nvSpPr>
+          <p:cNvPr id="2" name="Title 1"/>
           <p:cNvSpPr>
             <a:spLocks noGrp="1"/>
           </p:cNvSpPr>
           <p:nvPr>
             <p:ph type="title"/>
+          </p:nvPr>
+        </p:nvSpPr>
+        <p:spPr/>
+        <p:txBody>
+          <a:bodyPr/>
+          <a:lstStyle>
+            <a:lvl1pPr>
+              <a:defRPr/>
+            </a:lvl1pPr>
+          </a:lstStyle>
+          <a:p>
+            <a:r>
+              <a:rPr lang="en-US"/>
+              <a:t>Click to edit Master title style</a:t>
+            </a:r>
+            <a:endParaRPr lang="en-US" dirty="0"/>
+          </a:p>
+        </p:txBody>
+      </p:sp>
+      <p:sp>
+        <p:nvSpPr>
+          <p:cNvPr id="3" name="Text Placeholder 2"/>
+          <p:cNvSpPr>
+            <a:spLocks noGrp="1"/>
+          </p:cNvSpPr>
+          <p:nvPr>
+            <p:ph type="body" idx="1"/>
           </p:nvPr>
         </p:nvSpPr>
         <p:spPr>
           <a:xfrm>
-            <a:off x="839788" y="365125"/>
-            <a:ext cx="10515600" cy="1325563"/>
+            <a:off x="814728" y="2174875"/>
+            <a:ext cx="5189857" cy="576262"/>
           </a:xfrm>
         </p:spPr>
         <p:txBody>
-          <a:bodyPr/>
-          <a:lstStyle/>
-          <a:p>
-            <a:r>
-              <a:rPr lang="en-US"/>
-              <a:t>Click to edit Master title style</a:t>
-            </a:r>
-            <a:endParaRPr lang="en-PR"/>
-          </a:p>
-        </p:txBody>
-      </p:sp>
-      <p:sp>
-        <p:nvSpPr>
-          <p:cNvPr id="3" name="Text Placeholder 2">
-            <a:extLst>
-              <a:ext uri="{FF2B5EF4-FFF2-40B4-BE49-F238E27FC236}">
-                <a16:creationId xmlns:a16="http://schemas.microsoft.com/office/drawing/2014/main" id="{21B8E1F7-C67D-53F3-51D5-AB0186C1617B}"/>
-              </a:ext>
-            </a:extLst>
-          </p:cNvPr>
-          <p:cNvSpPr>
-            <a:spLocks noGrp="1"/>
-          </p:cNvSpPr>
-          <p:nvPr>
-            <p:ph type="body" idx="1"/>
-          </p:nvPr>
-        </p:nvSpPr>
-        <p:spPr>
-          <a:xfrm>
-            <a:off x="839788" y="1681163"/>
-            <a:ext cx="5157787" cy="823912"/>
-          </a:xfrm>
-        </p:spPr>
-        <p:txBody>
-          <a:bodyPr anchor="b"/>
+          <a:bodyPr anchor="b">
+            <a:noAutofit/>
+          </a:bodyPr>
           <a:lstStyle>
-            <a:lvl1pPr marL="0" indent="0">
+            <a:lvl1pPr marL="0" indent="0" algn="ctr">
               <a:buNone/>
-              <a:defRPr sz="2400" b="1"/>
+              <a:defRPr sz="2000" b="0"/>
             </a:lvl1pPr>
             <a:lvl2pPr marL="457200" indent="0">
               <a:buNone/>
@@ -1616,13 +3383,7 @@
       </p:sp>
       <p:sp>
         <p:nvSpPr>
-          <p:cNvPr id="4" name="Content Placeholder 3">
-            <a:extLst>
-              <a:ext uri="{FF2B5EF4-FFF2-40B4-BE49-F238E27FC236}">
-                <a16:creationId xmlns:a16="http://schemas.microsoft.com/office/drawing/2014/main" id="{5E27E3AA-7724-ABB5-44E2-14B3CCA96AD3}"/>
-              </a:ext>
-            </a:extLst>
-          </p:cNvPr>
+          <p:cNvPr id="4" name="Content Placeholder 3"/>
           <p:cNvSpPr>
             <a:spLocks noGrp="1"/>
           </p:cNvSpPr>
@@ -1632,12 +3393,14 @@
         </p:nvSpPr>
         <p:spPr>
           <a:xfrm>
-            <a:off x="839788" y="2505075"/>
-            <a:ext cx="5157787" cy="3684588"/>
+            <a:off x="814729" y="2751138"/>
+            <a:ext cx="5189856" cy="3109913"/>
           </a:xfrm>
         </p:spPr>
         <p:txBody>
-          <a:bodyPr/>
+          <a:bodyPr anchor="t">
+            <a:normAutofit/>
+          </a:bodyPr>
           <a:lstStyle/>
           <a:p>
             <a:pPr lvl="0"/>
@@ -1673,19 +3436,13 @@
               <a:rPr lang="en-US"/>
               <a:t>Fifth level</a:t>
             </a:r>
-            <a:endParaRPr lang="en-PR"/>
-          </a:p>
-        </p:txBody>
-      </p:sp>
-      <p:sp>
-        <p:nvSpPr>
-          <p:cNvPr id="5" name="Text Placeholder 4">
-            <a:extLst>
-              <a:ext uri="{FF2B5EF4-FFF2-40B4-BE49-F238E27FC236}">
-                <a16:creationId xmlns:a16="http://schemas.microsoft.com/office/drawing/2014/main" id="{E7294BBC-2687-A9C8-AD5E-45BA7254F16F}"/>
-              </a:ext>
-            </a:extLst>
-          </p:cNvPr>
+            <a:endParaRPr lang="en-US" dirty="0"/>
+          </a:p>
+        </p:txBody>
+      </p:sp>
+      <p:sp>
+        <p:nvSpPr>
+          <p:cNvPr id="5" name="Text Placeholder 4"/>
           <p:cNvSpPr>
             <a:spLocks noGrp="1"/>
           </p:cNvSpPr>
@@ -1695,16 +3452,18 @@
         </p:nvSpPr>
         <p:spPr>
           <a:xfrm>
-            <a:off x="6172200" y="1681163"/>
-            <a:ext cx="5183188" cy="823912"/>
+            <a:off x="6187415" y="2174875"/>
+            <a:ext cx="5194583" cy="576262"/>
           </a:xfrm>
         </p:spPr>
         <p:txBody>
-          <a:bodyPr anchor="b"/>
+          <a:bodyPr anchor="b">
+            <a:noAutofit/>
+          </a:bodyPr>
           <a:lstStyle>
-            <a:lvl1pPr marL="0" indent="0">
+            <a:lvl1pPr marL="0" indent="0" algn="ctr">
               <a:buNone/>
-              <a:defRPr sz="2400" b="1"/>
+              <a:defRPr sz="2000" b="0"/>
             </a:lvl1pPr>
             <a:lvl2pPr marL="457200" indent="0">
               <a:buNone/>
@@ -1750,13 +3509,7 @@
       </p:sp>
       <p:sp>
         <p:nvSpPr>
-          <p:cNvPr id="6" name="Content Placeholder 5">
-            <a:extLst>
-              <a:ext uri="{FF2B5EF4-FFF2-40B4-BE49-F238E27FC236}">
-                <a16:creationId xmlns:a16="http://schemas.microsoft.com/office/drawing/2014/main" id="{65BD12E6-136E-9507-5100-15DC8ECEE9B2}"/>
-              </a:ext>
-            </a:extLst>
-          </p:cNvPr>
+          <p:cNvPr id="6" name="Content Placeholder 5"/>
           <p:cNvSpPr>
             <a:spLocks noGrp="1"/>
           </p:cNvSpPr>
@@ -1766,65 +3519,84 @@
         </p:nvSpPr>
         <p:spPr>
           <a:xfrm>
-            <a:off x="6172200" y="2505075"/>
-            <a:ext cx="5183188" cy="3684588"/>
+            <a:off x="6187415" y="2751138"/>
+            <a:ext cx="5194583" cy="3109913"/>
           </a:xfrm>
         </p:spPr>
         <p:txBody>
+          <a:bodyPr anchor="t">
+            <a:normAutofit/>
+          </a:bodyPr>
+          <a:lstStyle/>
+          <a:p>
+            <a:pPr lvl="0"/>
+            <a:r>
+              <a:rPr lang="en-US"/>
+              <a:t>Click to edit Master text styles</a:t>
+            </a:r>
+          </a:p>
+          <a:p>
+            <a:pPr lvl="1"/>
+            <a:r>
+              <a:rPr lang="en-US"/>
+              <a:t>Second level</a:t>
+            </a:r>
+          </a:p>
+          <a:p>
+            <a:pPr lvl="2"/>
+            <a:r>
+              <a:rPr lang="en-US"/>
+              <a:t>Third level</a:t>
+            </a:r>
+          </a:p>
+          <a:p>
+            <a:pPr lvl="3"/>
+            <a:r>
+              <a:rPr lang="en-US"/>
+              <a:t>Fourth level</a:t>
+            </a:r>
+          </a:p>
+          <a:p>
+            <a:pPr lvl="4"/>
+            <a:r>
+              <a:rPr lang="en-US"/>
+              <a:t>Fifth level</a:t>
+            </a:r>
+            <a:endParaRPr lang="en-US" dirty="0"/>
+          </a:p>
+        </p:txBody>
+      </p:sp>
+      <p:sp>
+        <p:nvSpPr>
+          <p:cNvPr id="7" name="Date Placeholder 6"/>
+          <p:cNvSpPr>
+            <a:spLocks noGrp="1"/>
+          </p:cNvSpPr>
+          <p:nvPr>
+            <p:ph type="dt" sz="half" idx="10"/>
+          </p:nvPr>
+        </p:nvSpPr>
+        <p:spPr/>
+        <p:txBody>
           <a:bodyPr/>
           <a:lstStyle/>
           <a:p>
-            <a:pPr lvl="0"/>
-            <a:r>
-              <a:rPr lang="en-US"/>
-              <a:t>Click to edit Master text styles</a:t>
-            </a:r>
-          </a:p>
-          <a:p>
-            <a:pPr lvl="1"/>
-            <a:r>
-              <a:rPr lang="en-US"/>
-              <a:t>Second level</a:t>
-            </a:r>
-          </a:p>
-          <a:p>
-            <a:pPr lvl="2"/>
-            <a:r>
-              <a:rPr lang="en-US"/>
-              <a:t>Third level</a:t>
-            </a:r>
-          </a:p>
-          <a:p>
-            <a:pPr lvl="3"/>
-            <a:r>
-              <a:rPr lang="en-US"/>
-              <a:t>Fourth level</a:t>
-            </a:r>
-          </a:p>
-          <a:p>
-            <a:pPr lvl="4"/>
-            <a:r>
-              <a:rPr lang="en-US"/>
-              <a:t>Fifth level</a:t>
-            </a:r>
+            <a:fld id="{2660491B-4C7C-DB4F-95AC-F6744A00D18F}" type="datetimeFigureOut">
+              <a:rPr lang="en-PR" smtClean="0"/>
+              <a:t>4/13/26</a:t>
+            </a:fld>
             <a:endParaRPr lang="en-PR"/>
           </a:p>
         </p:txBody>
       </p:sp>
       <p:sp>
         <p:nvSpPr>
-          <p:cNvPr id="7" name="Date Placeholder 6">
-            <a:extLst>
-              <a:ext uri="{FF2B5EF4-FFF2-40B4-BE49-F238E27FC236}">
-                <a16:creationId xmlns:a16="http://schemas.microsoft.com/office/drawing/2014/main" id="{3E699186-80F8-AF86-FB0B-C572A51811BC}"/>
-              </a:ext>
-            </a:extLst>
-          </p:cNvPr>
-          <p:cNvSpPr>
-            <a:spLocks noGrp="1"/>
-          </p:cNvSpPr>
-          <p:nvPr>
-            <p:ph type="dt" sz="half" idx="10"/>
+          <p:cNvPr id="8" name="Footer Placeholder 7"/>
+          <p:cNvSpPr>
+            <a:spLocks noGrp="1"/>
+          </p:cNvSpPr>
+          <p:nvPr>
+            <p:ph type="ftr" sz="quarter" idx="11"/>
           </p:nvPr>
         </p:nvSpPr>
         <p:spPr/>
@@ -1832,48 +3604,13 @@
           <a:bodyPr/>
           <a:lstStyle/>
           <a:p>
-            <a:fld id="{2660491B-4C7C-DB4F-95AC-F6744A00D18F}" type="datetimeFigureOut">
-              <a:rPr lang="en-PR" smtClean="0"/>
-              <a:t>4/12/26</a:t>
-            </a:fld>
             <a:endParaRPr lang="en-PR"/>
           </a:p>
         </p:txBody>
       </p:sp>
       <p:sp>
         <p:nvSpPr>
-          <p:cNvPr id="8" name="Footer Placeholder 7">
-            <a:extLst>
-              <a:ext uri="{FF2B5EF4-FFF2-40B4-BE49-F238E27FC236}">
-                <a16:creationId xmlns:a16="http://schemas.microsoft.com/office/drawing/2014/main" id="{C92D6F21-43F7-850B-922F-1E2EC3D22FDB}"/>
-              </a:ext>
-            </a:extLst>
-          </p:cNvPr>
-          <p:cNvSpPr>
-            <a:spLocks noGrp="1"/>
-          </p:cNvSpPr>
-          <p:nvPr>
-            <p:ph type="ftr" sz="quarter" idx="11"/>
-          </p:nvPr>
-        </p:nvSpPr>
-        <p:spPr/>
-        <p:txBody>
-          <a:bodyPr/>
-          <a:lstStyle/>
-          <a:p>
-            <a:endParaRPr lang="en-PR"/>
-          </a:p>
-        </p:txBody>
-      </p:sp>
-      <p:sp>
-        <p:nvSpPr>
-          <p:cNvPr id="9" name="Slide Number Placeholder 8">
-            <a:extLst>
-              <a:ext uri="{FF2B5EF4-FFF2-40B4-BE49-F238E27FC236}">
-                <a16:creationId xmlns:a16="http://schemas.microsoft.com/office/drawing/2014/main" id="{9E0A4468-D003-36DC-A6C4-9CA919BC9109}"/>
-              </a:ext>
-            </a:extLst>
-          </p:cNvPr>
+          <p:cNvPr id="9" name="Slide Number Placeholder 8"/>
           <p:cNvSpPr>
             <a:spLocks noGrp="1"/>
           </p:cNvSpPr>
@@ -1897,7 +3634,7 @@
     </p:spTree>
     <p:extLst>
       <p:ext uri="{BB962C8B-B14F-4D97-AF65-F5344CB8AC3E}">
-        <p14:creationId xmlns:p14="http://schemas.microsoft.com/office/powerpoint/2010/main" val="2271617056"/>
+        <p14:creationId xmlns:p14="http://schemas.microsoft.com/office/powerpoint/2010/main" val="3676865072"/>
       </p:ext>
     </p:extLst>
   </p:cSld>
@@ -1926,13 +3663,110 @@
       </p:grpSpPr>
       <p:sp>
         <p:nvSpPr>
-          <p:cNvPr id="2" name="Title 1">
-            <a:extLst>
-              <a:ext uri="{FF2B5EF4-FFF2-40B4-BE49-F238E27FC236}">
-                <a16:creationId xmlns:a16="http://schemas.microsoft.com/office/drawing/2014/main" id="{DD48336B-FAFE-8AE9-9FB5-A687AA77A373}"/>
-              </a:ext>
-            </a:extLst>
-          </p:cNvPr>
+          <p:cNvPr id="6" name="Freeform 6"/>
+          <p:cNvSpPr/>
+          <p:nvPr/>
+        </p:nvSpPr>
+        <p:spPr bwMode="auto">
+          <a:xfrm>
+            <a:off x="0" y="0"/>
+            <a:ext cx="12192000" cy="2185988"/>
+          </a:xfrm>
+          <a:custGeom>
+            <a:avLst/>
+            <a:gdLst/>
+            <a:ahLst/>
+            <a:cxnLst/>
+            <a:rect l="0" t="0" r="r" b="b"/>
+            <a:pathLst>
+              <a:path w="5760" h="1377">
+                <a:moveTo>
+                  <a:pt x="5760" y="0"/>
+                </a:moveTo>
+                <a:lnTo>
+                  <a:pt x="0" y="0"/>
+                </a:lnTo>
+                <a:lnTo>
+                  <a:pt x="0" y="1189"/>
+                </a:lnTo>
+                <a:lnTo>
+                  <a:pt x="943" y="1189"/>
+                </a:lnTo>
+                <a:lnTo>
+                  <a:pt x="1123" y="1369"/>
+                </a:lnTo>
+                <a:lnTo>
+                  <a:pt x="1123" y="1369"/>
+                </a:lnTo>
+                <a:lnTo>
+                  <a:pt x="1127" y="1371"/>
+                </a:lnTo>
+                <a:lnTo>
+                  <a:pt x="1133" y="1374"/>
+                </a:lnTo>
+                <a:lnTo>
+                  <a:pt x="1139" y="1377"/>
+                </a:lnTo>
+                <a:lnTo>
+                  <a:pt x="1144" y="1377"/>
+                </a:lnTo>
+                <a:lnTo>
+                  <a:pt x="1150" y="1377"/>
+                </a:lnTo>
+                <a:lnTo>
+                  <a:pt x="1155" y="1374"/>
+                </a:lnTo>
+                <a:lnTo>
+                  <a:pt x="1161" y="1371"/>
+                </a:lnTo>
+                <a:lnTo>
+                  <a:pt x="1165" y="1369"/>
+                </a:lnTo>
+                <a:lnTo>
+                  <a:pt x="1345" y="1189"/>
+                </a:lnTo>
+                <a:lnTo>
+                  <a:pt x="5760" y="1189"/>
+                </a:lnTo>
+                <a:lnTo>
+                  <a:pt x="5760" y="0"/>
+                </a:lnTo>
+                <a:close/>
+              </a:path>
+            </a:pathLst>
+          </a:custGeom>
+          <a:ln/>
+          <a:extLst>
+            <a:ext uri="{91240B29-F687-4f45-9708-019B960494DF}">
+              <a14:hiddenLine xmlns:a14="http://schemas.microsoft.com/office/drawing/2010/main" xmlns="" w="9525">
+                <a:solidFill>
+                  <a:srgbClr val="000000"/>
+                </a:solidFill>
+                <a:round/>
+                <a:headEnd/>
+                <a:tailEnd/>
+              </a14:hiddenLine>
+            </a:ext>
+          </a:extLst>
+        </p:spPr>
+        <p:style>
+          <a:lnRef idx="1">
+            <a:schemeClr val="accent1"/>
+          </a:lnRef>
+          <a:fillRef idx="3">
+            <a:schemeClr val="accent1"/>
+          </a:fillRef>
+          <a:effectRef idx="2">
+            <a:schemeClr val="accent1"/>
+          </a:effectRef>
+          <a:fontRef idx="minor">
+            <a:schemeClr val="lt1"/>
+          </a:fontRef>
+        </p:style>
+      </p:sp>
+      <p:sp>
+        <p:nvSpPr>
+          <p:cNvPr id="2" name="Title 1"/>
           <p:cNvSpPr>
             <a:spLocks noGrp="1"/>
           </p:cNvSpPr>
@@ -1949,19 +3783,13 @@
               <a:rPr lang="en-US"/>
               <a:t>Click to edit Master title style</a:t>
             </a:r>
-            <a:endParaRPr lang="en-PR"/>
-          </a:p>
-        </p:txBody>
-      </p:sp>
-      <p:sp>
-        <p:nvSpPr>
-          <p:cNvPr id="3" name="Date Placeholder 2">
-            <a:extLst>
-              <a:ext uri="{FF2B5EF4-FFF2-40B4-BE49-F238E27FC236}">
-                <a16:creationId xmlns:a16="http://schemas.microsoft.com/office/drawing/2014/main" id="{3ADFFDDE-55FB-FBEF-FAF3-CCC1ED21EE12}"/>
-              </a:ext>
-            </a:extLst>
-          </p:cNvPr>
+            <a:endParaRPr lang="en-US" dirty="0"/>
+          </a:p>
+        </p:txBody>
+      </p:sp>
+      <p:sp>
+        <p:nvSpPr>
+          <p:cNvPr id="3" name="Date Placeholder 2"/>
           <p:cNvSpPr>
             <a:spLocks noGrp="1"/>
           </p:cNvSpPr>
@@ -1976,7 +3804,7 @@
           <a:p>
             <a:fld id="{2660491B-4C7C-DB4F-95AC-F6744A00D18F}" type="datetimeFigureOut">
               <a:rPr lang="en-PR" smtClean="0"/>
-              <a:t>4/12/26</a:t>
+              <a:t>4/13/26</a:t>
             </a:fld>
             <a:endParaRPr lang="en-PR"/>
           </a:p>
@@ -1984,13 +3812,7 @@
       </p:sp>
       <p:sp>
         <p:nvSpPr>
-          <p:cNvPr id="4" name="Footer Placeholder 3">
-            <a:extLst>
-              <a:ext uri="{FF2B5EF4-FFF2-40B4-BE49-F238E27FC236}">
-                <a16:creationId xmlns:a16="http://schemas.microsoft.com/office/drawing/2014/main" id="{3474F33A-89EA-CABD-2A5D-81D1B1538D0A}"/>
-              </a:ext>
-            </a:extLst>
-          </p:cNvPr>
+          <p:cNvPr id="4" name="Footer Placeholder 3"/>
           <p:cNvSpPr>
             <a:spLocks noGrp="1"/>
           </p:cNvSpPr>
@@ -2009,13 +3831,7 @@
       </p:sp>
       <p:sp>
         <p:nvSpPr>
-          <p:cNvPr id="5" name="Slide Number Placeholder 4">
-            <a:extLst>
-              <a:ext uri="{FF2B5EF4-FFF2-40B4-BE49-F238E27FC236}">
-                <a16:creationId xmlns:a16="http://schemas.microsoft.com/office/drawing/2014/main" id="{44979472-FAA9-A33E-40F9-A0517EF82AC5}"/>
-              </a:ext>
-            </a:extLst>
-          </p:cNvPr>
+          <p:cNvPr id="5" name="Slide Number Placeholder 4"/>
           <p:cNvSpPr>
             <a:spLocks noGrp="1"/>
           </p:cNvSpPr>
@@ -2039,7 +3855,7 @@
     </p:spTree>
     <p:extLst>
       <p:ext uri="{BB962C8B-B14F-4D97-AF65-F5344CB8AC3E}">
-        <p14:creationId xmlns:p14="http://schemas.microsoft.com/office/powerpoint/2010/main" val="34692802"/>
+        <p14:creationId xmlns:p14="http://schemas.microsoft.com/office/powerpoint/2010/main" val="3120374796"/>
       </p:ext>
     </p:extLst>
   </p:cSld>
@@ -2068,13 +3884,7 @@
       </p:grpSpPr>
       <p:sp>
         <p:nvSpPr>
-          <p:cNvPr id="2" name="Date Placeholder 1">
-            <a:extLst>
-              <a:ext uri="{FF2B5EF4-FFF2-40B4-BE49-F238E27FC236}">
-                <a16:creationId xmlns:a16="http://schemas.microsoft.com/office/drawing/2014/main" id="{82EB3274-9D75-810F-DB26-CA162A763443}"/>
-              </a:ext>
-            </a:extLst>
-          </p:cNvPr>
+          <p:cNvPr id="2" name="Date Placeholder 1"/>
           <p:cNvSpPr>
             <a:spLocks noGrp="1"/>
           </p:cNvSpPr>
@@ -2089,7 +3899,7 @@
           <a:p>
             <a:fld id="{2660491B-4C7C-DB4F-95AC-F6744A00D18F}" type="datetimeFigureOut">
               <a:rPr lang="en-PR" smtClean="0"/>
-              <a:t>4/12/26</a:t>
+              <a:t>4/13/26</a:t>
             </a:fld>
             <a:endParaRPr lang="en-PR"/>
           </a:p>
@@ -2097,13 +3907,7 @@
       </p:sp>
       <p:sp>
         <p:nvSpPr>
-          <p:cNvPr id="3" name="Footer Placeholder 2">
-            <a:extLst>
-              <a:ext uri="{FF2B5EF4-FFF2-40B4-BE49-F238E27FC236}">
-                <a16:creationId xmlns:a16="http://schemas.microsoft.com/office/drawing/2014/main" id="{82DC9E78-3DF1-17EA-6F92-E17BCF867576}"/>
-              </a:ext>
-            </a:extLst>
-          </p:cNvPr>
+          <p:cNvPr id="3" name="Footer Placeholder 2"/>
           <p:cNvSpPr>
             <a:spLocks noGrp="1"/>
           </p:cNvSpPr>
@@ -2122,13 +3926,7 @@
       </p:sp>
       <p:sp>
         <p:nvSpPr>
-          <p:cNvPr id="4" name="Slide Number Placeholder 3">
-            <a:extLst>
-              <a:ext uri="{FF2B5EF4-FFF2-40B4-BE49-F238E27FC236}">
-                <a16:creationId xmlns:a16="http://schemas.microsoft.com/office/drawing/2014/main" id="{7DEFCA7B-D762-1D2F-95B6-1CFF1C9DC578}"/>
-              </a:ext>
-            </a:extLst>
-          </p:cNvPr>
+          <p:cNvPr id="4" name="Slide Number Placeholder 3"/>
           <p:cNvSpPr>
             <a:spLocks noGrp="1"/>
           </p:cNvSpPr>
@@ -2152,7 +3950,7 @@
     </p:spTree>
     <p:extLst>
       <p:ext uri="{BB962C8B-B14F-4D97-AF65-F5344CB8AC3E}">
-        <p14:creationId xmlns:p14="http://schemas.microsoft.com/office/powerpoint/2010/main" val="2886831023"/>
+        <p14:creationId xmlns:p14="http://schemas.microsoft.com/office/powerpoint/2010/main" val="1970491462"/>
       </p:ext>
     </p:extLst>
   </p:cSld>
@@ -2181,13 +3979,223 @@
       </p:grpSpPr>
       <p:sp>
         <p:nvSpPr>
-          <p:cNvPr id="2" name="Title 1">
-            <a:extLst>
-              <a:ext uri="{FF2B5EF4-FFF2-40B4-BE49-F238E27FC236}">
-                <a16:creationId xmlns:a16="http://schemas.microsoft.com/office/drawing/2014/main" id="{06CD1E77-87DC-00BA-0A22-5676B581D9A1}"/>
-              </a:ext>
-            </a:extLst>
-          </p:cNvPr>
+          <p:cNvPr id="12" name="Freeform 6"/>
+          <p:cNvSpPr>
+            <a:spLocks noChangeAspect="1"/>
+          </p:cNvSpPr>
+          <p:nvPr/>
+        </p:nvSpPr>
+        <p:spPr bwMode="auto">
+          <a:xfrm>
+            <a:off x="1073151" y="446087"/>
+            <a:ext cx="3547533" cy="1814651"/>
+          </a:xfrm>
+          <a:custGeom>
+            <a:avLst/>
+            <a:gdLst/>
+            <a:ahLst/>
+            <a:cxnLst/>
+            <a:rect l="0" t="0" r="r" b="b"/>
+            <a:pathLst>
+              <a:path w="3384" h="2308">
+                <a:moveTo>
+                  <a:pt x="3340" y="0"/>
+                </a:moveTo>
+                <a:lnTo>
+                  <a:pt x="44" y="0"/>
+                </a:lnTo>
+                <a:lnTo>
+                  <a:pt x="44" y="0"/>
+                </a:lnTo>
+                <a:lnTo>
+                  <a:pt x="34" y="0"/>
+                </a:lnTo>
+                <a:lnTo>
+                  <a:pt x="26" y="4"/>
+                </a:lnTo>
+                <a:lnTo>
+                  <a:pt x="20" y="8"/>
+                </a:lnTo>
+                <a:lnTo>
+                  <a:pt x="12" y="12"/>
+                </a:lnTo>
+                <a:lnTo>
+                  <a:pt x="8" y="20"/>
+                </a:lnTo>
+                <a:lnTo>
+                  <a:pt x="4" y="26"/>
+                </a:lnTo>
+                <a:lnTo>
+                  <a:pt x="0" y="34"/>
+                </a:lnTo>
+                <a:lnTo>
+                  <a:pt x="0" y="44"/>
+                </a:lnTo>
+                <a:lnTo>
+                  <a:pt x="0" y="2076"/>
+                </a:lnTo>
+                <a:lnTo>
+                  <a:pt x="0" y="2076"/>
+                </a:lnTo>
+                <a:lnTo>
+                  <a:pt x="0" y="2086"/>
+                </a:lnTo>
+                <a:lnTo>
+                  <a:pt x="4" y="2094"/>
+                </a:lnTo>
+                <a:lnTo>
+                  <a:pt x="8" y="2100"/>
+                </a:lnTo>
+                <a:lnTo>
+                  <a:pt x="12" y="2108"/>
+                </a:lnTo>
+                <a:lnTo>
+                  <a:pt x="20" y="2112"/>
+                </a:lnTo>
+                <a:lnTo>
+                  <a:pt x="26" y="2116"/>
+                </a:lnTo>
+                <a:lnTo>
+                  <a:pt x="34" y="2120"/>
+                </a:lnTo>
+                <a:lnTo>
+                  <a:pt x="44" y="2120"/>
+                </a:lnTo>
+                <a:lnTo>
+                  <a:pt x="474" y="2120"/>
+                </a:lnTo>
+                <a:lnTo>
+                  <a:pt x="650" y="2296"/>
+                </a:lnTo>
+                <a:lnTo>
+                  <a:pt x="650" y="2296"/>
+                </a:lnTo>
+                <a:lnTo>
+                  <a:pt x="656" y="2300"/>
+                </a:lnTo>
+                <a:lnTo>
+                  <a:pt x="664" y="2304"/>
+                </a:lnTo>
+                <a:lnTo>
+                  <a:pt x="672" y="2308"/>
+                </a:lnTo>
+                <a:lnTo>
+                  <a:pt x="680" y="2308"/>
+                </a:lnTo>
+                <a:lnTo>
+                  <a:pt x="688" y="2308"/>
+                </a:lnTo>
+                <a:lnTo>
+                  <a:pt x="696" y="2304"/>
+                </a:lnTo>
+                <a:lnTo>
+                  <a:pt x="704" y="2300"/>
+                </a:lnTo>
+                <a:lnTo>
+                  <a:pt x="710" y="2296"/>
+                </a:lnTo>
+                <a:lnTo>
+                  <a:pt x="886" y="2120"/>
+                </a:lnTo>
+                <a:lnTo>
+                  <a:pt x="3340" y="2120"/>
+                </a:lnTo>
+                <a:lnTo>
+                  <a:pt x="3340" y="2120"/>
+                </a:lnTo>
+                <a:lnTo>
+                  <a:pt x="3350" y="2120"/>
+                </a:lnTo>
+                <a:lnTo>
+                  <a:pt x="3358" y="2116"/>
+                </a:lnTo>
+                <a:lnTo>
+                  <a:pt x="3364" y="2112"/>
+                </a:lnTo>
+                <a:lnTo>
+                  <a:pt x="3372" y="2108"/>
+                </a:lnTo>
+                <a:lnTo>
+                  <a:pt x="3376" y="2100"/>
+                </a:lnTo>
+                <a:lnTo>
+                  <a:pt x="3380" y="2094"/>
+                </a:lnTo>
+                <a:lnTo>
+                  <a:pt x="3384" y="2086"/>
+                </a:lnTo>
+                <a:lnTo>
+                  <a:pt x="3384" y="2076"/>
+                </a:lnTo>
+                <a:lnTo>
+                  <a:pt x="3384" y="44"/>
+                </a:lnTo>
+                <a:lnTo>
+                  <a:pt x="3384" y="44"/>
+                </a:lnTo>
+                <a:lnTo>
+                  <a:pt x="3384" y="34"/>
+                </a:lnTo>
+                <a:lnTo>
+                  <a:pt x="3380" y="26"/>
+                </a:lnTo>
+                <a:lnTo>
+                  <a:pt x="3376" y="20"/>
+                </a:lnTo>
+                <a:lnTo>
+                  <a:pt x="3372" y="12"/>
+                </a:lnTo>
+                <a:lnTo>
+                  <a:pt x="3364" y="8"/>
+                </a:lnTo>
+                <a:lnTo>
+                  <a:pt x="3358" y="4"/>
+                </a:lnTo>
+                <a:lnTo>
+                  <a:pt x="3350" y="0"/>
+                </a:lnTo>
+                <a:lnTo>
+                  <a:pt x="3340" y="0"/>
+                </a:lnTo>
+                <a:lnTo>
+                  <a:pt x="3340" y="0"/>
+                </a:lnTo>
+                <a:close/>
+              </a:path>
+            </a:pathLst>
+          </a:custGeom>
+          <a:ln/>
+          <a:extLst>
+            <a:ext uri="{91240B29-F687-4f45-9708-019B960494DF}">
+              <a14:hiddenLine xmlns:a14="http://schemas.microsoft.com/office/drawing/2010/main" xmlns="" w="9525">
+                <a:solidFill>
+                  <a:srgbClr val="000000"/>
+                </a:solidFill>
+                <a:round/>
+                <a:headEnd/>
+                <a:tailEnd/>
+              </a14:hiddenLine>
+            </a:ext>
+          </a:extLst>
+        </p:spPr>
+        <p:style>
+          <a:lnRef idx="1">
+            <a:schemeClr val="accent1"/>
+          </a:lnRef>
+          <a:fillRef idx="3">
+            <a:schemeClr val="accent1"/>
+          </a:fillRef>
+          <a:effectRef idx="2">
+            <a:schemeClr val="accent1"/>
+          </a:effectRef>
+          <a:fontRef idx="minor">
+            <a:schemeClr val="lt1"/>
+          </a:fontRef>
+        </p:style>
+      </p:sp>
+      <p:sp>
+        <p:nvSpPr>
+          <p:cNvPr id="2" name="Title 1"/>
           <p:cNvSpPr>
             <a:spLocks noGrp="1"/>
           </p:cNvSpPr>
@@ -2197,15 +4205,15 @@
         </p:nvSpPr>
         <p:spPr>
           <a:xfrm>
-            <a:off x="839788" y="457200"/>
-            <a:ext cx="3932237" cy="1600200"/>
+            <a:off x="1073151" y="446088"/>
+            <a:ext cx="3547533" cy="1618396"/>
           </a:xfrm>
         </p:spPr>
         <p:txBody>
           <a:bodyPr anchor="b"/>
           <a:lstStyle>
-            <a:lvl1pPr>
-              <a:defRPr sz="3200"/>
+            <a:lvl1pPr algn="l">
+              <a:defRPr sz="2000" b="1"/>
             </a:lvl1pPr>
           </a:lstStyle>
           <a:p>
@@ -2213,19 +4221,13 @@
               <a:rPr lang="en-US"/>
               <a:t>Click to edit Master title style</a:t>
             </a:r>
-            <a:endParaRPr lang="en-PR"/>
-          </a:p>
-        </p:txBody>
-      </p:sp>
-      <p:sp>
-        <p:nvSpPr>
-          <p:cNvPr id="3" name="Content Placeholder 2">
-            <a:extLst>
-              <a:ext uri="{FF2B5EF4-FFF2-40B4-BE49-F238E27FC236}">
-                <a16:creationId xmlns:a16="http://schemas.microsoft.com/office/drawing/2014/main" id="{88BE69C6-3360-1034-EA65-206332CE6EB3}"/>
-              </a:ext>
-            </a:extLst>
-          </p:cNvPr>
+            <a:endParaRPr lang="en-US" dirty="0"/>
+          </a:p>
+        </p:txBody>
+      </p:sp>
+      <p:sp>
+        <p:nvSpPr>
+          <p:cNvPr id="3" name="Content Placeholder 2"/>
           <p:cNvSpPr>
             <a:spLocks noGrp="1"/>
           </p:cNvSpPr>
@@ -2235,41 +4237,15 @@
         </p:nvSpPr>
         <p:spPr>
           <a:xfrm>
-            <a:off x="5183188" y="987425"/>
-            <a:ext cx="6172200" cy="4873625"/>
+            <a:off x="4855633" y="446088"/>
+            <a:ext cx="6252633" cy="5414963"/>
           </a:xfrm>
         </p:spPr>
         <p:txBody>
-          <a:bodyPr/>
-          <a:lstStyle>
-            <a:lvl1pPr>
-              <a:defRPr sz="3200"/>
-            </a:lvl1pPr>
-            <a:lvl2pPr>
-              <a:defRPr sz="2800"/>
-            </a:lvl2pPr>
-            <a:lvl3pPr>
-              <a:defRPr sz="2400"/>
-            </a:lvl3pPr>
-            <a:lvl4pPr>
-              <a:defRPr sz="2000"/>
-            </a:lvl4pPr>
-            <a:lvl5pPr>
-              <a:defRPr sz="2000"/>
-            </a:lvl5pPr>
-            <a:lvl6pPr>
-              <a:defRPr sz="2000"/>
-            </a:lvl6pPr>
-            <a:lvl7pPr>
-              <a:defRPr sz="2000"/>
-            </a:lvl7pPr>
-            <a:lvl8pPr>
-              <a:defRPr sz="2000"/>
-            </a:lvl8pPr>
-            <a:lvl9pPr>
-              <a:defRPr sz="2000"/>
-            </a:lvl9pPr>
-          </a:lstStyle>
+          <a:bodyPr>
+            <a:normAutofit/>
+          </a:bodyPr>
+          <a:lstStyle/>
           <a:p>
             <a:pPr lvl="0"/>
             <a:r>
@@ -2304,19 +4280,13 @@
               <a:rPr lang="en-US"/>
               <a:t>Fifth level</a:t>
             </a:r>
-            <a:endParaRPr lang="en-PR"/>
-          </a:p>
-        </p:txBody>
-      </p:sp>
-      <p:sp>
-        <p:nvSpPr>
-          <p:cNvPr id="4" name="Text Placeholder 3">
-            <a:extLst>
-              <a:ext uri="{FF2B5EF4-FFF2-40B4-BE49-F238E27FC236}">
-                <a16:creationId xmlns:a16="http://schemas.microsoft.com/office/drawing/2014/main" id="{10052A05-FB19-2BE2-7521-5E024EFB1C69}"/>
-              </a:ext>
-            </a:extLst>
-          </p:cNvPr>
+            <a:endParaRPr lang="en-US" dirty="0"/>
+          </a:p>
+        </p:txBody>
+      </p:sp>
+      <p:sp>
+        <p:nvSpPr>
+          <p:cNvPr id="4" name="Text Placeholder 3"/>
           <p:cNvSpPr>
             <a:spLocks noGrp="1"/>
           </p:cNvSpPr>
@@ -2326,8 +4296,8 @@
         </p:nvSpPr>
         <p:spPr>
           <a:xfrm>
-            <a:off x="839788" y="2057400"/>
-            <a:ext cx="3932237" cy="3811588"/>
+            <a:off x="1073151" y="2260738"/>
+            <a:ext cx="3547533" cy="3600311"/>
           </a:xfrm>
         </p:spPr>
         <p:txBody>
@@ -2335,39 +4305,39 @@
           <a:lstStyle>
             <a:lvl1pPr marL="0" indent="0">
               <a:buNone/>
-              <a:defRPr sz="1600"/>
+              <a:defRPr sz="1400"/>
             </a:lvl1pPr>
             <a:lvl2pPr marL="457200" indent="0">
               <a:buNone/>
-              <a:defRPr sz="1400"/>
+              <a:defRPr sz="1200"/>
             </a:lvl2pPr>
             <a:lvl3pPr marL="914400" indent="0">
               <a:buNone/>
-              <a:defRPr sz="1200"/>
+              <a:defRPr sz="1000"/>
             </a:lvl3pPr>
             <a:lvl4pPr marL="1371600" indent="0">
               <a:buNone/>
-              <a:defRPr sz="1000"/>
+              <a:defRPr sz="900"/>
             </a:lvl4pPr>
             <a:lvl5pPr marL="1828800" indent="0">
               <a:buNone/>
-              <a:defRPr sz="1000"/>
+              <a:defRPr sz="900"/>
             </a:lvl5pPr>
             <a:lvl6pPr marL="2286000" indent="0">
               <a:buNone/>
-              <a:defRPr sz="1000"/>
+              <a:defRPr sz="900"/>
             </a:lvl6pPr>
             <a:lvl7pPr marL="2743200" indent="0">
               <a:buNone/>
-              <a:defRPr sz="1000"/>
+              <a:defRPr sz="900"/>
             </a:lvl7pPr>
             <a:lvl8pPr marL="3200400" indent="0">
               <a:buNone/>
-              <a:defRPr sz="1000"/>
+              <a:defRPr sz="900"/>
             </a:lvl8pPr>
             <a:lvl9pPr marL="3657600" indent="0">
               <a:buNone/>
-              <a:defRPr sz="1000"/>
+              <a:defRPr sz="900"/>
             </a:lvl9pPr>
           </a:lstStyle>
           <a:p>
@@ -2381,13 +4351,7 @@
       </p:sp>
       <p:sp>
         <p:nvSpPr>
-          <p:cNvPr id="5" name="Date Placeholder 4">
-            <a:extLst>
-              <a:ext uri="{FF2B5EF4-FFF2-40B4-BE49-F238E27FC236}">
-                <a16:creationId xmlns:a16="http://schemas.microsoft.com/office/drawing/2014/main" id="{325752A3-0C41-7284-FD74-2E1F3554CB81}"/>
-              </a:ext>
-            </a:extLst>
-          </p:cNvPr>
+          <p:cNvPr id="5" name="Date Placeholder 4"/>
           <p:cNvSpPr>
             <a:spLocks noGrp="1"/>
           </p:cNvSpPr>
@@ -2402,7 +4366,7 @@
           <a:p>
             <a:fld id="{2660491B-4C7C-DB4F-95AC-F6744A00D18F}" type="datetimeFigureOut">
               <a:rPr lang="en-PR" smtClean="0"/>
-              <a:t>4/12/26</a:t>
+              <a:t>4/13/26</a:t>
             </a:fld>
             <a:endParaRPr lang="en-PR"/>
           </a:p>
@@ -2410,13 +4374,7 @@
       </p:sp>
       <p:sp>
         <p:nvSpPr>
-          <p:cNvPr id="6" name="Footer Placeholder 5">
-            <a:extLst>
-              <a:ext uri="{FF2B5EF4-FFF2-40B4-BE49-F238E27FC236}">
-                <a16:creationId xmlns:a16="http://schemas.microsoft.com/office/drawing/2014/main" id="{08E7D94E-DF3D-ED5A-965C-9A25F1DD7ECA}"/>
-              </a:ext>
-            </a:extLst>
-          </p:cNvPr>
+          <p:cNvPr id="6" name="Footer Placeholder 5"/>
           <p:cNvSpPr>
             <a:spLocks noGrp="1"/>
           </p:cNvSpPr>
@@ -2435,13 +4393,7 @@
       </p:sp>
       <p:sp>
         <p:nvSpPr>
-          <p:cNvPr id="7" name="Slide Number Placeholder 6">
-            <a:extLst>
-              <a:ext uri="{FF2B5EF4-FFF2-40B4-BE49-F238E27FC236}">
-                <a16:creationId xmlns:a16="http://schemas.microsoft.com/office/drawing/2014/main" id="{8C8A5041-0A1F-E325-0BC4-2A8B05EC14D4}"/>
-              </a:ext>
-            </a:extLst>
-          </p:cNvPr>
+          <p:cNvPr id="7" name="Slide Number Placeholder 6"/>
           <p:cNvSpPr>
             <a:spLocks noGrp="1"/>
           </p:cNvSpPr>
@@ -2465,7 +4417,7 @@
     </p:spTree>
     <p:extLst>
       <p:ext uri="{BB962C8B-B14F-4D97-AF65-F5344CB8AC3E}">
-        <p14:creationId xmlns:p14="http://schemas.microsoft.com/office/powerpoint/2010/main" val="3171290944"/>
+        <p14:creationId xmlns:p14="http://schemas.microsoft.com/office/powerpoint/2010/main" val="2063800707"/>
       </p:ext>
     </p:extLst>
   </p:cSld>
@@ -2494,13 +4446,7 @@
       </p:grpSpPr>
       <p:sp>
         <p:nvSpPr>
-          <p:cNvPr id="2" name="Title 1">
-            <a:extLst>
-              <a:ext uri="{FF2B5EF4-FFF2-40B4-BE49-F238E27FC236}">
-                <a16:creationId xmlns:a16="http://schemas.microsoft.com/office/drawing/2014/main" id="{45741CC9-F4D8-9A2A-ACB0-A9D37F750C2E}"/>
-              </a:ext>
-            </a:extLst>
-          </p:cNvPr>
+          <p:cNvPr id="2" name="Title 1"/>
           <p:cNvSpPr>
             <a:spLocks noGrp="1"/>
           </p:cNvSpPr>
@@ -2510,15 +4456,17 @@
         </p:nvSpPr>
         <p:spPr>
           <a:xfrm>
-            <a:off x="839788" y="457200"/>
-            <a:ext cx="3932237" cy="1600200"/>
+            <a:off x="814728" y="727522"/>
+            <a:ext cx="4852988" cy="1617163"/>
           </a:xfrm>
         </p:spPr>
         <p:txBody>
-          <a:bodyPr anchor="b"/>
+          <a:bodyPr anchor="b">
+            <a:normAutofit/>
+          </a:bodyPr>
           <a:lstStyle>
-            <a:lvl1pPr>
-              <a:defRPr sz="3200"/>
+            <a:lvl1pPr algn="l">
+              <a:defRPr sz="2400" b="0"/>
             </a:lvl1pPr>
           </a:lstStyle>
           <a:p>
@@ -2526,211 +4474,244 @@
               <a:rPr lang="en-US"/>
               <a:t>Click to edit Master title style</a:t>
             </a:r>
-            <a:endParaRPr lang="en-PR"/>
-          </a:p>
-        </p:txBody>
-      </p:sp>
-      <p:sp>
-        <p:nvSpPr>
-          <p:cNvPr id="3" name="Picture Placeholder 2">
-            <a:extLst>
-              <a:ext uri="{FF2B5EF4-FFF2-40B4-BE49-F238E27FC236}">
-                <a16:creationId xmlns:a16="http://schemas.microsoft.com/office/drawing/2014/main" id="{81E8033D-7215-5027-2B92-BFC215B19A66}"/>
-              </a:ext>
-            </a:extLst>
-          </p:cNvPr>
-          <p:cNvSpPr>
-            <a:spLocks noGrp="1"/>
-          </p:cNvSpPr>
-          <p:nvPr>
-            <p:ph type="pic" idx="1"/>
+            <a:endParaRPr lang="en-US" dirty="0"/>
+          </a:p>
+        </p:txBody>
+      </p:sp>
+      <p:sp>
+        <p:nvSpPr>
+          <p:cNvPr id="9" name="Picture Placeholder 11"/>
+          <p:cNvSpPr>
+            <a:spLocks noGrp="1" noChangeAspect="1"/>
+          </p:cNvSpPr>
+          <p:nvPr>
+            <p:ph type="pic" sz="quarter" idx="13"/>
+          </p:nvPr>
+        </p:nvSpPr>
+        <p:spPr bwMode="auto">
+          <a:xfrm>
+            <a:off x="6098117" y="0"/>
+            <a:ext cx="6093883" cy="6858000"/>
+          </a:xfrm>
+          <a:custGeom>
+            <a:avLst/>
+            <a:gdLst/>
+            <a:ahLst/>
+            <a:cxnLst/>
+            <a:rect l="0" t="0" r="r" b="b"/>
+            <a:pathLst>
+              <a:path w="2879" h="4320">
+                <a:moveTo>
+                  <a:pt x="183" y="0"/>
+                </a:moveTo>
+                <a:lnTo>
+                  <a:pt x="183" y="1197"/>
+                </a:lnTo>
+                <a:lnTo>
+                  <a:pt x="8" y="1372"/>
+                </a:lnTo>
+                <a:lnTo>
+                  <a:pt x="8" y="1372"/>
+                </a:lnTo>
+                <a:lnTo>
+                  <a:pt x="6" y="1376"/>
+                </a:lnTo>
+                <a:lnTo>
+                  <a:pt x="3" y="1382"/>
+                </a:lnTo>
+                <a:lnTo>
+                  <a:pt x="0" y="1387"/>
+                </a:lnTo>
+                <a:lnTo>
+                  <a:pt x="0" y="1393"/>
+                </a:lnTo>
+                <a:lnTo>
+                  <a:pt x="0" y="1399"/>
+                </a:lnTo>
+                <a:lnTo>
+                  <a:pt x="3" y="1404"/>
+                </a:lnTo>
+                <a:lnTo>
+                  <a:pt x="6" y="1410"/>
+                </a:lnTo>
+                <a:lnTo>
+                  <a:pt x="8" y="1414"/>
+                </a:lnTo>
+                <a:lnTo>
+                  <a:pt x="183" y="1589"/>
+                </a:lnTo>
+                <a:lnTo>
+                  <a:pt x="183" y="4320"/>
+                </a:lnTo>
+                <a:lnTo>
+                  <a:pt x="2879" y="4320"/>
+                </a:lnTo>
+                <a:lnTo>
+                  <a:pt x="2879" y="0"/>
+                </a:lnTo>
+                <a:lnTo>
+                  <a:pt x="183" y="0"/>
+                </a:lnTo>
+                <a:close/>
+              </a:path>
+            </a:pathLst>
+          </a:custGeom>
+          <a:noFill/>
+          <a:ln w="9525">
+            <a:solidFill>
+              <a:schemeClr val="tx2"/>
+            </a:solidFill>
+            <a:round/>
+            <a:headEnd/>
+            <a:tailEnd/>
+          </a:ln>
+          <a:effectLst/>
+        </p:spPr>
+        <p:txBody>
+          <a:bodyPr wrap="square" numCol="1" anchor="t" anchorCtr="0" compatLnSpc="1">
+            <a:prstTxWarp prst="textNoShape">
+              <a:avLst/>
+            </a:prstTxWarp>
+            <a:normAutofit/>
+          </a:bodyPr>
+          <a:lstStyle>
+            <a:lvl1pPr algn="ctr">
+              <a:buFontTx/>
+              <a:buNone/>
+              <a:defRPr sz="1400"/>
+            </a:lvl1pPr>
+          </a:lstStyle>
+          <a:p>
+            <a:r>
+              <a:rPr lang="en-US"/>
+              <a:t>Click icon to add picture</a:t>
+            </a:r>
+            <a:endParaRPr lang="en-US" dirty="0"/>
+          </a:p>
+        </p:txBody>
+      </p:sp>
+      <p:sp>
+        <p:nvSpPr>
+          <p:cNvPr id="4" name="Text Placeholder 3"/>
+          <p:cNvSpPr>
+            <a:spLocks noGrp="1"/>
+          </p:cNvSpPr>
+          <p:nvPr>
+            <p:ph type="body" sz="half" idx="2"/>
           </p:nvPr>
         </p:nvSpPr>
         <p:spPr>
           <a:xfrm>
-            <a:off x="5183188" y="987425"/>
-            <a:ext cx="6172200" cy="4873625"/>
+            <a:off x="814728" y="2344684"/>
+            <a:ext cx="4852988" cy="3516365"/>
           </a:xfrm>
         </p:spPr>
         <p:txBody>
-          <a:bodyPr/>
+          <a:bodyPr anchor="t">
+            <a:normAutofit/>
+          </a:bodyPr>
           <a:lstStyle>
             <a:lvl1pPr marL="0" indent="0">
               <a:buNone/>
-              <a:defRPr sz="3200"/>
+              <a:defRPr sz="1200"/>
             </a:lvl1pPr>
             <a:lvl2pPr marL="457200" indent="0">
               <a:buNone/>
-              <a:defRPr sz="2800"/>
+              <a:defRPr sz="1200"/>
             </a:lvl2pPr>
             <a:lvl3pPr marL="914400" indent="0">
               <a:buNone/>
-              <a:defRPr sz="2400"/>
+              <a:defRPr sz="1000"/>
             </a:lvl3pPr>
             <a:lvl4pPr marL="1371600" indent="0">
               <a:buNone/>
-              <a:defRPr sz="2000"/>
+              <a:defRPr sz="900"/>
             </a:lvl4pPr>
             <a:lvl5pPr marL="1828800" indent="0">
               <a:buNone/>
-              <a:defRPr sz="2000"/>
+              <a:defRPr sz="900"/>
             </a:lvl5pPr>
             <a:lvl6pPr marL="2286000" indent="0">
               <a:buNone/>
-              <a:defRPr sz="2000"/>
+              <a:defRPr sz="900"/>
             </a:lvl6pPr>
             <a:lvl7pPr marL="2743200" indent="0">
               <a:buNone/>
-              <a:defRPr sz="2000"/>
+              <a:defRPr sz="900"/>
             </a:lvl7pPr>
             <a:lvl8pPr marL="3200400" indent="0">
               <a:buNone/>
-              <a:defRPr sz="2000"/>
+              <a:defRPr sz="900"/>
             </a:lvl8pPr>
             <a:lvl9pPr marL="3657600" indent="0">
               <a:buNone/>
-              <a:defRPr sz="2000"/>
+              <a:defRPr sz="900"/>
             </a:lvl9pPr>
           </a:lstStyle>
           <a:p>
-            <a:endParaRPr lang="en-PR"/>
-          </a:p>
-        </p:txBody>
-      </p:sp>
-      <p:sp>
-        <p:nvSpPr>
-          <p:cNvPr id="4" name="Text Placeholder 3">
-            <a:extLst>
-              <a:ext uri="{FF2B5EF4-FFF2-40B4-BE49-F238E27FC236}">
-                <a16:creationId xmlns:a16="http://schemas.microsoft.com/office/drawing/2014/main" id="{475ACD6B-626F-47F0-00EB-97B4A261DFCB}"/>
-              </a:ext>
-            </a:extLst>
-          </p:cNvPr>
-          <p:cNvSpPr>
-            <a:spLocks noGrp="1"/>
-          </p:cNvSpPr>
-          <p:nvPr>
-            <p:ph type="body" sz="half" idx="2"/>
+            <a:pPr lvl="0"/>
+            <a:r>
+              <a:rPr lang="en-US"/>
+              <a:t>Click to edit Master text styles</a:t>
+            </a:r>
+          </a:p>
+        </p:txBody>
+      </p:sp>
+      <p:sp>
+        <p:nvSpPr>
+          <p:cNvPr id="5" name="Date Placeholder 4"/>
+          <p:cNvSpPr>
+            <a:spLocks noGrp="1"/>
+          </p:cNvSpPr>
+          <p:nvPr>
+            <p:ph type="dt" sz="half" idx="10"/>
           </p:nvPr>
         </p:nvSpPr>
         <p:spPr>
           <a:xfrm>
-            <a:off x="839788" y="2057400"/>
-            <a:ext cx="3932237" cy="3811588"/>
+            <a:off x="3885810" y="6041362"/>
+            <a:ext cx="976879" cy="365125"/>
           </a:xfrm>
         </p:spPr>
         <p:txBody>
           <a:bodyPr/>
-          <a:lstStyle>
-            <a:lvl1pPr marL="0" indent="0">
-              <a:buNone/>
-              <a:defRPr sz="1600"/>
-            </a:lvl1pPr>
-            <a:lvl2pPr marL="457200" indent="0">
-              <a:buNone/>
-              <a:defRPr sz="1400"/>
-            </a:lvl2pPr>
-            <a:lvl3pPr marL="914400" indent="0">
-              <a:buNone/>
-              <a:defRPr sz="1200"/>
-            </a:lvl3pPr>
-            <a:lvl4pPr marL="1371600" indent="0">
-              <a:buNone/>
-              <a:defRPr sz="1000"/>
-            </a:lvl4pPr>
-            <a:lvl5pPr marL="1828800" indent="0">
-              <a:buNone/>
-              <a:defRPr sz="1000"/>
-            </a:lvl5pPr>
-            <a:lvl6pPr marL="2286000" indent="0">
-              <a:buNone/>
-              <a:defRPr sz="1000"/>
-            </a:lvl6pPr>
-            <a:lvl7pPr marL="2743200" indent="0">
-              <a:buNone/>
-              <a:defRPr sz="1000"/>
-            </a:lvl7pPr>
-            <a:lvl8pPr marL="3200400" indent="0">
-              <a:buNone/>
-              <a:defRPr sz="1000"/>
-            </a:lvl8pPr>
-            <a:lvl9pPr marL="3657600" indent="0">
-              <a:buNone/>
-              <a:defRPr sz="1000"/>
-            </a:lvl9pPr>
-          </a:lstStyle>
-          <a:p>
-            <a:pPr lvl="0"/>
-            <a:r>
-              <a:rPr lang="en-US"/>
-              <a:t>Click to edit Master text styles</a:t>
-            </a:r>
-          </a:p>
-        </p:txBody>
-      </p:sp>
-      <p:sp>
-        <p:nvSpPr>
-          <p:cNvPr id="5" name="Date Placeholder 4">
-            <a:extLst>
-              <a:ext uri="{FF2B5EF4-FFF2-40B4-BE49-F238E27FC236}">
-                <a16:creationId xmlns:a16="http://schemas.microsoft.com/office/drawing/2014/main" id="{33149CF8-343B-31E3-99C9-3E8FACE4C676}"/>
-              </a:ext>
-            </a:extLst>
-          </p:cNvPr>
-          <p:cNvSpPr>
-            <a:spLocks noGrp="1"/>
-          </p:cNvSpPr>
-          <p:nvPr>
-            <p:ph type="dt" sz="half" idx="10"/>
-          </p:nvPr>
-        </p:nvSpPr>
-        <p:spPr/>
+          <a:lstStyle/>
+          <a:p>
+            <a:fld id="{2660491B-4C7C-DB4F-95AC-F6744A00D18F}" type="datetimeFigureOut">
+              <a:rPr lang="en-PR" smtClean="0"/>
+              <a:t>4/13/26</a:t>
+            </a:fld>
+            <a:endParaRPr lang="en-PR"/>
+          </a:p>
+        </p:txBody>
+      </p:sp>
+      <p:sp>
+        <p:nvSpPr>
+          <p:cNvPr id="6" name="Footer Placeholder 5"/>
+          <p:cNvSpPr>
+            <a:spLocks noGrp="1"/>
+          </p:cNvSpPr>
+          <p:nvPr>
+            <p:ph type="ftr" sz="quarter" idx="11"/>
+          </p:nvPr>
+        </p:nvSpPr>
+        <p:spPr>
+          <a:xfrm>
+            <a:off x="590396" y="6041362"/>
+            <a:ext cx="3295413" cy="365125"/>
+          </a:xfrm>
+        </p:spPr>
         <p:txBody>
           <a:bodyPr/>
           <a:lstStyle/>
           <a:p>
-            <a:fld id="{2660491B-4C7C-DB4F-95AC-F6744A00D18F}" type="datetimeFigureOut">
-              <a:rPr lang="en-PR" smtClean="0"/>
-              <a:t>4/12/26</a:t>
-            </a:fld>
             <a:endParaRPr lang="en-PR"/>
           </a:p>
         </p:txBody>
       </p:sp>
       <p:sp>
         <p:nvSpPr>
-          <p:cNvPr id="6" name="Footer Placeholder 5">
-            <a:extLst>
-              <a:ext uri="{FF2B5EF4-FFF2-40B4-BE49-F238E27FC236}">
-                <a16:creationId xmlns:a16="http://schemas.microsoft.com/office/drawing/2014/main" id="{05FDD704-1D06-5C1E-A121-A55D495C20EF}"/>
-              </a:ext>
-            </a:extLst>
-          </p:cNvPr>
-          <p:cNvSpPr>
-            <a:spLocks noGrp="1"/>
-          </p:cNvSpPr>
-          <p:nvPr>
-            <p:ph type="ftr" sz="quarter" idx="11"/>
-          </p:nvPr>
-        </p:nvSpPr>
-        <p:spPr/>
-        <p:txBody>
-          <a:bodyPr/>
-          <a:lstStyle/>
-          <a:p>
-            <a:endParaRPr lang="en-PR"/>
-          </a:p>
-        </p:txBody>
-      </p:sp>
-      <p:sp>
-        <p:nvSpPr>
-          <p:cNvPr id="7" name="Slide Number Placeholder 6">
-            <a:extLst>
-              <a:ext uri="{FF2B5EF4-FFF2-40B4-BE49-F238E27FC236}">
-                <a16:creationId xmlns:a16="http://schemas.microsoft.com/office/drawing/2014/main" id="{F42AFF3A-1C07-8335-2115-60BD4FE06CE7}"/>
-              </a:ext>
-            </a:extLst>
-          </p:cNvPr>
+          <p:cNvPr id="7" name="Slide Number Placeholder 6"/>
           <p:cNvSpPr>
             <a:spLocks noGrp="1"/>
           </p:cNvSpPr>
@@ -2738,7 +4719,12 @@
             <p:ph type="sldNum" sz="quarter" idx="12"/>
           </p:nvPr>
         </p:nvSpPr>
-        <p:spPr/>
+        <p:spPr>
+          <a:xfrm>
+            <a:off x="4862689" y="5915888"/>
+            <a:ext cx="1062155" cy="490599"/>
+          </a:xfrm>
+        </p:spPr>
         <p:txBody>
           <a:bodyPr/>
           <a:lstStyle/>
@@ -2754,7 +4740,7 @@
     </p:spTree>
     <p:extLst>
       <p:ext uri="{BB962C8B-B14F-4D97-AF65-F5344CB8AC3E}">
-        <p14:creationId xmlns:p14="http://schemas.microsoft.com/office/powerpoint/2010/main" val="3612522114"/>
+        <p14:creationId xmlns:p14="http://schemas.microsoft.com/office/powerpoint/2010/main" val="1345078579"/>
       </p:ext>
     </p:extLst>
   </p:cSld>
@@ -2769,7 +4755,7 @@
   <p:cSld>
     <p:bg>
       <p:bgRef idx="1001">
-        <a:schemeClr val="bg1"/>
+        <a:schemeClr val="bg2"/>
       </p:bgRef>
     </p:bg>
     <p:spTree>
@@ -2788,13 +4774,7 @@
       </p:grpSpPr>
       <p:sp>
         <p:nvSpPr>
-          <p:cNvPr id="2" name="Title Placeholder 1">
-            <a:extLst>
-              <a:ext uri="{FF2B5EF4-FFF2-40B4-BE49-F238E27FC236}">
-                <a16:creationId xmlns:a16="http://schemas.microsoft.com/office/drawing/2014/main" id="{E43ACBBE-880C-E007-C92B-58F2326D26F7}"/>
-              </a:ext>
-            </a:extLst>
-          </p:cNvPr>
+          <p:cNvPr id="2" name="Title Placeholder 1"/>
           <p:cNvSpPr>
             <a:spLocks noGrp="1"/>
           </p:cNvSpPr>
@@ -2804,219 +4784,203 @@
         </p:nvSpPr>
         <p:spPr>
           <a:xfrm>
-            <a:off x="838200" y="365125"/>
-            <a:ext cx="10515600" cy="1325563"/>
+            <a:off x="810000" y="447188"/>
+            <a:ext cx="10571998" cy="970450"/>
+          </a:xfrm>
+          <a:prstGeom prst="rect">
+            <a:avLst/>
+          </a:prstGeom>
+          <a:effectLst>
+            <a:outerShdw blurRad="50800" dir="14400000">
+              <a:srgbClr val="000000">
+                <a:alpha val="60000"/>
+              </a:srgbClr>
+            </a:outerShdw>
+          </a:effectLst>
+        </p:spPr>
+        <p:txBody>
+          <a:bodyPr vert="horz" lIns="91440" tIns="45720" rIns="91440" bIns="45720" rtlCol="0" anchor="b">
+            <a:noAutofit/>
+          </a:bodyPr>
+          <a:lstStyle/>
+          <a:p>
+            <a:r>
+              <a:rPr lang="en-US"/>
+              <a:t>Click to edit Master title style</a:t>
+            </a:r>
+            <a:endParaRPr lang="en-US" dirty="0"/>
+          </a:p>
+        </p:txBody>
+      </p:sp>
+      <p:sp>
+        <p:nvSpPr>
+          <p:cNvPr id="3" name="Text Placeholder 2"/>
+          <p:cNvSpPr>
+            <a:spLocks noGrp="1"/>
+          </p:cNvSpPr>
+          <p:nvPr>
+            <p:ph type="body" idx="1"/>
+          </p:nvPr>
+        </p:nvSpPr>
+        <p:spPr>
+          <a:xfrm>
+            <a:off x="810000" y="2184401"/>
+            <a:ext cx="10563285" cy="3674397"/>
+          </a:xfrm>
+          <a:prstGeom prst="rect">
+            <a:avLst/>
+          </a:prstGeom>
+          <a:effectLst>
+            <a:outerShdw blurRad="50800" dir="14400000">
+              <a:srgbClr val="000000">
+                <a:alpha val="40000"/>
+              </a:srgbClr>
+            </a:outerShdw>
+          </a:effectLst>
+        </p:spPr>
+        <p:txBody>
+          <a:bodyPr vert="horz" lIns="91440" tIns="45720" rIns="91440" bIns="45720" rtlCol="0" anchor="ctr">
+            <a:normAutofit/>
+          </a:bodyPr>
+          <a:lstStyle/>
+          <a:p>
+            <a:pPr lvl="0"/>
+            <a:r>
+              <a:rPr lang="en-US"/>
+              <a:t>Click to edit Master text styles</a:t>
+            </a:r>
+          </a:p>
+          <a:p>
+            <a:pPr lvl="1"/>
+            <a:r>
+              <a:rPr lang="en-US"/>
+              <a:t>Second level</a:t>
+            </a:r>
+          </a:p>
+          <a:p>
+            <a:pPr lvl="2"/>
+            <a:r>
+              <a:rPr lang="en-US"/>
+              <a:t>Third level</a:t>
+            </a:r>
+          </a:p>
+          <a:p>
+            <a:pPr lvl="3"/>
+            <a:r>
+              <a:rPr lang="en-US"/>
+              <a:t>Fourth level</a:t>
+            </a:r>
+          </a:p>
+          <a:p>
+            <a:pPr lvl="4"/>
+            <a:r>
+              <a:rPr lang="en-US"/>
+              <a:t>Fifth level</a:t>
+            </a:r>
+            <a:endParaRPr lang="en-US" dirty="0"/>
+          </a:p>
+        </p:txBody>
+      </p:sp>
+      <p:sp>
+        <p:nvSpPr>
+          <p:cNvPr id="5" name="Footer Placeholder 4"/>
+          <p:cNvSpPr>
+            <a:spLocks noGrp="1"/>
+          </p:cNvSpPr>
+          <p:nvPr>
+            <p:ph type="ftr" sz="quarter" idx="3"/>
+          </p:nvPr>
+        </p:nvSpPr>
+        <p:spPr>
+          <a:xfrm>
+            <a:off x="451514" y="6041362"/>
+            <a:ext cx="8644320" cy="365125"/>
           </a:xfrm>
           <a:prstGeom prst="rect">
             <a:avLst/>
           </a:prstGeom>
         </p:spPr>
         <p:txBody>
-          <a:bodyPr vert="horz" lIns="91440" tIns="45720" rIns="91440" bIns="45720" rtlCol="0" anchor="ctr">
-            <a:normAutofit/>
-          </a:bodyPr>
-          <a:lstStyle/>
-          <a:p>
-            <a:r>
-              <a:rPr lang="en-US"/>
-              <a:t>Click to edit Master title style</a:t>
-            </a:r>
+          <a:bodyPr vert="horz" lIns="91440" tIns="45720" rIns="91440" bIns="45720" rtlCol="0" anchor="b"/>
+          <a:lstStyle>
+            <a:lvl1pPr algn="l">
+              <a:defRPr sz="900">
+                <a:solidFill>
+                  <a:schemeClr val="tx1"/>
+                </a:solidFill>
+              </a:defRPr>
+            </a:lvl1pPr>
+          </a:lstStyle>
+          <a:p>
             <a:endParaRPr lang="en-PR"/>
           </a:p>
         </p:txBody>
       </p:sp>
       <p:sp>
         <p:nvSpPr>
-          <p:cNvPr id="3" name="Text Placeholder 2">
-            <a:extLst>
-              <a:ext uri="{FF2B5EF4-FFF2-40B4-BE49-F238E27FC236}">
-                <a16:creationId xmlns:a16="http://schemas.microsoft.com/office/drawing/2014/main" id="{CF8E3F48-5E41-E905-D278-BAC0B80C73FC}"/>
-              </a:ext>
-            </a:extLst>
-          </p:cNvPr>
-          <p:cNvSpPr>
-            <a:spLocks noGrp="1"/>
-          </p:cNvSpPr>
-          <p:nvPr>
-            <p:ph type="body" idx="1"/>
+          <p:cNvPr id="4" name="Date Placeholder 3"/>
+          <p:cNvSpPr>
+            <a:spLocks noGrp="1"/>
+          </p:cNvSpPr>
+          <p:nvPr>
+            <p:ph type="dt" sz="half" idx="2"/>
           </p:nvPr>
         </p:nvSpPr>
         <p:spPr>
           <a:xfrm>
-            <a:off x="838200" y="1825625"/>
-            <a:ext cx="10515600" cy="4351338"/>
+            <a:off x="9334626" y="6041362"/>
+            <a:ext cx="1343706" cy="365125"/>
           </a:xfrm>
           <a:prstGeom prst="rect">
             <a:avLst/>
           </a:prstGeom>
         </p:spPr>
         <p:txBody>
-          <a:bodyPr vert="horz" lIns="91440" tIns="45720" rIns="91440" bIns="45720" rtlCol="0">
-            <a:normAutofit/>
-          </a:bodyPr>
-          <a:lstStyle/>
-          <a:p>
-            <a:pPr lvl="0"/>
-            <a:r>
-              <a:rPr lang="en-US"/>
-              <a:t>Click to edit Master text styles</a:t>
-            </a:r>
-          </a:p>
-          <a:p>
-            <a:pPr lvl="1"/>
-            <a:r>
-              <a:rPr lang="en-US"/>
-              <a:t>Second level</a:t>
-            </a:r>
-          </a:p>
-          <a:p>
-            <a:pPr lvl="2"/>
-            <a:r>
-              <a:rPr lang="en-US"/>
-              <a:t>Third level</a:t>
-            </a:r>
-          </a:p>
-          <a:p>
-            <a:pPr lvl="3"/>
-            <a:r>
-              <a:rPr lang="en-US"/>
-              <a:t>Fourth level</a:t>
-            </a:r>
-          </a:p>
-          <a:p>
-            <a:pPr lvl="4"/>
-            <a:r>
-              <a:rPr lang="en-US"/>
-              <a:t>Fifth level</a:t>
-            </a:r>
+          <a:bodyPr vert="horz" lIns="91440" tIns="45720" rIns="91440" bIns="45720" rtlCol="0" anchor="b"/>
+          <a:lstStyle>
+            <a:lvl1pPr algn="r">
+              <a:defRPr sz="900">
+                <a:solidFill>
+                  <a:schemeClr val="tx1"/>
+                </a:solidFill>
+              </a:defRPr>
+            </a:lvl1pPr>
+          </a:lstStyle>
+          <a:p>
+            <a:fld id="{2660491B-4C7C-DB4F-95AC-F6744A00D18F}" type="datetimeFigureOut">
+              <a:rPr lang="en-PR" smtClean="0"/>
+              <a:t>4/13/26</a:t>
+            </a:fld>
             <a:endParaRPr lang="en-PR"/>
           </a:p>
         </p:txBody>
       </p:sp>
       <p:sp>
         <p:nvSpPr>
-          <p:cNvPr id="4" name="Date Placeholder 3">
-            <a:extLst>
-              <a:ext uri="{FF2B5EF4-FFF2-40B4-BE49-F238E27FC236}">
-                <a16:creationId xmlns:a16="http://schemas.microsoft.com/office/drawing/2014/main" id="{3F1DE225-1FC5-9C29-C6CA-8CA4EF9EC03D}"/>
-              </a:ext>
-            </a:extLst>
-          </p:cNvPr>
-          <p:cNvSpPr>
-            <a:spLocks noGrp="1"/>
-          </p:cNvSpPr>
-          <p:nvPr>
-            <p:ph type="dt" sz="half" idx="2"/>
+          <p:cNvPr id="6" name="Slide Number Placeholder 5"/>
+          <p:cNvSpPr>
+            <a:spLocks noGrp="1"/>
+          </p:cNvSpPr>
+          <p:nvPr>
+            <p:ph type="sldNum" sz="quarter" idx="4"/>
           </p:nvPr>
         </p:nvSpPr>
         <p:spPr>
           <a:xfrm>
-            <a:off x="838200" y="6356350"/>
-            <a:ext cx="2743200" cy="365125"/>
+            <a:off x="10678331" y="5915888"/>
+            <a:ext cx="1062155" cy="490599"/>
           </a:xfrm>
           <a:prstGeom prst="rect">
             <a:avLst/>
           </a:prstGeom>
         </p:spPr>
         <p:txBody>
-          <a:bodyPr vert="horz" lIns="91440" tIns="45720" rIns="91440" bIns="45720" rtlCol="0" anchor="ctr"/>
-          <a:lstStyle>
-            <a:lvl1pPr algn="l">
-              <a:defRPr sz="1200">
-                <a:solidFill>
-                  <a:schemeClr val="tx1">
-                    <a:tint val="82000"/>
-                  </a:schemeClr>
-                </a:solidFill>
-              </a:defRPr>
-            </a:lvl1pPr>
-          </a:lstStyle>
-          <a:p>
-            <a:fld id="{2660491B-4C7C-DB4F-95AC-F6744A00D18F}" type="datetimeFigureOut">
-              <a:rPr lang="en-PR" smtClean="0"/>
-              <a:t>4/12/26</a:t>
-            </a:fld>
-            <a:endParaRPr lang="en-PR"/>
-          </a:p>
-        </p:txBody>
-      </p:sp>
-      <p:sp>
-        <p:nvSpPr>
-          <p:cNvPr id="5" name="Footer Placeholder 4">
-            <a:extLst>
-              <a:ext uri="{FF2B5EF4-FFF2-40B4-BE49-F238E27FC236}">
-                <a16:creationId xmlns:a16="http://schemas.microsoft.com/office/drawing/2014/main" id="{EA76E732-9E73-5AE9-6B20-6036CF637914}"/>
-              </a:ext>
-            </a:extLst>
-          </p:cNvPr>
-          <p:cNvSpPr>
-            <a:spLocks noGrp="1"/>
-          </p:cNvSpPr>
-          <p:nvPr>
-            <p:ph type="ftr" sz="quarter" idx="3"/>
-          </p:nvPr>
-        </p:nvSpPr>
-        <p:spPr>
-          <a:xfrm>
-            <a:off x="4038600" y="6356350"/>
-            <a:ext cx="4114800" cy="365125"/>
-          </a:xfrm>
-          <a:prstGeom prst="rect">
-            <a:avLst/>
-          </a:prstGeom>
-        </p:spPr>
-        <p:txBody>
-          <a:bodyPr vert="horz" lIns="91440" tIns="45720" rIns="91440" bIns="45720" rtlCol="0" anchor="ctr"/>
-          <a:lstStyle>
-            <a:lvl1pPr algn="ctr">
-              <a:defRPr sz="1200">
-                <a:solidFill>
-                  <a:schemeClr val="tx1">
-                    <a:tint val="82000"/>
-                  </a:schemeClr>
-                </a:solidFill>
-              </a:defRPr>
-            </a:lvl1pPr>
-          </a:lstStyle>
-          <a:p>
-            <a:endParaRPr lang="en-PR"/>
-          </a:p>
-        </p:txBody>
-      </p:sp>
-      <p:sp>
-        <p:nvSpPr>
-          <p:cNvPr id="6" name="Slide Number Placeholder 5">
-            <a:extLst>
-              <a:ext uri="{FF2B5EF4-FFF2-40B4-BE49-F238E27FC236}">
-                <a16:creationId xmlns:a16="http://schemas.microsoft.com/office/drawing/2014/main" id="{4D7D212A-6AD6-8FFE-B2AC-0C521ABF8656}"/>
-              </a:ext>
-            </a:extLst>
-          </p:cNvPr>
-          <p:cNvSpPr>
-            <a:spLocks noGrp="1"/>
-          </p:cNvSpPr>
-          <p:nvPr>
-            <p:ph type="sldNum" sz="quarter" idx="4"/>
-          </p:nvPr>
-        </p:nvSpPr>
-        <p:spPr>
-          <a:xfrm>
-            <a:off x="8610600" y="6356350"/>
-            <a:ext cx="2743200" cy="365125"/>
-          </a:xfrm>
-          <a:prstGeom prst="rect">
-            <a:avLst/>
-          </a:prstGeom>
-        </p:spPr>
-        <p:txBody>
-          <a:bodyPr vert="horz" lIns="91440" tIns="45720" rIns="91440" bIns="45720" rtlCol="0" anchor="ctr"/>
+          <a:bodyPr vert="horz" lIns="91440" tIns="45720" rIns="91440" bIns="10800" rtlCol="0" anchor="b"/>
           <a:lstStyle>
             <a:lvl1pPr algn="r">
-              <a:defRPr sz="1200">
+              <a:defRPr sz="2000">
                 <a:solidFill>
-                  <a:schemeClr val="tx1">
-                    <a:tint val="82000"/>
-                  </a:schemeClr>
+                  <a:schemeClr val="accent1"/>
                 </a:solidFill>
               </a:defRPr>
             </a:lvl1pPr>
@@ -3033,55 +4997,114 @@
     </p:spTree>
     <p:extLst>
       <p:ext uri="{BB962C8B-B14F-4D97-AF65-F5344CB8AC3E}">
-        <p14:creationId xmlns:p14="http://schemas.microsoft.com/office/powerpoint/2010/main" val="259409253"/>
+        <p14:creationId xmlns:p14="http://schemas.microsoft.com/office/powerpoint/2010/main" val="2002147871"/>
       </p:ext>
     </p:extLst>
   </p:cSld>
-  <p:clrMap bg1="lt1" tx1="dk1" bg2="lt2" tx2="dk2" accent1="accent1" accent2="accent2" accent3="accent3" accent4="accent4" accent5="accent5" accent6="accent6" hlink="hlink" folHlink="folHlink"/>
+  <p:clrMap bg1="dk1" tx1="lt1" bg2="dk2" tx2="lt2" accent1="accent1" accent2="accent2" accent3="accent3" accent4="accent4" accent5="accent5" accent6="accent6" hlink="hlink" folHlink="folHlink"/>
   <p:sldLayoutIdLst>
-    <p:sldLayoutId id="2147483649" r:id="rId1"/>
-    <p:sldLayoutId id="2147483650" r:id="rId2"/>
-    <p:sldLayoutId id="2147483651" r:id="rId3"/>
-    <p:sldLayoutId id="2147483652" r:id="rId4"/>
-    <p:sldLayoutId id="2147483653" r:id="rId5"/>
-    <p:sldLayoutId id="2147483654" r:id="rId6"/>
-    <p:sldLayoutId id="2147483655" r:id="rId7"/>
-    <p:sldLayoutId id="2147483656" r:id="rId8"/>
-    <p:sldLayoutId id="2147483657" r:id="rId9"/>
-    <p:sldLayoutId id="2147483658" r:id="rId10"/>
-    <p:sldLayoutId id="2147483659" r:id="rId11"/>
+    <p:sldLayoutId id="2147483781" r:id="rId1"/>
+    <p:sldLayoutId id="2147483782" r:id="rId2"/>
+    <p:sldLayoutId id="2147483783" r:id="rId3"/>
+    <p:sldLayoutId id="2147483784" r:id="rId4"/>
+    <p:sldLayoutId id="2147483785" r:id="rId5"/>
+    <p:sldLayoutId id="2147483786" r:id="rId6"/>
+    <p:sldLayoutId id="2147483787" r:id="rId7"/>
+    <p:sldLayoutId id="2147483788" r:id="rId8"/>
+    <p:sldLayoutId id="2147483789" r:id="rId9"/>
+    <p:sldLayoutId id="2147483790" r:id="rId10"/>
+    <p:sldLayoutId id="2147483791" r:id="rId11"/>
+    <p:sldLayoutId id="2147483792" r:id="rId12"/>
+    <p:sldLayoutId id="2147483793" r:id="rId13"/>
+    <p:sldLayoutId id="2147483794" r:id="rId14"/>
   </p:sldLayoutIdLst>
   <p:txStyles>
     <p:titleStyle>
-      <a:lvl1pPr algn="l" defTabSz="914400" rtl="0" eaLnBrk="1" latinLnBrk="0" hangingPunct="1">
-        <a:lnSpc>
-          <a:spcPct val="90000"/>
-        </a:lnSpc>
+      <a:lvl1pPr algn="l" defTabSz="457200" rtl="0" eaLnBrk="1" latinLnBrk="0" hangingPunct="1">
         <a:spcBef>
           <a:spcPct val="0"/>
         </a:spcBef>
         <a:buNone/>
-        <a:defRPr sz="4400" kern="1200">
+        <a:defRPr sz="4000" b="1" kern="1200">
           <a:solidFill>
-            <a:schemeClr val="tx1"/>
+            <a:srgbClr val="FEFEFE"/>
           </a:solidFill>
           <a:latin typeface="+mj-lt"/>
           <a:ea typeface="+mj-ea"/>
           <a:cs typeface="+mj-cs"/>
         </a:defRPr>
       </a:lvl1pPr>
+      <a:lvl2pPr eaLnBrk="1" hangingPunct="1">
+        <a:defRPr>
+          <a:solidFill>
+            <a:schemeClr val="tx2"/>
+          </a:solidFill>
+        </a:defRPr>
+      </a:lvl2pPr>
+      <a:lvl3pPr eaLnBrk="1" hangingPunct="1">
+        <a:defRPr>
+          <a:solidFill>
+            <a:schemeClr val="tx2"/>
+          </a:solidFill>
+        </a:defRPr>
+      </a:lvl3pPr>
+      <a:lvl4pPr eaLnBrk="1" hangingPunct="1">
+        <a:defRPr>
+          <a:solidFill>
+            <a:schemeClr val="tx2"/>
+          </a:solidFill>
+        </a:defRPr>
+      </a:lvl4pPr>
+      <a:lvl5pPr eaLnBrk="1" hangingPunct="1">
+        <a:defRPr>
+          <a:solidFill>
+            <a:schemeClr val="tx2"/>
+          </a:solidFill>
+        </a:defRPr>
+      </a:lvl5pPr>
+      <a:lvl6pPr eaLnBrk="1" hangingPunct="1">
+        <a:defRPr>
+          <a:solidFill>
+            <a:schemeClr val="tx2"/>
+          </a:solidFill>
+        </a:defRPr>
+      </a:lvl6pPr>
+      <a:lvl7pPr eaLnBrk="1" hangingPunct="1">
+        <a:defRPr>
+          <a:solidFill>
+            <a:schemeClr val="tx2"/>
+          </a:solidFill>
+        </a:defRPr>
+      </a:lvl7pPr>
+      <a:lvl8pPr eaLnBrk="1" hangingPunct="1">
+        <a:defRPr>
+          <a:solidFill>
+            <a:schemeClr val="tx2"/>
+          </a:solidFill>
+        </a:defRPr>
+      </a:lvl8pPr>
+      <a:lvl9pPr eaLnBrk="1" hangingPunct="1">
+        <a:defRPr>
+          <a:solidFill>
+            <a:schemeClr val="tx2"/>
+          </a:solidFill>
+        </a:defRPr>
+      </a:lvl9pPr>
     </p:titleStyle>
     <p:bodyStyle>
-      <a:lvl1pPr marL="228600" indent="-228600" algn="l" defTabSz="914400" rtl="0" eaLnBrk="1" latinLnBrk="0" hangingPunct="1">
-        <a:lnSpc>
-          <a:spcPct val="90000"/>
-        </a:lnSpc>
+      <a:lvl1pPr marL="342900" indent="-342900" algn="l" defTabSz="457200" rtl="0" eaLnBrk="1" latinLnBrk="0" hangingPunct="1">
         <a:spcBef>
-          <a:spcPts val="1000"/>
+          <a:spcPct val="20000"/>
         </a:spcBef>
-        <a:buFont typeface="Arial" panose="020B0604020202020204" pitchFamily="34" charset="0"/>
-        <a:buChar char="•"/>
-        <a:defRPr sz="2800" kern="1200">
+        <a:spcAft>
+          <a:spcPts val="600"/>
+        </a:spcAft>
+        <a:buClr>
+          <a:schemeClr val="accent1"/>
+        </a:buClr>
+        <a:buFont typeface="Wingdings 2" charset="2"/>
+        <a:buChar char=""/>
+        <a:defRPr sz="1800" kern="1200">
           <a:solidFill>
             <a:schemeClr val="tx1"/>
           </a:solidFill>
@@ -3090,16 +5113,19 @@
           <a:cs typeface="+mn-cs"/>
         </a:defRPr>
       </a:lvl1pPr>
-      <a:lvl2pPr marL="685800" indent="-228600" algn="l" defTabSz="914400" rtl="0" eaLnBrk="1" latinLnBrk="0" hangingPunct="1">
-        <a:lnSpc>
-          <a:spcPct val="90000"/>
-        </a:lnSpc>
+      <a:lvl2pPr marL="742950" indent="-285750" algn="l" defTabSz="457200" rtl="0" eaLnBrk="1" latinLnBrk="0" hangingPunct="1">
         <a:spcBef>
-          <a:spcPts val="500"/>
+          <a:spcPct val="20000"/>
         </a:spcBef>
-        <a:buFont typeface="Arial" panose="020B0604020202020204" pitchFamily="34" charset="0"/>
-        <a:buChar char="•"/>
-        <a:defRPr sz="2400" kern="1200">
+        <a:spcAft>
+          <a:spcPts val="600"/>
+        </a:spcAft>
+        <a:buClr>
+          <a:schemeClr val="accent1"/>
+        </a:buClr>
+        <a:buFont typeface="Wingdings 2" charset="2"/>
+        <a:buChar char=""/>
+        <a:defRPr sz="1600" kern="1200">
           <a:solidFill>
             <a:schemeClr val="tx1"/>
           </a:solidFill>
@@ -3108,16 +5134,19 @@
           <a:cs typeface="+mn-cs"/>
         </a:defRPr>
       </a:lvl2pPr>
-      <a:lvl3pPr marL="1143000" indent="-228600" algn="l" defTabSz="914400" rtl="0" eaLnBrk="1" latinLnBrk="0" hangingPunct="1">
-        <a:lnSpc>
-          <a:spcPct val="90000"/>
-        </a:lnSpc>
+      <a:lvl3pPr marL="1143000" indent="-228600" algn="l" defTabSz="457200" rtl="0" eaLnBrk="1" latinLnBrk="0" hangingPunct="1">
         <a:spcBef>
-          <a:spcPts val="500"/>
+          <a:spcPct val="20000"/>
         </a:spcBef>
-        <a:buFont typeface="Arial" panose="020B0604020202020204" pitchFamily="34" charset="0"/>
-        <a:buChar char="•"/>
-        <a:defRPr sz="2000" kern="1200">
+        <a:spcAft>
+          <a:spcPts val="600"/>
+        </a:spcAft>
+        <a:buClr>
+          <a:schemeClr val="accent1"/>
+        </a:buClr>
+        <a:buFont typeface="Wingdings 2" charset="2"/>
+        <a:buChar char=""/>
+        <a:defRPr sz="1400" kern="1200">
           <a:solidFill>
             <a:schemeClr val="tx1"/>
           </a:solidFill>
@@ -3126,16 +5155,19 @@
           <a:cs typeface="+mn-cs"/>
         </a:defRPr>
       </a:lvl3pPr>
-      <a:lvl4pPr marL="1600200" indent="-228600" algn="l" defTabSz="914400" rtl="0" eaLnBrk="1" latinLnBrk="0" hangingPunct="1">
-        <a:lnSpc>
-          <a:spcPct val="90000"/>
-        </a:lnSpc>
+      <a:lvl4pPr marL="1600200" indent="-228600" algn="l" defTabSz="457200" rtl="0" eaLnBrk="1" latinLnBrk="0" hangingPunct="1">
         <a:spcBef>
-          <a:spcPts val="500"/>
+          <a:spcPct val="20000"/>
         </a:spcBef>
-        <a:buFont typeface="Arial" panose="020B0604020202020204" pitchFamily="34" charset="0"/>
-        <a:buChar char="•"/>
-        <a:defRPr sz="1800" kern="1200">
+        <a:spcAft>
+          <a:spcPts val="600"/>
+        </a:spcAft>
+        <a:buClr>
+          <a:schemeClr val="accent1"/>
+        </a:buClr>
+        <a:buFont typeface="Wingdings 2" charset="2"/>
+        <a:buChar char=""/>
+        <a:defRPr sz="1200" kern="1200">
           <a:solidFill>
             <a:schemeClr val="tx1"/>
           </a:solidFill>
@@ -3144,16 +5176,19 @@
           <a:cs typeface="+mn-cs"/>
         </a:defRPr>
       </a:lvl4pPr>
-      <a:lvl5pPr marL="2057400" indent="-228600" algn="l" defTabSz="914400" rtl="0" eaLnBrk="1" latinLnBrk="0" hangingPunct="1">
-        <a:lnSpc>
-          <a:spcPct val="90000"/>
-        </a:lnSpc>
+      <a:lvl5pPr marL="2057400" indent="-228600" algn="l" defTabSz="457200" rtl="0" eaLnBrk="1" latinLnBrk="0" hangingPunct="1">
         <a:spcBef>
-          <a:spcPts val="500"/>
+          <a:spcPct val="20000"/>
         </a:spcBef>
-        <a:buFont typeface="Arial" panose="020B0604020202020204" pitchFamily="34" charset="0"/>
-        <a:buChar char="•"/>
-        <a:defRPr sz="1800" kern="1200">
+        <a:spcAft>
+          <a:spcPts val="600"/>
+        </a:spcAft>
+        <a:buClr>
+          <a:schemeClr val="accent1"/>
+        </a:buClr>
+        <a:buFont typeface="Wingdings 2" charset="2"/>
+        <a:buChar char=""/>
+        <a:defRPr sz="1200" kern="1200">
           <a:solidFill>
             <a:schemeClr val="tx1"/>
           </a:solidFill>
@@ -3162,16 +5197,19 @@
           <a:cs typeface="+mn-cs"/>
         </a:defRPr>
       </a:lvl5pPr>
-      <a:lvl6pPr marL="2514600" indent="-228600" algn="l" defTabSz="914400" rtl="0" eaLnBrk="1" latinLnBrk="0" hangingPunct="1">
-        <a:lnSpc>
-          <a:spcPct val="90000"/>
-        </a:lnSpc>
+      <a:lvl6pPr marL="2400000" indent="-228600" algn="l" defTabSz="457200" rtl="0" eaLnBrk="1" latinLnBrk="0" hangingPunct="1">
         <a:spcBef>
-          <a:spcPts val="500"/>
+          <a:spcPct val="20000"/>
         </a:spcBef>
-        <a:buFont typeface="Arial" panose="020B0604020202020204" pitchFamily="34" charset="0"/>
-        <a:buChar char="•"/>
-        <a:defRPr sz="1800" kern="1200">
+        <a:spcAft>
+          <a:spcPts val="600"/>
+        </a:spcAft>
+        <a:buClr>
+          <a:schemeClr val="accent1"/>
+        </a:buClr>
+        <a:buFont typeface="Wingdings 2" charset="2"/>
+        <a:buChar char=""/>
+        <a:defRPr sz="1200" kern="1200">
           <a:solidFill>
             <a:schemeClr val="tx1"/>
           </a:solidFill>
@@ -3180,16 +5218,19 @@
           <a:cs typeface="+mn-cs"/>
         </a:defRPr>
       </a:lvl6pPr>
-      <a:lvl7pPr marL="2971800" indent="-228600" algn="l" defTabSz="914400" rtl="0" eaLnBrk="1" latinLnBrk="0" hangingPunct="1">
-        <a:lnSpc>
-          <a:spcPct val="90000"/>
-        </a:lnSpc>
+      <a:lvl7pPr marL="2800000" indent="-228600" algn="l" defTabSz="457200" rtl="0" eaLnBrk="1" latinLnBrk="0" hangingPunct="1">
         <a:spcBef>
-          <a:spcPts val="500"/>
+          <a:spcPct val="20000"/>
         </a:spcBef>
-        <a:buFont typeface="Arial" panose="020B0604020202020204" pitchFamily="34" charset="0"/>
-        <a:buChar char="•"/>
-        <a:defRPr sz="1800" kern="1200">
+        <a:spcAft>
+          <a:spcPts val="600"/>
+        </a:spcAft>
+        <a:buClr>
+          <a:schemeClr val="accent1"/>
+        </a:buClr>
+        <a:buFont typeface="Wingdings 2" charset="2"/>
+        <a:buChar char=""/>
+        <a:defRPr sz="1200" kern="1200">
           <a:solidFill>
             <a:schemeClr val="tx1"/>
           </a:solidFill>
@@ -3198,16 +5239,19 @@
           <a:cs typeface="+mn-cs"/>
         </a:defRPr>
       </a:lvl7pPr>
-      <a:lvl8pPr marL="3429000" indent="-228600" algn="l" defTabSz="914400" rtl="0" eaLnBrk="1" latinLnBrk="0" hangingPunct="1">
-        <a:lnSpc>
-          <a:spcPct val="90000"/>
-        </a:lnSpc>
+      <a:lvl8pPr marL="3200000" indent="-228600" algn="l" defTabSz="457200" rtl="0" eaLnBrk="1" latinLnBrk="0" hangingPunct="1">
         <a:spcBef>
-          <a:spcPts val="500"/>
+          <a:spcPct val="20000"/>
         </a:spcBef>
-        <a:buFont typeface="Arial" panose="020B0604020202020204" pitchFamily="34" charset="0"/>
-        <a:buChar char="•"/>
-        <a:defRPr sz="1800" kern="1200">
+        <a:spcAft>
+          <a:spcPts val="600"/>
+        </a:spcAft>
+        <a:buClr>
+          <a:schemeClr val="accent1"/>
+        </a:buClr>
+        <a:buFont typeface="Wingdings 2" charset="2"/>
+        <a:buChar char=""/>
+        <a:defRPr sz="1200" kern="1200">
           <a:solidFill>
             <a:schemeClr val="tx1"/>
           </a:solidFill>
@@ -3216,16 +5260,19 @@
           <a:cs typeface="+mn-cs"/>
         </a:defRPr>
       </a:lvl8pPr>
-      <a:lvl9pPr marL="3886200" indent="-228600" algn="l" defTabSz="914400" rtl="0" eaLnBrk="1" latinLnBrk="0" hangingPunct="1">
-        <a:lnSpc>
-          <a:spcPct val="90000"/>
-        </a:lnSpc>
+      <a:lvl9pPr marL="3600000" indent="-228600" algn="l" defTabSz="457200" rtl="0" eaLnBrk="1" latinLnBrk="0" hangingPunct="1">
         <a:spcBef>
-          <a:spcPts val="500"/>
+          <a:spcPct val="20000"/>
         </a:spcBef>
-        <a:buFont typeface="Arial" panose="020B0604020202020204" pitchFamily="34" charset="0"/>
-        <a:buChar char="•"/>
-        <a:defRPr sz="1800" kern="1200">
+        <a:spcAft>
+          <a:spcPts val="600"/>
+        </a:spcAft>
+        <a:buClr>
+          <a:schemeClr val="accent1"/>
+        </a:buClr>
+        <a:buFont typeface="Wingdings 2" charset="2"/>
+        <a:buChar char=""/>
+        <a:defRPr sz="1200" kern="1200">
           <a:solidFill>
             <a:schemeClr val="tx1"/>
           </a:solidFill>
@@ -3237,9 +5284,9 @@
     </p:bodyStyle>
     <p:otherStyle>
       <a:defPPr>
-        <a:defRPr lang="en-PR"/>
+        <a:defRPr lang="en-US"/>
       </a:defPPr>
-      <a:lvl1pPr marL="0" algn="l" defTabSz="914400" rtl="0" eaLnBrk="1" latinLnBrk="0" hangingPunct="1">
+      <a:lvl1pPr marL="0" algn="l" defTabSz="457200" rtl="0" eaLnBrk="1" latinLnBrk="0" hangingPunct="1">
         <a:defRPr sz="1800" kern="1200">
           <a:solidFill>
             <a:schemeClr val="tx1"/>
@@ -3249,7 +5296,7 @@
           <a:cs typeface="+mn-cs"/>
         </a:defRPr>
       </a:lvl1pPr>
-      <a:lvl2pPr marL="457200" algn="l" defTabSz="914400" rtl="0" eaLnBrk="1" latinLnBrk="0" hangingPunct="1">
+      <a:lvl2pPr marL="457200" algn="l" defTabSz="457200" rtl="0" eaLnBrk="1" latinLnBrk="0" hangingPunct="1">
         <a:defRPr sz="1800" kern="1200">
           <a:solidFill>
             <a:schemeClr val="tx1"/>
@@ -3259,7 +5306,7 @@
           <a:cs typeface="+mn-cs"/>
         </a:defRPr>
       </a:lvl2pPr>
-      <a:lvl3pPr marL="914400" algn="l" defTabSz="914400" rtl="0" eaLnBrk="1" latinLnBrk="0" hangingPunct="1">
+      <a:lvl3pPr marL="914400" algn="l" defTabSz="457200" rtl="0" eaLnBrk="1" latinLnBrk="0" hangingPunct="1">
         <a:defRPr sz="1800" kern="1200">
           <a:solidFill>
             <a:schemeClr val="tx1"/>
@@ -3269,7 +5316,7 @@
           <a:cs typeface="+mn-cs"/>
         </a:defRPr>
       </a:lvl3pPr>
-      <a:lvl4pPr marL="1371600" algn="l" defTabSz="914400" rtl="0" eaLnBrk="1" latinLnBrk="0" hangingPunct="1">
+      <a:lvl4pPr marL="1371600" algn="l" defTabSz="457200" rtl="0" eaLnBrk="1" latinLnBrk="0" hangingPunct="1">
         <a:defRPr sz="1800" kern="1200">
           <a:solidFill>
             <a:schemeClr val="tx1"/>
@@ -3279,7 +5326,7 @@
           <a:cs typeface="+mn-cs"/>
         </a:defRPr>
       </a:lvl4pPr>
-      <a:lvl5pPr marL="1828800" algn="l" defTabSz="914400" rtl="0" eaLnBrk="1" latinLnBrk="0" hangingPunct="1">
+      <a:lvl5pPr marL="1828800" algn="l" defTabSz="457200" rtl="0" eaLnBrk="1" latinLnBrk="0" hangingPunct="1">
         <a:defRPr sz="1800" kern="1200">
           <a:solidFill>
             <a:schemeClr val="tx1"/>
@@ -3289,7 +5336,7 @@
           <a:cs typeface="+mn-cs"/>
         </a:defRPr>
       </a:lvl5pPr>
-      <a:lvl6pPr marL="2286000" algn="l" defTabSz="914400" rtl="0" eaLnBrk="1" latinLnBrk="0" hangingPunct="1">
+      <a:lvl6pPr marL="2286000" algn="l" defTabSz="457200" rtl="0" eaLnBrk="1" latinLnBrk="0" hangingPunct="1">
         <a:defRPr sz="1800" kern="1200">
           <a:solidFill>
             <a:schemeClr val="tx1"/>
@@ -3299,7 +5346,7 @@
           <a:cs typeface="+mn-cs"/>
         </a:defRPr>
       </a:lvl6pPr>
-      <a:lvl7pPr marL="2743200" algn="l" defTabSz="914400" rtl="0" eaLnBrk="1" latinLnBrk="0" hangingPunct="1">
+      <a:lvl7pPr marL="2743200" algn="l" defTabSz="457200" rtl="0" eaLnBrk="1" latinLnBrk="0" hangingPunct="1">
         <a:defRPr sz="1800" kern="1200">
           <a:solidFill>
             <a:schemeClr val="tx1"/>
@@ -3309,7 +5356,7 @@
           <a:cs typeface="+mn-cs"/>
         </a:defRPr>
       </a:lvl7pPr>
-      <a:lvl8pPr marL="3200400" algn="l" defTabSz="914400" rtl="0" eaLnBrk="1" latinLnBrk="0" hangingPunct="1">
+      <a:lvl8pPr marL="3200400" algn="l" defTabSz="457200" rtl="0" eaLnBrk="1" latinLnBrk="0" hangingPunct="1">
         <a:defRPr sz="1800" kern="1200">
           <a:solidFill>
             <a:schemeClr val="tx1"/>
@@ -3319,7 +5366,7 @@
           <a:cs typeface="+mn-cs"/>
         </a:defRPr>
       </a:lvl8pPr>
-      <a:lvl9pPr marL="3657600" algn="l" defTabSz="914400" rtl="0" eaLnBrk="1" latinLnBrk="0" hangingPunct="1">
+      <a:lvl9pPr marL="3657600" algn="l" defTabSz="457200" rtl="0" eaLnBrk="1" latinLnBrk="0" hangingPunct="1">
         <a:defRPr sz="1800" kern="1200">
           <a:solidFill>
             <a:schemeClr val="tx1"/>
@@ -3370,15 +5417,21 @@
         <p:spPr/>
         <p:txBody>
           <a:bodyPr>
-            <a:normAutofit fontScale="90000"/>
+            <a:normAutofit/>
           </a:bodyPr>
           <a:lstStyle/>
           <a:p>
             <a:r>
-              <a:rPr lang="en-US" dirty="0"/>
+              <a:rPr lang="en-US" dirty="0">
+                <a:latin typeface="Times New Roman" panose="02020603050405020304" pitchFamily="18" charset="0"/>
+                <a:cs typeface="Times New Roman" panose="02020603050405020304" pitchFamily="18" charset="0"/>
+              </a:rPr>
               <a:t>Architectures and Programming Paradigms for Game Development</a:t>
             </a:r>
-            <a:endParaRPr lang="en-PR" dirty="0"/>
+            <a:endParaRPr lang="en-PR" dirty="0">
+              <a:latin typeface="Times New Roman" panose="02020603050405020304" pitchFamily="18" charset="0"/>
+              <a:cs typeface="Times New Roman" panose="02020603050405020304" pitchFamily="18" charset="0"/>
+            </a:endParaRPr>
           </a:p>
         </p:txBody>
       </p:sp>
@@ -3401,30 +5454,42 @@
         <p:spPr/>
         <p:txBody>
           <a:bodyPr>
-            <a:normAutofit fontScale="92500" lnSpcReduction="20000"/>
+            <a:noAutofit/>
           </a:bodyPr>
           <a:lstStyle/>
           <a:p>
             <a:r>
-              <a:rPr lang="en-PR" sz="3500" dirty="0"/>
+              <a:rPr lang="en-PR" sz="2400" dirty="0">
+                <a:latin typeface="Times New Roman" panose="02020603050405020304" pitchFamily="18" charset="0"/>
+                <a:cs typeface="Times New Roman" panose="02020603050405020304" pitchFamily="18" charset="0"/>
+              </a:rPr>
               <a:t>Mini Proyecto #1</a:t>
             </a:r>
           </a:p>
           <a:p>
             <a:r>
-              <a:rPr lang="en-PR" dirty="0"/>
+              <a:rPr lang="en-PR" sz="1400" dirty="0">
+                <a:latin typeface="Times New Roman" panose="02020603050405020304" pitchFamily="18" charset="0"/>
+                <a:cs typeface="Times New Roman" panose="02020603050405020304" pitchFamily="18" charset="0"/>
+              </a:rPr>
               <a:t>Aaron A. López Muñiz</a:t>
             </a:r>
           </a:p>
           <a:p>
             <a:r>
-              <a:rPr lang="en-PR" dirty="0"/>
+              <a:rPr lang="en-PR" sz="1400" dirty="0">
+                <a:latin typeface="Times New Roman" panose="02020603050405020304" pitchFamily="18" charset="0"/>
+                <a:cs typeface="Times New Roman" panose="02020603050405020304" pitchFamily="18" charset="0"/>
+              </a:rPr>
               <a:t>Valeria S. Almodovár Santiago</a:t>
             </a:r>
           </a:p>
           <a:p>
             <a:r>
-              <a:rPr lang="en-PR" dirty="0"/>
+              <a:rPr lang="en-PR" sz="1400" dirty="0">
+                <a:latin typeface="Times New Roman" panose="02020603050405020304" pitchFamily="18" charset="0"/>
+                <a:cs typeface="Times New Roman" panose="02020603050405020304" pitchFamily="18" charset="0"/>
+              </a:rPr>
               <a:t>Grupo H</a:t>
             </a:r>
           </a:p>
@@ -3506,13 +5571,128 @@
         </p:nvSpPr>
         <p:spPr/>
         <p:txBody>
-          <a:bodyPr/>
+          <a:bodyPr>
+            <a:normAutofit/>
+          </a:bodyPr>
           <a:lstStyle/>
           <a:p>
-            <a:endParaRPr lang="en-PR"/>
-          </a:p>
-        </p:txBody>
-      </p:sp>
+            <a:r>
+              <a:rPr lang="en-US" sz="2400" dirty="0"/>
+              <a:t>El </a:t>
+            </a:r>
+            <a:r>
+              <a:rPr lang="en-US" sz="2400" dirty="0" err="1"/>
+              <a:t>juego</a:t>
+            </a:r>
+            <a:r>
+              <a:rPr lang="en-US" sz="2400" dirty="0"/>
+              <a:t> </a:t>
+            </a:r>
+            <a:r>
+              <a:rPr lang="en-US" sz="2400" dirty="0" err="1"/>
+              <a:t>tiene</a:t>
+            </a:r>
+            <a:r>
+              <a:rPr lang="en-US" sz="2400" dirty="0"/>
+              <a:t> </a:t>
+            </a:r>
+            <a:r>
+              <a:rPr lang="en-US" sz="2400" dirty="0" err="1"/>
+              <a:t>una</a:t>
+            </a:r>
+            <a:r>
+              <a:rPr lang="en-US" sz="2400" dirty="0"/>
+              <a:t> </a:t>
+            </a:r>
+            <a:r>
+              <a:rPr lang="en-US" sz="2400" dirty="0" err="1"/>
+              <a:t>opción</a:t>
+            </a:r>
+            <a:r>
+              <a:rPr lang="en-US" sz="2400" dirty="0"/>
+              <a:t> de </a:t>
+            </a:r>
+            <a:r>
+              <a:rPr lang="en-US" sz="2400" dirty="0" err="1"/>
+              <a:t>pausa</a:t>
+            </a:r>
+            <a:r>
+              <a:rPr lang="en-US" sz="2400" dirty="0"/>
+              <a:t>.</a:t>
+            </a:r>
+          </a:p>
+          <a:p>
+            <a:r>
+              <a:rPr lang="en-US" sz="2400" dirty="0"/>
+              <a:t>Se </a:t>
+            </a:r>
+            <a:r>
+              <a:rPr lang="en-US" sz="2400" dirty="0" err="1"/>
+              <a:t>queda</a:t>
+            </a:r>
+            <a:r>
+              <a:rPr lang="en-US" sz="2400" dirty="0"/>
+              <a:t> “</a:t>
+            </a:r>
+            <a:r>
+              <a:rPr lang="en-US" sz="2400" dirty="0" err="1"/>
+              <a:t>congelado</a:t>
+            </a:r>
+            <a:r>
+              <a:rPr lang="en-US" sz="2400" dirty="0"/>
+              <a:t>” hasta que</a:t>
+            </a:r>
+          </a:p>
+          <a:p>
+            <a:pPr marL="0" indent="0">
+              <a:buNone/>
+            </a:pPr>
+            <a:r>
+              <a:rPr lang="en-US" sz="2400" dirty="0"/>
+              <a:t>se quite la </a:t>
+            </a:r>
+            <a:r>
+              <a:rPr lang="en-US" sz="2400" dirty="0" err="1"/>
+              <a:t>pausa</a:t>
+            </a:r>
+            <a:r>
+              <a:rPr lang="en-US" sz="2400" dirty="0"/>
+              <a:t>.</a:t>
+            </a:r>
+            <a:endParaRPr lang="en-PR" sz="2400" dirty="0"/>
+          </a:p>
+        </p:txBody>
+      </p:sp>
+      <p:pic>
+        <p:nvPicPr>
+          <p:cNvPr id="5" name="Picture 4">
+            <a:extLst>
+              <a:ext uri="{FF2B5EF4-FFF2-40B4-BE49-F238E27FC236}">
+                <a16:creationId xmlns:a16="http://schemas.microsoft.com/office/drawing/2014/main" id="{15217A25-8605-2320-41EE-F44F49ACF880}"/>
+              </a:ext>
+            </a:extLst>
+          </p:cNvPr>
+          <p:cNvPicPr>
+            <a:picLocks noChangeAspect="1"/>
+          </p:cNvPicPr>
+          <p:nvPr/>
+        </p:nvPicPr>
+        <p:blipFill>
+          <a:blip r:embed="rId2"/>
+          <a:stretch>
+            <a:fillRect/>
+          </a:stretch>
+        </p:blipFill>
+        <p:spPr>
+          <a:xfrm>
+            <a:off x="8314504" y="3429000"/>
+            <a:ext cx="3187240" cy="2981812"/>
+          </a:xfrm>
+          <a:prstGeom prst="rect">
+            <a:avLst/>
+          </a:prstGeom>
+        </p:spPr>
+      </p:pic>
     </p:spTree>
     <p:extLst>
       <p:ext uri="{BB962C8B-B14F-4D97-AF65-F5344CB8AC3E}">
@@ -3565,7 +5745,11 @@
           <a:lstStyle/>
           <a:p>
             <a:r>
-              <a:rPr lang="en-PR" dirty="0"/>
+              <a:rPr lang="en-PR" dirty="0">
+                <a:latin typeface="Times New Roman" panose="02020603050405020304" pitchFamily="18" charset="0"/>
+                <a:ea typeface="Tahoma" panose="020B0604030504040204" pitchFamily="34" charset="0"/>
+                <a:cs typeface="Times New Roman" panose="02020603050405020304" pitchFamily="18" charset="0"/>
+              </a:rPr>
               <a:t>Animación de personaje</a:t>
             </a:r>
           </a:p>
@@ -3589,34 +5773,146 @@
         </p:nvSpPr>
         <p:spPr/>
         <p:txBody>
-          <a:bodyPr/>
+          <a:bodyPr>
+            <a:normAutofit/>
+          </a:bodyPr>
           <a:lstStyle/>
           <a:p>
-            <a:pPr marL="0" indent="0">
-              <a:buNone/>
-            </a:pPr>
-            <a:endParaRPr lang="en-PR" dirty="0"/>
-          </a:p>
-          <a:p>
-            <a:pPr marL="0" indent="0">
-              <a:buNone/>
-            </a:pPr>
-            <a:r>
-              <a:rPr lang="en-PR" dirty="0"/>
-              <a:t>El personaje es Kirby. Fue animado utilizando12 metasprites; 3 para cada dirección. </a:t>
-            </a:r>
-          </a:p>
-          <a:p>
-            <a:pPr marL="0" indent="0">
-              <a:buNone/>
-            </a:pPr>
-            <a:r>
-              <a:rPr lang="en-PR" dirty="0"/>
-              <a:t>Utiliza 3 colores del palette: $35, $25 y $15.</a:t>
-            </a:r>
-          </a:p>
-        </p:txBody>
-      </p:sp>
+            <a:r>
+              <a:rPr lang="en-US" sz="2400" dirty="0"/>
+              <a:t>El </a:t>
+            </a:r>
+            <a:r>
+              <a:rPr lang="en-US" sz="2400" dirty="0" err="1"/>
+              <a:t>personaje</a:t>
+            </a:r>
+            <a:r>
+              <a:rPr lang="en-US" sz="2400" dirty="0"/>
+              <a:t> es un </a:t>
+            </a:r>
+            <a:r>
+              <a:rPr lang="en-US" sz="2400" dirty="0" err="1"/>
+              <a:t>metasprite</a:t>
+            </a:r>
+            <a:r>
+              <a:rPr lang="en-US" sz="2400" dirty="0"/>
+              <a:t> (2x2).</a:t>
+            </a:r>
+          </a:p>
+          <a:p>
+            <a:r>
+              <a:rPr lang="en-US" sz="2400" dirty="0"/>
+              <a:t>Tiene </a:t>
+            </a:r>
+            <a:r>
+              <a:rPr lang="en-US" sz="2400" dirty="0" err="1"/>
+              <a:t>animación</a:t>
+            </a:r>
+            <a:r>
+              <a:rPr lang="en-US" sz="2400" dirty="0"/>
+              <a:t> con </a:t>
+            </a:r>
+            <a:r>
+              <a:rPr lang="en-US" sz="2400" dirty="0" err="1"/>
+              <a:t>varios</a:t>
+            </a:r>
+            <a:r>
+              <a:rPr lang="en-US" sz="2400" dirty="0"/>
+              <a:t> frames.</a:t>
+            </a:r>
+          </a:p>
+          <a:p>
+            <a:r>
+              <a:rPr lang="en-US" sz="2400" dirty="0"/>
+              <a:t>Se </a:t>
+            </a:r>
+            <a:r>
+              <a:rPr lang="en-US" sz="2400" dirty="0" err="1"/>
+              <a:t>mueve</a:t>
+            </a:r>
+            <a:r>
+              <a:rPr lang="en-US" sz="2400" dirty="0"/>
+              <a:t> </a:t>
+            </a:r>
+            <a:r>
+              <a:rPr lang="en-US" sz="2400" dirty="0" err="1"/>
+              <a:t>en</a:t>
+            </a:r>
+            <a:r>
+              <a:rPr lang="en-US" sz="2400" dirty="0"/>
+              <a:t> 4 </a:t>
+            </a:r>
+            <a:r>
+              <a:rPr lang="en-US" sz="2400" dirty="0" err="1"/>
+              <a:t>direcciones</a:t>
+            </a:r>
+            <a:r>
+              <a:rPr lang="en-US" sz="2400" dirty="0"/>
+              <a:t>.</a:t>
+            </a:r>
+          </a:p>
+          <a:p>
+            <a:r>
+              <a:rPr lang="en-US" sz="2400" dirty="0" err="1"/>
+              <a:t>Usa</a:t>
+            </a:r>
+            <a:r>
+              <a:rPr lang="en-US" sz="2400" dirty="0"/>
+              <a:t> </a:t>
+            </a:r>
+            <a:r>
+              <a:rPr lang="en-US" sz="2400" dirty="0" err="1"/>
+              <a:t>varios</a:t>
+            </a:r>
+            <a:r>
+              <a:rPr lang="en-US" sz="2400" dirty="0"/>
+              <a:t> </a:t>
+            </a:r>
+            <a:r>
+              <a:rPr lang="en-US" sz="2400" dirty="0" err="1"/>
+              <a:t>colores</a:t>
+            </a:r>
+            <a:r>
+              <a:rPr lang="en-US" sz="2400" dirty="0"/>
+              <a:t> del palette.</a:t>
+            </a:r>
+            <a:endParaRPr lang="en-PR" sz="2400" dirty="0">
+              <a:latin typeface="Times New Roman" panose="02020603050405020304" pitchFamily="18" charset="0"/>
+              <a:cs typeface="Times New Roman" panose="02020603050405020304" pitchFamily="18" charset="0"/>
+            </a:endParaRPr>
+          </a:p>
+        </p:txBody>
+      </p:sp>
+      <p:pic>
+        <p:nvPicPr>
+          <p:cNvPr id="5" name="Picture 4">
+            <a:extLst>
+              <a:ext uri="{FF2B5EF4-FFF2-40B4-BE49-F238E27FC236}">
+                <a16:creationId xmlns:a16="http://schemas.microsoft.com/office/drawing/2014/main" id="{7AF1E2A1-34FB-FAE1-3D71-17C9F093C4D2}"/>
+              </a:ext>
+            </a:extLst>
+          </p:cNvPr>
+          <p:cNvPicPr>
+            <a:picLocks noChangeAspect="1"/>
+          </p:cNvPicPr>
+          <p:nvPr/>
+        </p:nvPicPr>
+        <p:blipFill>
+          <a:blip r:embed="rId2"/>
+          <a:stretch>
+            <a:fillRect/>
+          </a:stretch>
+        </p:blipFill>
+        <p:spPr>
+          <a:xfrm>
+            <a:off x="11199283" y="5822121"/>
+            <a:ext cx="992717" cy="1035879"/>
+          </a:xfrm>
+          <a:prstGeom prst="rect">
+            <a:avLst/>
+          </a:prstGeom>
+        </p:spPr>
+      </p:pic>
     </p:spTree>
     <p:extLst>
       <p:ext uri="{BB962C8B-B14F-4D97-AF65-F5344CB8AC3E}">
@@ -3669,7 +5965,10 @@
           <a:lstStyle/>
           <a:p>
             <a:r>
-              <a:rPr lang="en-PR" dirty="0"/>
+              <a:rPr lang="en-PR" dirty="0">
+                <a:latin typeface="Times New Roman" panose="02020603050405020304" pitchFamily="18" charset="0"/>
+                <a:cs typeface="Times New Roman" panose="02020603050405020304" pitchFamily="18" charset="0"/>
+              </a:rPr>
               <a:t>Movimiento de personaje</a:t>
             </a:r>
           </a:p>
@@ -3693,43 +5992,146 @@
         </p:nvSpPr>
         <p:spPr/>
         <p:txBody>
-          <a:bodyPr/>
+          <a:bodyPr>
+            <a:normAutofit/>
+          </a:bodyPr>
           <a:lstStyle/>
           <a:p>
-            <a:pPr marL="0" indent="0">
-              <a:buNone/>
-            </a:pPr>
-            <a:r>
-              <a:rPr lang="en-PR" dirty="0"/>
-              <a:t>Kirby se mueve continuamente en la ultima dirección que se presiono hasta que se seleccione una dirección nueva o hasta que haga colisión con el enemigo o una pared.</a:t>
-            </a:r>
-          </a:p>
-          <a:p>
-            <a:pPr marL="0" indent="0">
-              <a:buNone/>
-            </a:pPr>
-            <a:r>
-              <a:rPr lang="en-PR" dirty="0"/>
-              <a:t>Para cambiar la dirección de Kirby se utiliza los botones del control del NES. Sin embargo, ya que se emula los botones pueden variar.</a:t>
-            </a:r>
-          </a:p>
-          <a:p>
-            <a:pPr marL="0" indent="0">
-              <a:buNone/>
-            </a:pPr>
-            <a:r>
-              <a:rPr lang="en-PR" dirty="0"/>
-              <a:t>Por ejemplo:</a:t>
-            </a:r>
-          </a:p>
-          <a:p>
-            <a:pPr marL="0" indent="0">
-              <a:buNone/>
-            </a:pPr>
-            <a:r>
-              <a:rPr lang="en-PR" dirty="0"/>
-              <a:t>	Fleshas en el teclado, WASD, etc.</a:t>
-            </a:r>
+            <a:r>
+              <a:rPr lang="en-US" sz="2400" dirty="0"/>
+              <a:t>El </a:t>
+            </a:r>
+            <a:r>
+              <a:rPr lang="en-US" sz="2400" dirty="0" err="1"/>
+              <a:t>jugador</a:t>
+            </a:r>
+            <a:r>
+              <a:rPr lang="en-US" sz="2400" dirty="0"/>
+              <a:t> se </a:t>
+            </a:r>
+            <a:r>
+              <a:rPr lang="en-US" sz="2400" dirty="0" err="1"/>
+              <a:t>mueve</a:t>
+            </a:r>
+            <a:r>
+              <a:rPr lang="en-US" sz="2400" dirty="0"/>
+              <a:t> </a:t>
+            </a:r>
+            <a:r>
+              <a:rPr lang="en-US" sz="2400" dirty="0" err="1"/>
+              <a:t>constantemente</a:t>
+            </a:r>
+            <a:r>
+              <a:rPr lang="en-US" sz="2400" dirty="0"/>
+              <a:t>.</a:t>
+            </a:r>
+          </a:p>
+          <a:p>
+            <a:r>
+              <a:rPr lang="en-US" sz="2400" dirty="0"/>
+              <a:t>Las </a:t>
+            </a:r>
+            <a:r>
+              <a:rPr lang="en-US" sz="2400" dirty="0" err="1"/>
+              <a:t>flechas</a:t>
+            </a:r>
+            <a:r>
+              <a:rPr lang="en-US" sz="2400" dirty="0"/>
+              <a:t> </a:t>
+            </a:r>
+            <a:r>
+              <a:rPr lang="en-US" sz="2400" dirty="0" err="1"/>
+              <a:t>cambian</a:t>
+            </a:r>
+            <a:r>
+              <a:rPr lang="en-US" sz="2400" dirty="0"/>
+              <a:t> la </a:t>
+            </a:r>
+            <a:r>
+              <a:rPr lang="en-US" sz="2400" dirty="0" err="1"/>
+              <a:t>dirección</a:t>
+            </a:r>
+            <a:r>
+              <a:rPr lang="en-US" sz="2400" dirty="0"/>
+              <a:t>.</a:t>
+            </a:r>
+          </a:p>
+          <a:p>
+            <a:r>
+              <a:rPr lang="en-US" sz="2400" dirty="0"/>
+              <a:t>Se </a:t>
+            </a:r>
+            <a:r>
+              <a:rPr lang="en-US" sz="2400" dirty="0" err="1"/>
+              <a:t>mueve</a:t>
+            </a:r>
+            <a:r>
+              <a:rPr lang="en-US" sz="2400" dirty="0"/>
+              <a:t> </a:t>
+            </a:r>
+            <a:r>
+              <a:rPr lang="en-US" sz="2400" dirty="0" err="1"/>
+              <a:t>por</a:t>
+            </a:r>
+            <a:r>
+              <a:rPr lang="en-US" sz="2400" dirty="0"/>
+              <a:t> </a:t>
+            </a:r>
+            <a:r>
+              <a:rPr lang="en-US" sz="2400" dirty="0" err="1"/>
+              <a:t>bloques</a:t>
+            </a:r>
+            <a:r>
+              <a:rPr lang="en-US" sz="2400" dirty="0"/>
+              <a:t> (tile </a:t>
+            </a:r>
+            <a:r>
+              <a:rPr lang="en-US" sz="2400" dirty="0" err="1"/>
+              <a:t>por</a:t>
+            </a:r>
+            <a:r>
+              <a:rPr lang="en-US" sz="2400" dirty="0"/>
+              <a:t> tile).</a:t>
+            </a:r>
+          </a:p>
+          <a:p>
+            <a:r>
+              <a:rPr lang="en-US" sz="2400" dirty="0"/>
+              <a:t>Antes de </a:t>
+            </a:r>
+            <a:r>
+              <a:rPr lang="en-US" sz="2400" dirty="0" err="1"/>
+              <a:t>moverse</a:t>
+            </a:r>
+            <a:r>
+              <a:rPr lang="en-US" sz="2400" dirty="0"/>
+              <a:t>, </a:t>
+            </a:r>
+            <a:r>
+              <a:rPr lang="en-US" sz="2400" dirty="0" err="1"/>
+              <a:t>verifica</a:t>
+            </a:r>
+            <a:r>
+              <a:rPr lang="en-US" sz="2400" dirty="0"/>
+              <a:t> </a:t>
+            </a:r>
+            <a:r>
+              <a:rPr lang="en-US" sz="2400" dirty="0" err="1"/>
+              <a:t>si</a:t>
+            </a:r>
+            <a:r>
+              <a:rPr lang="en-US" sz="2400" dirty="0"/>
+              <a:t> </a:t>
+            </a:r>
+            <a:r>
+              <a:rPr lang="en-US" sz="2400" dirty="0" err="1"/>
+              <a:t>puede</a:t>
+            </a:r>
+            <a:r>
+              <a:rPr lang="en-US" sz="2400" dirty="0"/>
+              <a:t> pasar</a:t>
+            </a:r>
+            <a:endParaRPr lang="en-PR" sz="2400" dirty="0"/>
           </a:p>
         </p:txBody>
       </p:sp>
@@ -3785,7 +6187,10 @@
           <a:lstStyle/>
           <a:p>
             <a:r>
-              <a:rPr lang="en-PR" dirty="0"/>
+              <a:rPr lang="en-PR" dirty="0">
+                <a:latin typeface="Times New Roman" panose="02020603050405020304" pitchFamily="18" charset="0"/>
+                <a:cs typeface="Times New Roman" panose="02020603050405020304" pitchFamily="18" charset="0"/>
+              </a:rPr>
               <a:t>Aumento de velocidad del personaje</a:t>
             </a:r>
           </a:p>
@@ -3809,20 +6214,115 @@
         </p:nvSpPr>
         <p:spPr/>
         <p:txBody>
-          <a:bodyPr/>
+          <a:bodyPr>
+            <a:normAutofit/>
+          </a:bodyPr>
           <a:lstStyle/>
           <a:p>
-            <a:pPr marL="0" indent="0">
-              <a:buNone/>
-            </a:pPr>
-            <a:r>
-              <a:rPr lang="en-PR" dirty="0"/>
-              <a:t>La velocidad inicial de Kirby es de ____. Cada vez que recoge una moneda el valor disminuye, aumentando su velocidad. </a:t>
-            </a:r>
-            <a:r>
-              <a:rPr lang="en-PR"/>
-              <a:t>*Luego de ____ monedas, alcanza su valor maximo.*</a:t>
-            </a:r>
+            <a:r>
+              <a:rPr lang="en-US" sz="2400" dirty="0" err="1"/>
+              <a:t>Empieza</a:t>
+            </a:r>
+            <a:r>
+              <a:rPr lang="en-US" sz="2400" dirty="0"/>
+              <a:t> con </a:t>
+            </a:r>
+            <a:r>
+              <a:rPr lang="en-US" sz="2400" dirty="0" err="1"/>
+              <a:t>velocidad</a:t>
+            </a:r>
+            <a:r>
+              <a:rPr lang="en-US" sz="2400" dirty="0"/>
+              <a:t> </a:t>
+            </a:r>
+            <a:r>
+              <a:rPr lang="en-US" sz="2400" dirty="0" err="1"/>
+              <a:t>lenta</a:t>
+            </a:r>
+            <a:r>
+              <a:rPr lang="en-US" sz="2400" dirty="0"/>
+              <a:t>.</a:t>
+            </a:r>
+          </a:p>
+          <a:p>
+            <a:r>
+              <a:rPr lang="en-US" sz="2400" dirty="0"/>
+              <a:t>Al </a:t>
+            </a:r>
+            <a:r>
+              <a:rPr lang="en-US" sz="2400" dirty="0" err="1"/>
+              <a:t>recoger</a:t>
+            </a:r>
+            <a:r>
+              <a:rPr lang="en-US" sz="2400" dirty="0"/>
+              <a:t> </a:t>
+            </a:r>
+            <a:r>
+              <a:rPr lang="en-US" sz="2400" dirty="0" err="1"/>
+              <a:t>monedas</a:t>
+            </a:r>
+            <a:r>
+              <a:rPr lang="en-US" sz="2400" dirty="0"/>
+              <a:t>, </a:t>
+            </a:r>
+            <a:r>
+              <a:rPr lang="en-US" sz="2400" dirty="0" err="1"/>
+              <a:t>aumenta</a:t>
+            </a:r>
+            <a:r>
+              <a:rPr lang="en-US" sz="2400" dirty="0"/>
+              <a:t> la </a:t>
+            </a:r>
+            <a:r>
+              <a:rPr lang="en-US" sz="2400" dirty="0" err="1"/>
+              <a:t>velocidad</a:t>
+            </a:r>
+            <a:r>
+              <a:rPr lang="en-US" sz="2400" dirty="0"/>
+              <a:t>.</a:t>
+            </a:r>
+          </a:p>
+          <a:p>
+            <a:r>
+              <a:rPr lang="en-US" sz="2400" dirty="0"/>
+              <a:t>Se </a:t>
+            </a:r>
+            <a:r>
+              <a:rPr lang="en-US" sz="2400" dirty="0" err="1"/>
+              <a:t>controla</a:t>
+            </a:r>
+            <a:r>
+              <a:rPr lang="en-US" sz="2400" dirty="0"/>
+              <a:t> con un </a:t>
+            </a:r>
+            <a:r>
+              <a:rPr lang="en-US" sz="2400" dirty="0" err="1"/>
+              <a:t>sistema</a:t>
+            </a:r>
+            <a:r>
+              <a:rPr lang="en-US" sz="2400" dirty="0"/>
+              <a:t> de </a:t>
+            </a:r>
+            <a:r>
+              <a:rPr lang="en-US" sz="2400" dirty="0" err="1"/>
+              <a:t>tiempo</a:t>
+            </a:r>
+            <a:r>
+              <a:rPr lang="en-US" sz="2400" dirty="0"/>
+              <a:t> de </a:t>
+            </a:r>
+            <a:r>
+              <a:rPr lang="en-US" sz="2400" dirty="0" err="1"/>
+              <a:t>retraso</a:t>
+            </a:r>
+            <a:r>
+              <a:rPr lang="en-US" sz="2400" dirty="0"/>
+              <a:t>.</a:t>
+            </a:r>
+            <a:endParaRPr lang="en-PR" sz="2400" dirty="0">
+              <a:latin typeface="Times New Roman" panose="02020603050405020304" pitchFamily="18" charset="0"/>
+              <a:cs typeface="Times New Roman" panose="02020603050405020304" pitchFamily="18" charset="0"/>
+            </a:endParaRPr>
           </a:p>
         </p:txBody>
       </p:sp>
@@ -3878,7 +6378,10 @@
           <a:lstStyle/>
           <a:p>
             <a:r>
-              <a:rPr lang="en-PR" dirty="0"/>
+              <a:rPr lang="en-PR" dirty="0">
+                <a:latin typeface="Times New Roman" panose="02020603050405020304" pitchFamily="18" charset="0"/>
+                <a:cs typeface="Times New Roman" panose="02020603050405020304" pitchFamily="18" charset="0"/>
+              </a:rPr>
               <a:t>Posición de moneda</a:t>
             </a:r>
           </a:p>
@@ -3902,13 +6405,197 @@
         </p:nvSpPr>
         <p:spPr/>
         <p:txBody>
-          <a:bodyPr/>
+          <a:bodyPr>
+            <a:normAutofit/>
+          </a:bodyPr>
           <a:lstStyle/>
           <a:p>
-            <a:endParaRPr lang="en-PR"/>
-          </a:p>
-        </p:txBody>
-      </p:sp>
+            <a:r>
+              <a:rPr lang="en-US" sz="2400" dirty="0"/>
+              <a:t>La </a:t>
+            </a:r>
+            <a:r>
+              <a:rPr lang="en-US" sz="2400" dirty="0" err="1"/>
+              <a:t>moneda</a:t>
+            </a:r>
+            <a:r>
+              <a:rPr lang="en-US" sz="2400" dirty="0"/>
+              <a:t> </a:t>
+            </a:r>
+            <a:r>
+              <a:rPr lang="en-US" sz="2400" dirty="0" err="1"/>
+              <a:t>aparece</a:t>
+            </a:r>
+            <a:r>
+              <a:rPr lang="en-US" sz="2400" dirty="0"/>
+              <a:t> </a:t>
+            </a:r>
+            <a:r>
+              <a:rPr lang="en-US" sz="2400" dirty="0" err="1"/>
+              <a:t>en</a:t>
+            </a:r>
+            <a:r>
+              <a:rPr lang="en-US" sz="2400" dirty="0"/>
+              <a:t> </a:t>
+            </a:r>
+            <a:r>
+              <a:rPr lang="en-US" sz="2400" dirty="0" err="1"/>
+              <a:t>posiciones</a:t>
+            </a:r>
+            <a:r>
+              <a:rPr lang="en-US" sz="2400" dirty="0"/>
+              <a:t> </a:t>
+            </a:r>
+            <a:r>
+              <a:rPr lang="en-US" sz="2400" dirty="0" err="1"/>
+              <a:t>aleatorias</a:t>
+            </a:r>
+            <a:r>
+              <a:rPr lang="en-US" sz="2400" dirty="0"/>
+              <a:t> </a:t>
+            </a:r>
+            <a:r>
+              <a:rPr lang="en-US" sz="2400" dirty="0" err="1"/>
+              <a:t>predefinidas</a:t>
+            </a:r>
+            <a:r>
+              <a:rPr lang="en-US" sz="2400" dirty="0"/>
+              <a:t>.</a:t>
+            </a:r>
+          </a:p>
+          <a:p>
+            <a:r>
+              <a:rPr lang="en-US" sz="2400" dirty="0"/>
+              <a:t>Se </a:t>
+            </a:r>
+            <a:r>
+              <a:rPr lang="en-US" sz="2400" dirty="0" err="1"/>
+              <a:t>elige</a:t>
+            </a:r>
+            <a:r>
+              <a:rPr lang="en-US" sz="2400" dirty="0"/>
+              <a:t> </a:t>
+            </a:r>
+            <a:r>
+              <a:rPr lang="en-US" sz="2400" dirty="0" err="1"/>
+              <a:t>una</a:t>
+            </a:r>
+            <a:r>
+              <a:rPr lang="en-US" sz="2400" dirty="0"/>
+              <a:t> </a:t>
+            </a:r>
+            <a:r>
+              <a:rPr lang="en-US" sz="2400" dirty="0" err="1"/>
+              <a:t>posición</a:t>
+            </a:r>
+            <a:r>
+              <a:rPr lang="en-US" sz="2400" dirty="0"/>
+              <a:t> al azar.</a:t>
+            </a:r>
+          </a:p>
+          <a:p>
+            <a:r>
+              <a:rPr lang="en-US" sz="2400" dirty="0"/>
+              <a:t>Se </a:t>
+            </a:r>
+            <a:r>
+              <a:rPr lang="en-US" sz="2400" dirty="0" err="1"/>
+              <a:t>verifica</a:t>
+            </a:r>
+            <a:r>
+              <a:rPr lang="en-US" sz="2400" dirty="0"/>
+              <a:t> que no </a:t>
+            </a:r>
+            <a:r>
+              <a:rPr lang="en-US" sz="2400" dirty="0" err="1"/>
+              <a:t>esté</a:t>
+            </a:r>
+            <a:r>
+              <a:rPr lang="en-US" sz="2400" dirty="0"/>
+              <a:t> </a:t>
+            </a:r>
+            <a:r>
+              <a:rPr lang="en-US" sz="2400" dirty="0" err="1"/>
+              <a:t>en</a:t>
+            </a:r>
+            <a:r>
+              <a:rPr lang="en-US" sz="2400" dirty="0"/>
+              <a:t> </a:t>
+            </a:r>
+            <a:r>
+              <a:rPr lang="en-US" sz="2400" dirty="0" err="1"/>
+              <a:t>una</a:t>
+            </a:r>
+            <a:r>
+              <a:rPr lang="en-US" sz="2400" dirty="0"/>
+              <a:t> pared.</a:t>
+            </a:r>
+          </a:p>
+          <a:p>
+            <a:r>
+              <a:rPr lang="en-US" sz="2400" dirty="0"/>
+              <a:t>Si no es </a:t>
+            </a:r>
+            <a:r>
+              <a:rPr lang="en-US" sz="2400" dirty="0" err="1"/>
+              <a:t>válida</a:t>
+            </a:r>
+            <a:r>
+              <a:rPr lang="en-US" sz="2400" dirty="0"/>
+              <a:t>, se </a:t>
+            </a:r>
+            <a:r>
+              <a:rPr lang="en-US" sz="2400" dirty="0" err="1"/>
+              <a:t>escoge</a:t>
+            </a:r>
+            <a:r>
+              <a:rPr lang="en-US" sz="2400" dirty="0"/>
+              <a:t> </a:t>
+            </a:r>
+            <a:r>
+              <a:rPr lang="en-US" sz="2400" dirty="0" err="1"/>
+              <a:t>otra</a:t>
+            </a:r>
+            <a:r>
+              <a:rPr lang="en-US" sz="2400" dirty="0"/>
+              <a:t>.</a:t>
+            </a:r>
+            <a:endParaRPr lang="en-PR" sz="2400" dirty="0">
+              <a:latin typeface="Times New Roman" panose="02020603050405020304" pitchFamily="18" charset="0"/>
+              <a:cs typeface="Times New Roman" panose="02020603050405020304" pitchFamily="18" charset="0"/>
+            </a:endParaRPr>
+          </a:p>
+        </p:txBody>
+      </p:sp>
+      <p:pic>
+        <p:nvPicPr>
+          <p:cNvPr id="7" name="Picture 6">
+            <a:extLst>
+              <a:ext uri="{FF2B5EF4-FFF2-40B4-BE49-F238E27FC236}">
+                <a16:creationId xmlns:a16="http://schemas.microsoft.com/office/drawing/2014/main" id="{125E8D0D-DC12-C3B0-DA1A-BD3349159C20}"/>
+              </a:ext>
+            </a:extLst>
+          </p:cNvPr>
+          <p:cNvPicPr>
+            <a:picLocks noChangeAspect="1"/>
+          </p:cNvPicPr>
+          <p:nvPr/>
+        </p:nvPicPr>
+        <p:blipFill rotWithShape="1">
+          <a:blip r:embed="rId2"/>
+          <a:srcRect l="6020"/>
+          <a:stretch/>
+        </p:blipFill>
+        <p:spPr>
+          <a:xfrm>
+            <a:off x="9866219" y="4383481"/>
+            <a:ext cx="1507067" cy="1475317"/>
+          </a:xfrm>
+          <a:prstGeom prst="rect">
+            <a:avLst/>
+          </a:prstGeom>
+        </p:spPr>
+      </p:pic>
     </p:spTree>
     <p:extLst>
       <p:ext uri="{BB962C8B-B14F-4D97-AF65-F5344CB8AC3E}">
@@ -3961,7 +6648,10 @@
           <a:lstStyle/>
           <a:p>
             <a:r>
-              <a:rPr lang="en-PR" dirty="0"/>
+              <a:rPr lang="en-PR" dirty="0">
+                <a:latin typeface="Times New Roman" panose="02020603050405020304" pitchFamily="18" charset="0"/>
+                <a:cs typeface="Times New Roman" panose="02020603050405020304" pitchFamily="18" charset="0"/>
+              </a:rPr>
               <a:t>Background y compresión</a:t>
             </a:r>
           </a:p>
@@ -3985,13 +6675,244 @@
         </p:nvSpPr>
         <p:spPr/>
         <p:txBody>
-          <a:bodyPr/>
+          <a:bodyPr>
+            <a:normAutofit/>
+          </a:bodyPr>
           <a:lstStyle/>
           <a:p>
-            <a:endParaRPr lang="en-PR"/>
-          </a:p>
-        </p:txBody>
-      </p:sp>
+            <a:pPr algn="l">
+              <a:buFont typeface="Arial" panose="020B0604020202020204" pitchFamily="34" charset="0"/>
+              <a:buChar char="•"/>
+            </a:pPr>
+            <a:r>
+              <a:rPr lang="en-US" sz="2400" b="0" i="0" u="none" strike="noStrike" dirty="0">
+                <a:effectLst/>
+              </a:rPr>
+              <a:t>El </a:t>
+            </a:r>
+            <a:r>
+              <a:rPr lang="en-US" sz="2400" b="0" i="0" u="none" strike="noStrike" dirty="0" err="1">
+                <a:effectLst/>
+              </a:rPr>
+              <a:t>mapa</a:t>
+            </a:r>
+            <a:r>
+              <a:rPr lang="en-US" sz="2400" b="0" i="0" u="none" strike="noStrike" dirty="0">
+                <a:effectLst/>
+              </a:rPr>
+              <a:t> </a:t>
+            </a:r>
+            <a:r>
+              <a:rPr lang="en-US" sz="2400" b="0" i="0" u="none" strike="noStrike" dirty="0" err="1">
+                <a:effectLst/>
+              </a:rPr>
+              <a:t>usa</a:t>
+            </a:r>
+            <a:r>
+              <a:rPr lang="en-US" sz="2400" b="0" i="0" u="none" strike="noStrike" dirty="0">
+                <a:effectLst/>
+              </a:rPr>
+              <a:t> tiles de un </a:t>
+            </a:r>
+            <a:r>
+              <a:rPr lang="en-US" sz="2400" b="0" i="0" u="none" strike="noStrike" dirty="0" err="1">
+                <a:effectLst/>
+              </a:rPr>
+              <a:t>archivo</a:t>
+            </a:r>
+            <a:r>
+              <a:rPr lang="en-US" sz="2400" b="0" i="0" u="none" strike="noStrike" dirty="0">
+                <a:effectLst/>
+              </a:rPr>
+              <a:t> .chr de NEXXT.</a:t>
+            </a:r>
+          </a:p>
+          <a:p>
+            <a:pPr algn="l">
+              <a:buFont typeface="Arial" panose="020B0604020202020204" pitchFamily="34" charset="0"/>
+              <a:buChar char="•"/>
+            </a:pPr>
+            <a:r>
+              <a:rPr lang="en-US" sz="2400" b="0" i="0" u="none" strike="noStrike" dirty="0">
+                <a:effectLst/>
+              </a:rPr>
+              <a:t>Se </a:t>
+            </a:r>
+            <a:r>
+              <a:rPr lang="en-US" sz="2400" b="0" i="0" u="none" strike="noStrike" dirty="0" err="1">
+                <a:effectLst/>
+              </a:rPr>
+              <a:t>usan</a:t>
+            </a:r>
+            <a:r>
+              <a:rPr lang="en-US" sz="2400" b="0" i="0" u="none" strike="noStrike" dirty="0">
+                <a:effectLst/>
+              </a:rPr>
+              <a:t> </a:t>
+            </a:r>
+            <a:r>
+              <a:rPr lang="en-US" sz="2400" b="0" i="0" u="none" strike="noStrike" dirty="0" err="1">
+                <a:effectLst/>
+              </a:rPr>
+              <a:t>metatiles</a:t>
+            </a:r>
+            <a:r>
+              <a:rPr lang="en-US" sz="2400" dirty="0"/>
+              <a:t>.</a:t>
+            </a:r>
+          </a:p>
+          <a:p>
+            <a:pPr algn="l">
+              <a:buFont typeface="Arial" panose="020B0604020202020204" pitchFamily="34" charset="0"/>
+              <a:buChar char="•"/>
+            </a:pPr>
+            <a:r>
+              <a:rPr lang="en-US" sz="2400" b="0" i="0" u="none" strike="noStrike" dirty="0" err="1">
+                <a:effectLst/>
+              </a:rPr>
+              <a:t>Esto</a:t>
+            </a:r>
+            <a:r>
+              <a:rPr lang="en-US" sz="2400" b="0" i="0" u="none" strike="noStrike" dirty="0">
+                <a:effectLst/>
+              </a:rPr>
+              <a:t> reduce </a:t>
+            </a:r>
+            <a:r>
+              <a:rPr lang="en-US" sz="2400" b="0" i="0" u="none" strike="noStrike" dirty="0" err="1">
+                <a:effectLst/>
+              </a:rPr>
+              <a:t>el</a:t>
+            </a:r>
+            <a:r>
+              <a:rPr lang="en-US" sz="2400" b="0" i="0" u="none" strike="noStrike" dirty="0">
+                <a:effectLst/>
+              </a:rPr>
+              <a:t> </a:t>
+            </a:r>
+            <a:r>
+              <a:rPr lang="en-US" sz="2400" b="0" i="0" u="none" strike="noStrike" dirty="0" err="1">
+                <a:effectLst/>
+              </a:rPr>
+              <a:t>tamaño</a:t>
+            </a:r>
+            <a:r>
+              <a:rPr lang="en-US" sz="2400" b="0" i="0" u="none" strike="noStrike" dirty="0">
+                <a:effectLst/>
+              </a:rPr>
+              <a:t> del </a:t>
+            </a:r>
+            <a:r>
+              <a:rPr lang="en-US" sz="2400" b="0" i="0" u="none" strike="noStrike" dirty="0" err="1">
+                <a:effectLst/>
+              </a:rPr>
+              <a:t>mapa</a:t>
+            </a:r>
+            <a:r>
+              <a:rPr lang="en-US" sz="2400" b="0" i="0" u="none" strike="noStrike" dirty="0">
+                <a:effectLst/>
+              </a:rPr>
+              <a:t>.</a:t>
+            </a:r>
+          </a:p>
+          <a:p>
+            <a:pPr algn="l">
+              <a:buFont typeface="Arial" panose="020B0604020202020204" pitchFamily="34" charset="0"/>
+              <a:buChar char="•"/>
+            </a:pPr>
+            <a:r>
+              <a:rPr lang="en-US" sz="2400" b="0" i="0" u="none" strike="noStrike" dirty="0" err="1">
+                <a:effectLst/>
+              </a:rPr>
+              <a:t>Hace</a:t>
+            </a:r>
+            <a:r>
+              <a:rPr lang="en-US" sz="2400" b="0" i="0" u="none" strike="noStrike" dirty="0">
+                <a:effectLst/>
+              </a:rPr>
+              <a:t> </a:t>
+            </a:r>
+            <a:r>
+              <a:rPr lang="en-US" sz="2400" b="0" i="0" u="none" strike="noStrike" dirty="0" err="1">
+                <a:effectLst/>
+              </a:rPr>
+              <a:t>el</a:t>
+            </a:r>
+            <a:r>
+              <a:rPr lang="en-US" sz="2400" b="0" i="0" u="none" strike="noStrike" dirty="0">
+                <a:effectLst/>
+              </a:rPr>
+              <a:t> </a:t>
+            </a:r>
+            <a:r>
+              <a:rPr lang="en-US" sz="2400" b="0" i="0" u="none" strike="noStrike" dirty="0" err="1">
+                <a:effectLst/>
+              </a:rPr>
+              <a:t>juego</a:t>
+            </a:r>
+            <a:r>
+              <a:rPr lang="en-US" sz="2400" b="0" i="0" u="none" strike="noStrike" dirty="0">
+                <a:effectLst/>
+              </a:rPr>
+              <a:t> </a:t>
+            </a:r>
+            <a:r>
+              <a:rPr lang="en-US" sz="2400" b="0" i="0" u="none" strike="noStrike" dirty="0" err="1">
+                <a:effectLst/>
+              </a:rPr>
+              <a:t>más</a:t>
+            </a:r>
+            <a:r>
+              <a:rPr lang="en-US" sz="2400" b="0" i="0" u="none" strike="noStrike" dirty="0">
+                <a:effectLst/>
+              </a:rPr>
+              <a:t> </a:t>
+            </a:r>
+            <a:r>
+              <a:rPr lang="en-US" sz="2400" b="0" i="0" u="none" strike="noStrike" dirty="0" err="1">
+                <a:effectLst/>
+              </a:rPr>
+              <a:t>eficiente</a:t>
+            </a:r>
+            <a:r>
+              <a:rPr lang="en-US" sz="2400" b="0" i="0" u="none" strike="noStrike" dirty="0">
+                <a:effectLst/>
+              </a:rPr>
+              <a:t>.</a:t>
+            </a:r>
+          </a:p>
+        </p:txBody>
+      </p:sp>
+      <p:pic>
+        <p:nvPicPr>
+          <p:cNvPr id="6" name="Picture 5">
+            <a:extLst>
+              <a:ext uri="{FF2B5EF4-FFF2-40B4-BE49-F238E27FC236}">
+                <a16:creationId xmlns:a16="http://schemas.microsoft.com/office/drawing/2014/main" id="{4F9C7DE0-9E71-8E36-5021-95FEE4DD72C8}"/>
+              </a:ext>
+            </a:extLst>
+          </p:cNvPr>
+          <p:cNvPicPr>
+            <a:picLocks noChangeAspect="1"/>
+          </p:cNvPicPr>
+          <p:nvPr/>
+        </p:nvPicPr>
+        <p:blipFill>
+          <a:blip r:embed="rId2"/>
+          <a:stretch>
+            <a:fillRect/>
+          </a:stretch>
+        </p:blipFill>
+        <p:spPr>
+          <a:xfrm>
+            <a:off x="8653369" y="3649487"/>
+            <a:ext cx="2719917" cy="2556580"/>
+          </a:xfrm>
+          <a:prstGeom prst="rect">
+            <a:avLst/>
+          </a:prstGeom>
+        </p:spPr>
+      </p:pic>
     </p:spTree>
     <p:extLst>
       <p:ext uri="{BB962C8B-B14F-4D97-AF65-F5344CB8AC3E}">
@@ -4044,7 +6965,10 @@
           <a:lstStyle/>
           <a:p>
             <a:r>
-              <a:rPr lang="en-PR" dirty="0"/>
+              <a:rPr lang="en-PR" dirty="0">
+                <a:latin typeface="Times New Roman" panose="02020603050405020304" pitchFamily="18" charset="0"/>
+                <a:cs typeface="Times New Roman" panose="02020603050405020304" pitchFamily="18" charset="0"/>
+              </a:rPr>
               <a:t>Perdida de vidas</a:t>
             </a:r>
           </a:p>
@@ -4068,13 +6992,238 @@
         </p:nvSpPr>
         <p:spPr/>
         <p:txBody>
-          <a:bodyPr/>
+          <a:bodyPr>
+            <a:normAutofit/>
+          </a:bodyPr>
           <a:lstStyle/>
           <a:p>
-            <a:endParaRPr lang="en-PR"/>
-          </a:p>
-        </p:txBody>
-      </p:sp>
+            <a:r>
+              <a:rPr lang="en-US" sz="2400" dirty="0"/>
+              <a:t>El </a:t>
+            </a:r>
+            <a:r>
+              <a:rPr lang="en-US" sz="2400" dirty="0" err="1"/>
+              <a:t>jugador</a:t>
+            </a:r>
+            <a:r>
+              <a:rPr lang="en-US" sz="2400" dirty="0"/>
+              <a:t> </a:t>
+            </a:r>
+            <a:r>
+              <a:rPr lang="en-US" sz="2400" dirty="0" err="1"/>
+              <a:t>pierde</a:t>
+            </a:r>
+            <a:r>
+              <a:rPr lang="en-US" sz="2400" dirty="0"/>
+              <a:t> </a:t>
+            </a:r>
+            <a:r>
+              <a:rPr lang="en-US" sz="2400" dirty="0" err="1"/>
+              <a:t>vida</a:t>
+            </a:r>
+            <a:r>
+              <a:rPr lang="en-US" sz="2400" dirty="0"/>
+              <a:t> al </a:t>
+            </a:r>
+            <a:r>
+              <a:rPr lang="en-US" sz="2400" dirty="0" err="1"/>
+              <a:t>chocar</a:t>
+            </a:r>
+            <a:r>
+              <a:rPr lang="en-US" sz="2400" dirty="0"/>
+              <a:t>.</a:t>
+            </a:r>
+          </a:p>
+          <a:p>
+            <a:r>
+              <a:rPr lang="en-US" sz="2400" dirty="0" err="1"/>
+              <a:t>Puede</a:t>
+            </a:r>
+            <a:r>
+              <a:rPr lang="en-US" sz="2400" dirty="0"/>
+              <a:t> ser con </a:t>
+            </a:r>
+            <a:r>
+              <a:rPr lang="en-US" sz="2400" dirty="0" err="1"/>
+              <a:t>paredes</a:t>
+            </a:r>
+            <a:r>
+              <a:rPr lang="en-US" sz="2400" dirty="0"/>
+              <a:t> o </a:t>
+            </a:r>
+            <a:r>
+              <a:rPr lang="en-US" sz="2400" dirty="0" err="1"/>
+              <a:t>enemigo</a:t>
+            </a:r>
+            <a:r>
+              <a:rPr lang="en-US" sz="2400" dirty="0"/>
+              <a:t>.</a:t>
+            </a:r>
+          </a:p>
+          <a:p>
+            <a:r>
+              <a:rPr lang="en-US" sz="2400" dirty="0" err="1"/>
+              <a:t>Regresa</a:t>
+            </a:r>
+            <a:r>
+              <a:rPr lang="en-US" sz="2400" dirty="0"/>
+              <a:t> al </a:t>
+            </a:r>
+            <a:r>
+              <a:rPr lang="en-US" sz="2400" dirty="0" err="1"/>
+              <a:t>inicio</a:t>
+            </a:r>
+            <a:r>
+              <a:rPr lang="en-US" sz="2400" dirty="0"/>
+              <a:t> al </a:t>
+            </a:r>
+            <a:r>
+              <a:rPr lang="en-US" sz="2400" dirty="0" err="1"/>
+              <a:t>perder</a:t>
+            </a:r>
+            <a:r>
+              <a:rPr lang="en-US" sz="2400" dirty="0"/>
+              <a:t> </a:t>
+            </a:r>
+            <a:r>
+              <a:rPr lang="en-US" sz="2400" dirty="0" err="1"/>
+              <a:t>una</a:t>
+            </a:r>
+            <a:r>
+              <a:rPr lang="en-US" sz="2400" dirty="0"/>
+              <a:t> </a:t>
+            </a:r>
+            <a:r>
+              <a:rPr lang="en-US" sz="2400" dirty="0" err="1"/>
+              <a:t>vidaT</a:t>
+            </a:r>
+            <a:r>
+              <a:rPr lang="en-US" sz="2400" dirty="0"/>
+              <a:t>.</a:t>
+            </a:r>
+          </a:p>
+          <a:p>
+            <a:r>
+              <a:rPr lang="en-US" sz="2400" dirty="0" err="1"/>
+              <a:t>iene</a:t>
+            </a:r>
+            <a:r>
+              <a:rPr lang="en-US" sz="2400" dirty="0"/>
+              <a:t> 3 </a:t>
+            </a:r>
+            <a:r>
+              <a:rPr lang="en-US" sz="2400" dirty="0" err="1"/>
+              <a:t>vidas</a:t>
+            </a:r>
+            <a:r>
+              <a:rPr lang="en-US" sz="2400" dirty="0"/>
+              <a:t> </a:t>
+            </a:r>
+            <a:r>
+              <a:rPr lang="en-US" sz="2400" dirty="0" err="1"/>
+              <a:t>en</a:t>
+            </a:r>
+            <a:r>
+              <a:rPr lang="en-US" sz="2400" dirty="0"/>
+              <a:t> total.</a:t>
+            </a:r>
+            <a:endParaRPr lang="en-PR" sz="2400" dirty="0">
+              <a:latin typeface="Times New Roman" panose="02020603050405020304" pitchFamily="18" charset="0"/>
+              <a:cs typeface="Times New Roman" panose="02020603050405020304" pitchFamily="18" charset="0"/>
+            </a:endParaRPr>
+          </a:p>
+        </p:txBody>
+      </p:sp>
+      <p:pic>
+        <p:nvPicPr>
+          <p:cNvPr id="5" name="Picture 4">
+            <a:extLst>
+              <a:ext uri="{FF2B5EF4-FFF2-40B4-BE49-F238E27FC236}">
+                <a16:creationId xmlns:a16="http://schemas.microsoft.com/office/drawing/2014/main" id="{2ADA03A7-4CBE-ADB6-4021-0343A3EAEC66}"/>
+              </a:ext>
+            </a:extLst>
+          </p:cNvPr>
+          <p:cNvPicPr>
+            <a:picLocks noChangeAspect="1"/>
+          </p:cNvPicPr>
+          <p:nvPr/>
+        </p:nvPicPr>
+        <p:blipFill>
+          <a:blip r:embed="rId2"/>
+          <a:stretch>
+            <a:fillRect/>
+          </a:stretch>
+        </p:blipFill>
+        <p:spPr>
+          <a:xfrm>
+            <a:off x="9815418" y="4901628"/>
+            <a:ext cx="1557868" cy="1509185"/>
+          </a:xfrm>
+          <a:prstGeom prst="rect">
+            <a:avLst/>
+          </a:prstGeom>
+        </p:spPr>
+      </p:pic>
+      <p:pic>
+        <p:nvPicPr>
+          <p:cNvPr id="7" name="Picture 6">
+            <a:extLst>
+              <a:ext uri="{FF2B5EF4-FFF2-40B4-BE49-F238E27FC236}">
+                <a16:creationId xmlns:a16="http://schemas.microsoft.com/office/drawing/2014/main" id="{49D3F75E-2593-E4A1-A9C9-87045F38FD02}"/>
+              </a:ext>
+            </a:extLst>
+          </p:cNvPr>
+          <p:cNvPicPr>
+            <a:picLocks noChangeAspect="1"/>
+          </p:cNvPicPr>
+          <p:nvPr/>
+        </p:nvPicPr>
+        <p:blipFill>
+          <a:blip r:embed="rId3"/>
+          <a:stretch>
+            <a:fillRect/>
+          </a:stretch>
+        </p:blipFill>
+        <p:spPr>
+          <a:xfrm>
+            <a:off x="6699682" y="4901629"/>
+            <a:ext cx="1557868" cy="1509185"/>
+          </a:xfrm>
+          <a:prstGeom prst="rect">
+            <a:avLst/>
+          </a:prstGeom>
+        </p:spPr>
+      </p:pic>
+      <p:pic>
+        <p:nvPicPr>
+          <p:cNvPr id="9" name="Picture 8">
+            <a:extLst>
+              <a:ext uri="{FF2B5EF4-FFF2-40B4-BE49-F238E27FC236}">
+                <a16:creationId xmlns:a16="http://schemas.microsoft.com/office/drawing/2014/main" id="{D08A30F6-6453-9472-B90D-EAFB6400353D}"/>
+              </a:ext>
+            </a:extLst>
+          </p:cNvPr>
+          <p:cNvPicPr>
+            <a:picLocks noChangeAspect="1"/>
+          </p:cNvPicPr>
+          <p:nvPr/>
+        </p:nvPicPr>
+        <p:blipFill>
+          <a:blip r:embed="rId4"/>
+          <a:stretch>
+            <a:fillRect/>
+          </a:stretch>
+        </p:blipFill>
+        <p:spPr>
+          <a:xfrm>
+            <a:off x="8257549" y="4901627"/>
+            <a:ext cx="1557869" cy="1509185"/>
+          </a:xfrm>
+          <a:prstGeom prst="rect">
+            <a:avLst/>
+          </a:prstGeom>
+        </p:spPr>
+      </p:pic>
     </p:spTree>
     <p:extLst>
       <p:ext uri="{BB962C8B-B14F-4D97-AF65-F5344CB8AC3E}">
@@ -4127,7 +7276,10 @@
           <a:lstStyle/>
           <a:p>
             <a:r>
-              <a:rPr lang="en-PR" dirty="0"/>
+              <a:rPr lang="en-PR" dirty="0">
+                <a:latin typeface="Times New Roman" panose="02020603050405020304" pitchFamily="18" charset="0"/>
+                <a:cs typeface="Times New Roman" panose="02020603050405020304" pitchFamily="18" charset="0"/>
+              </a:rPr>
               <a:t>Posición del enemigo y “pathfinding”</a:t>
             </a:r>
           </a:p>
@@ -4151,13 +7303,174 @@
         </p:nvSpPr>
         <p:spPr/>
         <p:txBody>
-          <a:bodyPr/>
+          <a:bodyPr>
+            <a:normAutofit/>
+          </a:bodyPr>
           <a:lstStyle/>
           <a:p>
-            <a:endParaRPr lang="en-PR"/>
-          </a:p>
-        </p:txBody>
-      </p:sp>
+            <a:r>
+              <a:rPr lang="en-US" sz="2400" dirty="0"/>
+              <a:t>El </a:t>
+            </a:r>
+            <a:r>
+              <a:rPr lang="en-US" sz="2400" dirty="0" err="1"/>
+              <a:t>enemigo</a:t>
+            </a:r>
+            <a:r>
+              <a:rPr lang="en-US" sz="2400" dirty="0"/>
+              <a:t> </a:t>
+            </a:r>
+            <a:r>
+              <a:rPr lang="en-US" sz="2400" dirty="0" err="1"/>
+              <a:t>sigue</a:t>
+            </a:r>
+            <a:r>
+              <a:rPr lang="en-US" sz="2400" dirty="0"/>
+              <a:t> al </a:t>
+            </a:r>
+            <a:r>
+              <a:rPr lang="en-US" sz="2400" dirty="0" err="1"/>
+              <a:t>jugador</a:t>
+            </a:r>
+            <a:r>
+              <a:rPr lang="en-US" sz="2400" dirty="0"/>
+              <a:t>.</a:t>
+            </a:r>
+          </a:p>
+          <a:p>
+            <a:r>
+              <a:rPr lang="en-US" sz="2400" dirty="0" err="1"/>
+              <a:t>Compara</a:t>
+            </a:r>
+            <a:r>
+              <a:rPr lang="en-US" sz="2400" dirty="0"/>
+              <a:t> </a:t>
+            </a:r>
+            <a:r>
+              <a:rPr lang="en-US" sz="2400" dirty="0" err="1"/>
+              <a:t>su</a:t>
+            </a:r>
+            <a:r>
+              <a:rPr lang="en-US" sz="2400" dirty="0"/>
+              <a:t> </a:t>
+            </a:r>
+            <a:r>
+              <a:rPr lang="en-US" sz="2400" dirty="0" err="1"/>
+              <a:t>posición</a:t>
+            </a:r>
+            <a:r>
+              <a:rPr lang="en-US" sz="2400" dirty="0"/>
+              <a:t> (X y Y).</a:t>
+            </a:r>
+          </a:p>
+          <a:p>
+            <a:r>
+              <a:rPr lang="en-US" sz="2400" dirty="0"/>
+              <a:t>Se </a:t>
+            </a:r>
+            <a:r>
+              <a:rPr lang="en-US" sz="2400" dirty="0" err="1"/>
+              <a:t>mueve</a:t>
+            </a:r>
+            <a:r>
+              <a:rPr lang="en-US" sz="2400" dirty="0"/>
+              <a:t> </a:t>
+            </a:r>
+            <a:r>
+              <a:rPr lang="en-US" sz="2400" dirty="0" err="1"/>
+              <a:t>en</a:t>
+            </a:r>
+            <a:r>
+              <a:rPr lang="en-US" sz="2400" dirty="0"/>
+              <a:t> la </a:t>
+            </a:r>
+            <a:r>
+              <a:rPr lang="en-US" sz="2400" dirty="0" err="1"/>
+              <a:t>dirección</a:t>
+            </a:r>
+            <a:r>
+              <a:rPr lang="en-US" sz="2400" dirty="0"/>
+              <a:t> </a:t>
+            </a:r>
+            <a:r>
+              <a:rPr lang="en-US" sz="2400" dirty="0" err="1"/>
+              <a:t>más</a:t>
+            </a:r>
+            <a:r>
+              <a:rPr lang="en-US" sz="2400" dirty="0"/>
+              <a:t> </a:t>
+            </a:r>
+            <a:r>
+              <a:rPr lang="en-US" sz="2400" dirty="0" err="1"/>
+              <a:t>cercana</a:t>
+            </a:r>
+            <a:r>
+              <a:rPr lang="en-US" sz="2400" dirty="0"/>
+              <a:t>.</a:t>
+            </a:r>
+          </a:p>
+          <a:p>
+            <a:r>
+              <a:rPr lang="en-US" sz="2400" dirty="0" err="1"/>
+              <a:t>Verifica</a:t>
+            </a:r>
+            <a:r>
+              <a:rPr lang="en-US" sz="2400" dirty="0"/>
+              <a:t> que no </a:t>
+            </a:r>
+            <a:r>
+              <a:rPr lang="en-US" sz="2400" dirty="0" err="1"/>
+              <a:t>choque</a:t>
+            </a:r>
+            <a:r>
+              <a:rPr lang="en-US" sz="2400" dirty="0"/>
+              <a:t> con </a:t>
+            </a:r>
+            <a:r>
+              <a:rPr lang="en-US" sz="2400" dirty="0" err="1"/>
+              <a:t>paredes</a:t>
+            </a:r>
+            <a:r>
+              <a:rPr lang="en-US" sz="2400" dirty="0"/>
+              <a:t>.</a:t>
+            </a:r>
+            <a:endParaRPr lang="en-PR" sz="2400" dirty="0">
+              <a:latin typeface="Times New Roman" panose="02020603050405020304" pitchFamily="18" charset="0"/>
+              <a:cs typeface="Times New Roman" panose="02020603050405020304" pitchFamily="18" charset="0"/>
+            </a:endParaRPr>
+          </a:p>
+        </p:txBody>
+      </p:sp>
+      <p:pic>
+        <p:nvPicPr>
+          <p:cNvPr id="5" name="Picture 4">
+            <a:extLst>
+              <a:ext uri="{FF2B5EF4-FFF2-40B4-BE49-F238E27FC236}">
+                <a16:creationId xmlns:a16="http://schemas.microsoft.com/office/drawing/2014/main" id="{64584098-A05C-DAD7-6318-01A42C84D637}"/>
+              </a:ext>
+            </a:extLst>
+          </p:cNvPr>
+          <p:cNvPicPr>
+            <a:picLocks noChangeAspect="1"/>
+          </p:cNvPicPr>
+          <p:nvPr/>
+        </p:nvPicPr>
+        <p:blipFill>
+          <a:blip r:embed="rId2"/>
+          <a:stretch>
+            <a:fillRect/>
+          </a:stretch>
+        </p:blipFill>
+        <p:spPr>
+          <a:xfrm>
+            <a:off x="7794929" y="3075959"/>
+            <a:ext cx="3587069" cy="3334853"/>
+          </a:xfrm>
+          <a:prstGeom prst="rect">
+            <a:avLst/>
+          </a:prstGeom>
+        </p:spPr>
+      </p:pic>
     </p:spTree>
     <p:extLst>
       <p:ext uri="{BB962C8B-B14F-4D97-AF65-F5344CB8AC3E}">
@@ -4210,7 +7523,13 @@
           <a:lstStyle/>
           <a:p>
             <a:r>
-              <a:rPr lang="en-PR" dirty="0"/>
+              <a:rPr lang="en-PR" dirty="0">
+                <a:solidFill>
+                  <a:schemeClr val="tx1"/>
+                </a:solidFill>
+                <a:latin typeface="Times New Roman" panose="02020603050405020304" pitchFamily="18" charset="0"/>
+                <a:cs typeface="Times New Roman" panose="02020603050405020304" pitchFamily="18" charset="0"/>
+              </a:rPr>
               <a:t>Movimiento del enemigo</a:t>
             </a:r>
           </a:p>
@@ -4234,13 +7553,345 @@
         </p:nvSpPr>
         <p:spPr/>
         <p:txBody>
-          <a:bodyPr/>
+          <a:bodyPr>
+            <a:normAutofit/>
+          </a:bodyPr>
           <a:lstStyle/>
           <a:p>
-            <a:endParaRPr lang="en-PR"/>
-          </a:p>
-        </p:txBody>
-      </p:sp>
+            <a:pPr algn="l">
+              <a:buFont typeface="Arial" panose="020B0604020202020204" pitchFamily="34" charset="0"/>
+              <a:buChar char="•"/>
+            </a:pPr>
+            <a:r>
+              <a:rPr lang="en-US" sz="2400" b="0" i="0" u="none" strike="noStrike" dirty="0">
+                <a:effectLst/>
+                <a:latin typeface="Times New Roman" panose="02020603050405020304" pitchFamily="18" charset="0"/>
+                <a:cs typeface="Times New Roman" panose="02020603050405020304" pitchFamily="18" charset="0"/>
+              </a:rPr>
+              <a:t>El </a:t>
+            </a:r>
+            <a:r>
+              <a:rPr lang="en-US" sz="2400" b="0" i="0" u="none" strike="noStrike" dirty="0" err="1">
+                <a:effectLst/>
+                <a:latin typeface="Times New Roman" panose="02020603050405020304" pitchFamily="18" charset="0"/>
+                <a:cs typeface="Times New Roman" panose="02020603050405020304" pitchFamily="18" charset="0"/>
+              </a:rPr>
+              <a:t>enemigo</a:t>
+            </a:r>
+            <a:r>
+              <a:rPr lang="en-US" sz="2400" b="0" i="0" u="none" strike="noStrike" dirty="0">
+                <a:effectLst/>
+                <a:latin typeface="Times New Roman" panose="02020603050405020304" pitchFamily="18" charset="0"/>
+                <a:cs typeface="Times New Roman" panose="02020603050405020304" pitchFamily="18" charset="0"/>
+              </a:rPr>
+              <a:t> se </a:t>
+            </a:r>
+            <a:r>
+              <a:rPr lang="en-US" sz="2400" b="0" i="0" u="none" strike="noStrike" dirty="0" err="1">
+                <a:effectLst/>
+                <a:latin typeface="Times New Roman" panose="02020603050405020304" pitchFamily="18" charset="0"/>
+                <a:cs typeface="Times New Roman" panose="02020603050405020304" pitchFamily="18" charset="0"/>
+              </a:rPr>
+              <a:t>mueve</a:t>
+            </a:r>
+            <a:r>
+              <a:rPr lang="en-US" sz="2400" b="0" i="0" u="none" strike="noStrike" dirty="0">
+                <a:effectLst/>
+                <a:latin typeface="Times New Roman" panose="02020603050405020304" pitchFamily="18" charset="0"/>
+                <a:cs typeface="Times New Roman" panose="02020603050405020304" pitchFamily="18" charset="0"/>
+              </a:rPr>
+              <a:t> de forma continua.</a:t>
+            </a:r>
+          </a:p>
+          <a:p>
+            <a:pPr algn="l">
+              <a:buFont typeface="Arial" panose="020B0604020202020204" pitchFamily="34" charset="0"/>
+              <a:buChar char="•"/>
+            </a:pPr>
+            <a:r>
+              <a:rPr lang="en-US" sz="2400" dirty="0">
+                <a:latin typeface="Times New Roman" panose="02020603050405020304" pitchFamily="18" charset="0"/>
+                <a:cs typeface="Times New Roman" panose="02020603050405020304" pitchFamily="18" charset="0"/>
+              </a:rPr>
+              <a:t>Al </a:t>
+            </a:r>
+            <a:r>
+              <a:rPr lang="en-US" sz="2400" dirty="0" err="1">
+                <a:latin typeface="Times New Roman" panose="02020603050405020304" pitchFamily="18" charset="0"/>
+                <a:cs typeface="Times New Roman" panose="02020603050405020304" pitchFamily="18" charset="0"/>
+              </a:rPr>
+              <a:t>igual</a:t>
+            </a:r>
+            <a:r>
+              <a:rPr lang="en-US" sz="2400" dirty="0">
+                <a:latin typeface="Times New Roman" panose="02020603050405020304" pitchFamily="18" charset="0"/>
+                <a:cs typeface="Times New Roman" panose="02020603050405020304" pitchFamily="18" charset="0"/>
+              </a:rPr>
+              <a:t> que </a:t>
+            </a:r>
+            <a:r>
+              <a:rPr lang="en-US" sz="2400" dirty="0" err="1">
+                <a:latin typeface="Times New Roman" panose="02020603050405020304" pitchFamily="18" charset="0"/>
+                <a:cs typeface="Times New Roman" panose="02020603050405020304" pitchFamily="18" charset="0"/>
+              </a:rPr>
+              <a:t>el</a:t>
+            </a:r>
+            <a:r>
+              <a:rPr lang="en-US" sz="2400" dirty="0">
+                <a:latin typeface="Times New Roman" panose="02020603050405020304" pitchFamily="18" charset="0"/>
+                <a:cs typeface="Times New Roman" panose="02020603050405020304" pitchFamily="18" charset="0"/>
+              </a:rPr>
+              <a:t> </a:t>
+            </a:r>
+            <a:r>
+              <a:rPr lang="en-US" sz="2400" dirty="0" err="1">
+                <a:latin typeface="Times New Roman" panose="02020603050405020304" pitchFamily="18" charset="0"/>
+                <a:cs typeface="Times New Roman" panose="02020603050405020304" pitchFamily="18" charset="0"/>
+              </a:rPr>
+              <a:t>jugador</a:t>
+            </a:r>
+            <a:r>
+              <a:rPr lang="en-US" sz="2400" dirty="0">
+                <a:latin typeface="Times New Roman" panose="02020603050405020304" pitchFamily="18" charset="0"/>
+                <a:cs typeface="Times New Roman" panose="02020603050405020304" pitchFamily="18" charset="0"/>
+              </a:rPr>
+              <a:t>, </a:t>
+            </a:r>
+            <a:r>
+              <a:rPr lang="en-US" sz="2400" dirty="0" err="1">
+                <a:latin typeface="Times New Roman" panose="02020603050405020304" pitchFamily="18" charset="0"/>
+                <a:cs typeface="Times New Roman" panose="02020603050405020304" pitchFamily="18" charset="0"/>
+              </a:rPr>
+              <a:t>el</a:t>
+            </a:r>
+            <a:r>
+              <a:rPr lang="en-US" sz="2400" dirty="0">
+                <a:latin typeface="Times New Roman" panose="02020603050405020304" pitchFamily="18" charset="0"/>
+                <a:cs typeface="Times New Roman" panose="02020603050405020304" pitchFamily="18" charset="0"/>
+              </a:rPr>
+              <a:t> </a:t>
+            </a:r>
+            <a:r>
+              <a:rPr lang="en-US" sz="2400" dirty="0" err="1">
+                <a:latin typeface="Times New Roman" panose="02020603050405020304" pitchFamily="18" charset="0"/>
+                <a:cs typeface="Times New Roman" panose="02020603050405020304" pitchFamily="18" charset="0"/>
+              </a:rPr>
+              <a:t>enemigo</a:t>
+            </a:r>
+            <a:r>
+              <a:rPr lang="en-US" sz="2400" dirty="0">
+                <a:latin typeface="Times New Roman" panose="02020603050405020304" pitchFamily="18" charset="0"/>
+                <a:cs typeface="Times New Roman" panose="02020603050405020304" pitchFamily="18" charset="0"/>
+              </a:rPr>
+              <a:t> </a:t>
+            </a:r>
+            <a:r>
+              <a:rPr lang="en-US" sz="2400" dirty="0" err="1">
+                <a:latin typeface="Times New Roman" panose="02020603050405020304" pitchFamily="18" charset="0"/>
+                <a:cs typeface="Times New Roman" panose="02020603050405020304" pitchFamily="18" charset="0"/>
+              </a:rPr>
+              <a:t>controla</a:t>
+            </a:r>
+            <a:r>
+              <a:rPr lang="en-US" sz="2400" dirty="0">
+                <a:latin typeface="Times New Roman" panose="02020603050405020304" pitchFamily="18" charset="0"/>
+                <a:cs typeface="Times New Roman" panose="02020603050405020304" pitchFamily="18" charset="0"/>
+              </a:rPr>
+              <a:t> </a:t>
+            </a:r>
+            <a:r>
+              <a:rPr lang="en-US" sz="2400" dirty="0" err="1">
+                <a:latin typeface="Times New Roman" panose="02020603050405020304" pitchFamily="18" charset="0"/>
+                <a:cs typeface="Times New Roman" panose="02020603050405020304" pitchFamily="18" charset="0"/>
+              </a:rPr>
+              <a:t>su</a:t>
+            </a:r>
+            <a:r>
+              <a:rPr lang="en-US" sz="2400" dirty="0">
+                <a:latin typeface="Times New Roman" panose="02020603050405020304" pitchFamily="18" charset="0"/>
+                <a:cs typeface="Times New Roman" panose="02020603050405020304" pitchFamily="18" charset="0"/>
+              </a:rPr>
+              <a:t> </a:t>
+            </a:r>
+            <a:r>
+              <a:rPr lang="en-US" sz="2400" dirty="0" err="1">
+                <a:latin typeface="Times New Roman" panose="02020603050405020304" pitchFamily="18" charset="0"/>
+                <a:cs typeface="Times New Roman" panose="02020603050405020304" pitchFamily="18" charset="0"/>
+              </a:rPr>
+              <a:t>velocidad</a:t>
+            </a:r>
+            <a:r>
+              <a:rPr lang="en-US" sz="2400" dirty="0">
+                <a:latin typeface="Times New Roman" panose="02020603050405020304" pitchFamily="18" charset="0"/>
+                <a:cs typeface="Times New Roman" panose="02020603050405020304" pitchFamily="18" charset="0"/>
+              </a:rPr>
+              <a:t> a traves de un </a:t>
+            </a:r>
+            <a:r>
+              <a:rPr lang="en-US" sz="2400" dirty="0" err="1">
+                <a:latin typeface="Times New Roman" panose="02020603050405020304" pitchFamily="18" charset="0"/>
+                <a:cs typeface="Times New Roman" panose="02020603050405020304" pitchFamily="18" charset="0"/>
+              </a:rPr>
+              <a:t>sistema</a:t>
+            </a:r>
+            <a:r>
+              <a:rPr lang="en-US" sz="2400" dirty="0">
+                <a:latin typeface="Times New Roman" panose="02020603050405020304" pitchFamily="18" charset="0"/>
+                <a:cs typeface="Times New Roman" panose="02020603050405020304" pitchFamily="18" charset="0"/>
+              </a:rPr>
+              <a:t> de </a:t>
+            </a:r>
+            <a:r>
+              <a:rPr lang="en-US" sz="2400" dirty="0" err="1">
+                <a:latin typeface="Times New Roman" panose="02020603050405020304" pitchFamily="18" charset="0"/>
+                <a:cs typeface="Times New Roman" panose="02020603050405020304" pitchFamily="18" charset="0"/>
+              </a:rPr>
+              <a:t>retraso</a:t>
+            </a:r>
+            <a:r>
+              <a:rPr lang="en-US" sz="2400" dirty="0">
+                <a:latin typeface="Times New Roman" panose="02020603050405020304" pitchFamily="18" charset="0"/>
+                <a:cs typeface="Times New Roman" panose="02020603050405020304" pitchFamily="18" charset="0"/>
+              </a:rPr>
+              <a:t>.</a:t>
+            </a:r>
+          </a:p>
+          <a:p>
+            <a:pPr algn="l">
+              <a:buFont typeface="Arial" panose="020B0604020202020204" pitchFamily="34" charset="0"/>
+              <a:buChar char="•"/>
+            </a:pPr>
+            <a:r>
+              <a:rPr lang="en-US" sz="2400" b="0" i="0" u="none" strike="noStrike" dirty="0" err="1">
+                <a:effectLst/>
+                <a:latin typeface="Times New Roman" panose="02020603050405020304" pitchFamily="18" charset="0"/>
+                <a:cs typeface="Times New Roman" panose="02020603050405020304" pitchFamily="18" charset="0"/>
+              </a:rPr>
+              <a:t>Aumenta</a:t>
+            </a:r>
+            <a:r>
+              <a:rPr lang="en-US" sz="2400" b="0" i="0" u="none" strike="noStrike" dirty="0">
+                <a:effectLst/>
+                <a:latin typeface="Times New Roman" panose="02020603050405020304" pitchFamily="18" charset="0"/>
+                <a:cs typeface="Times New Roman" panose="02020603050405020304" pitchFamily="18" charset="0"/>
+              </a:rPr>
+              <a:t> </a:t>
+            </a:r>
+            <a:r>
+              <a:rPr lang="en-US" sz="2400" dirty="0">
+                <a:latin typeface="Times New Roman" panose="02020603050405020304" pitchFamily="18" charset="0"/>
+                <a:cs typeface="Times New Roman" panose="02020603050405020304" pitchFamily="18" charset="0"/>
+              </a:rPr>
+              <a:t>de </a:t>
+            </a:r>
+            <a:r>
+              <a:rPr lang="en-US" sz="2400" dirty="0" err="1">
+                <a:latin typeface="Times New Roman" panose="02020603050405020304" pitchFamily="18" charset="0"/>
+                <a:cs typeface="Times New Roman" panose="02020603050405020304" pitchFamily="18" charset="0"/>
+              </a:rPr>
+              <a:t>velocidad</a:t>
+            </a:r>
+            <a:r>
+              <a:rPr lang="en-US" sz="2400" dirty="0">
+                <a:latin typeface="Times New Roman" panose="02020603050405020304" pitchFamily="18" charset="0"/>
+                <a:cs typeface="Times New Roman" panose="02020603050405020304" pitchFamily="18" charset="0"/>
+              </a:rPr>
+              <a:t> </a:t>
+            </a:r>
+            <a:r>
+              <a:rPr lang="en-US" sz="2400" dirty="0" err="1">
+                <a:latin typeface="Times New Roman" panose="02020603050405020304" pitchFamily="18" charset="0"/>
+                <a:cs typeface="Times New Roman" panose="02020603050405020304" pitchFamily="18" charset="0"/>
+              </a:rPr>
+              <a:t>cuando</a:t>
+            </a:r>
+            <a:r>
+              <a:rPr lang="en-US" sz="2400" dirty="0">
+                <a:latin typeface="Times New Roman" panose="02020603050405020304" pitchFamily="18" charset="0"/>
+                <a:cs typeface="Times New Roman" panose="02020603050405020304" pitchFamily="18" charset="0"/>
+              </a:rPr>
+              <a:t> </a:t>
+            </a:r>
+            <a:r>
+              <a:rPr lang="en-US" sz="2400" dirty="0" err="1">
+                <a:latin typeface="Times New Roman" panose="02020603050405020304" pitchFamily="18" charset="0"/>
+                <a:cs typeface="Times New Roman" panose="02020603050405020304" pitchFamily="18" charset="0"/>
+              </a:rPr>
+              <a:t>el</a:t>
+            </a:r>
+            <a:r>
+              <a:rPr lang="en-US" sz="2400" dirty="0">
+                <a:latin typeface="Times New Roman" panose="02020603050405020304" pitchFamily="18" charset="0"/>
+                <a:cs typeface="Times New Roman" panose="02020603050405020304" pitchFamily="18" charset="0"/>
+              </a:rPr>
+              <a:t> </a:t>
+            </a:r>
+            <a:r>
+              <a:rPr lang="en-US" sz="2400" dirty="0" err="1">
+                <a:latin typeface="Times New Roman" panose="02020603050405020304" pitchFamily="18" charset="0"/>
+                <a:cs typeface="Times New Roman" panose="02020603050405020304" pitchFamily="18" charset="0"/>
+              </a:rPr>
+              <a:t>jugador</a:t>
+            </a:r>
+            <a:r>
+              <a:rPr lang="en-US" sz="2400" dirty="0">
+                <a:latin typeface="Times New Roman" panose="02020603050405020304" pitchFamily="18" charset="0"/>
+                <a:cs typeface="Times New Roman" panose="02020603050405020304" pitchFamily="18" charset="0"/>
+              </a:rPr>
+              <a:t> </a:t>
+            </a:r>
+            <a:r>
+              <a:rPr lang="en-US" sz="2400" dirty="0" err="1">
+                <a:latin typeface="Times New Roman" panose="02020603050405020304" pitchFamily="18" charset="0"/>
+                <a:cs typeface="Times New Roman" panose="02020603050405020304" pitchFamily="18" charset="0"/>
+              </a:rPr>
+              <a:t>mejora</a:t>
+            </a:r>
+            <a:r>
+              <a:rPr lang="en-US" sz="2400" dirty="0">
+                <a:latin typeface="Times New Roman" panose="02020603050405020304" pitchFamily="18" charset="0"/>
+                <a:cs typeface="Times New Roman" panose="02020603050405020304" pitchFamily="18" charset="0"/>
+              </a:rPr>
+              <a:t>.</a:t>
+            </a:r>
+            <a:endParaRPr lang="en-US" sz="2400" b="0" i="0" u="none" strike="noStrike" dirty="0">
+              <a:effectLst/>
+              <a:latin typeface="Times New Roman" panose="02020603050405020304" pitchFamily="18" charset="0"/>
+              <a:cs typeface="Times New Roman" panose="02020603050405020304" pitchFamily="18" charset="0"/>
+            </a:endParaRPr>
+          </a:p>
+        </p:txBody>
+      </p:sp>
+      <p:pic>
+        <p:nvPicPr>
+          <p:cNvPr id="7" name="Picture 6">
+            <a:extLst>
+              <a:ext uri="{FF2B5EF4-FFF2-40B4-BE49-F238E27FC236}">
+                <a16:creationId xmlns:a16="http://schemas.microsoft.com/office/drawing/2014/main" id="{76A8FF68-E5A7-C60E-7088-244026F9966B}"/>
+              </a:ext>
+            </a:extLst>
+          </p:cNvPr>
+          <p:cNvPicPr>
+            <a:picLocks noChangeAspect="1"/>
+          </p:cNvPicPr>
+          <p:nvPr/>
+        </p:nvPicPr>
+        <p:blipFill>
+          <a:blip r:embed="rId2"/>
+          <a:stretch>
+            <a:fillRect/>
+          </a:stretch>
+        </p:blipFill>
+        <p:spPr>
+          <a:xfrm>
+            <a:off x="11398250" y="5950857"/>
+            <a:ext cx="793750" cy="907143"/>
+          </a:xfrm>
+          <a:prstGeom prst="rect">
+            <a:avLst/>
+          </a:prstGeom>
+        </p:spPr>
+      </p:pic>
     </p:spTree>
     <p:extLst>
       <p:ext uri="{BB962C8B-B14F-4D97-AF65-F5344CB8AC3E}">
@@ -4255,9 +7906,9 @@
 </file>
 
 <file path=ppt/theme/theme1.xml><?xml version="1.0" encoding="utf-8"?>
-<a:theme xmlns:a="http://schemas.openxmlformats.org/drawingml/2006/main" name="Office Theme">
+<a:theme xmlns:a="http://schemas.openxmlformats.org/drawingml/2006/main" name="Quotable">
   <a:themeElements>
-    <a:clrScheme name="Office">
+    <a:clrScheme name="Quotable">
       <a:dk1>
         <a:sysClr val="windowText" lastClr="000000"/>
       </a:dk1>
@@ -4265,100 +7916,48 @@
         <a:sysClr val="window" lastClr="FFFFFF"/>
       </a:lt1>
       <a:dk2>
-        <a:srgbClr val="0E2841"/>
+        <a:srgbClr val="212121"/>
       </a:dk2>
       <a:lt2>
-        <a:srgbClr val="E8E8E8"/>
+        <a:srgbClr val="636363"/>
       </a:lt2>
       <a:accent1>
-        <a:srgbClr val="156082"/>
+        <a:srgbClr val="00C6BB"/>
       </a:accent1>
       <a:accent2>
-        <a:srgbClr val="E97132"/>
+        <a:srgbClr val="6FEBA0"/>
       </a:accent2>
       <a:accent3>
-        <a:srgbClr val="196B24"/>
+        <a:srgbClr val="B6DF5E"/>
       </a:accent3>
       <a:accent4>
-        <a:srgbClr val="0F9ED5"/>
+        <a:srgbClr val="EFB251"/>
       </a:accent4>
       <a:accent5>
-        <a:srgbClr val="A02B93"/>
+        <a:srgbClr val="EF755F"/>
       </a:accent5>
       <a:accent6>
-        <a:srgbClr val="4EA72E"/>
+        <a:srgbClr val="ED515C"/>
       </a:accent6>
       <a:hlink>
-        <a:srgbClr val="467886"/>
+        <a:srgbClr val="8F8F8F"/>
       </a:hlink>
       <a:folHlink>
-        <a:srgbClr val="96607D"/>
+        <a:srgbClr val="A5A5A5"/>
       </a:folHlink>
     </a:clrScheme>
-    <a:fontScheme name="Office">
+    <a:fontScheme name="Quotable">
       <a:majorFont>
-        <a:latin typeface="Aptos Display" panose="02110004020202020204"/>
+        <a:latin typeface="Century Gothic" panose="020B0502020202020204"/>
         <a:ea typeface=""/>
         <a:cs typeface=""/>
-        <a:font script="Jpan" typeface="游ゴシック Light"/>
+        <a:font script="Jpan" typeface="ＭＳ ゴシック"/>
         <a:font script="Hang" typeface="맑은 고딕"/>
-        <a:font script="Hans" typeface="等线 Light"/>
+        <a:font script="Hans" typeface="宋体"/>
         <a:font script="Hant" typeface="新細明體"/>
-        <a:font script="Arab" typeface="Times New Roman"/>
-        <a:font script="Hebr" typeface="Times New Roman"/>
-        <a:font script="Thai" typeface="Angsana New"/>
-        <a:font script="Ethi" typeface="Nyala"/>
-        <a:font script="Beng" typeface="Vrinda"/>
-        <a:font script="Gujr" typeface="Shruti"/>
-        <a:font script="Khmr" typeface="MoolBoran"/>
-        <a:font script="Knda" typeface="Tunga"/>
-        <a:font script="Guru" typeface="Raavi"/>
-        <a:font script="Cans" typeface="Euphemia"/>
-        <a:font script="Cher" typeface="Plantagenet Cherokee"/>
-        <a:font script="Yiii" typeface="Microsoft Yi Baiti"/>
-        <a:font script="Tibt" typeface="Microsoft Himalaya"/>
-        <a:font script="Thaa" typeface="MV Boli"/>
-        <a:font script="Deva" typeface="Mangal"/>
-        <a:font script="Telu" typeface="Gautami"/>
-        <a:font script="Taml" typeface="Latha"/>
-        <a:font script="Syrc" typeface="Estrangelo Edessa"/>
-        <a:font script="Orya" typeface="Kalinga"/>
-        <a:font script="Mlym" typeface="Kartika"/>
-        <a:font script="Laoo" typeface="DokChampa"/>
-        <a:font script="Sinh" typeface="Iskoola Pota"/>
-        <a:font script="Mong" typeface="Mongolian Baiti"/>
-        <a:font script="Viet" typeface="Times New Roman"/>
-        <a:font script="Uigh" typeface="Microsoft Uighur"/>
-        <a:font script="Geor" typeface="Sylfaen"/>
-        <a:font script="Armn" typeface="Arial"/>
-        <a:font script="Bugi" typeface="Leelawadee UI"/>
-        <a:font script="Bopo" typeface="Microsoft JhengHei"/>
-        <a:font script="Java" typeface="Javanese Text"/>
-        <a:font script="Lisu" typeface="Segoe UI"/>
-        <a:font script="Mymr" typeface="Myanmar Text"/>
-        <a:font script="Nkoo" typeface="Ebrima"/>
-        <a:font script="Olck" typeface="Nirmala UI"/>
-        <a:font script="Osma" typeface="Ebrima"/>
-        <a:font script="Phag" typeface="Phagspa"/>
-        <a:font script="Syrn" typeface="Estrangelo Edessa"/>
-        <a:font script="Syrj" typeface="Estrangelo Edessa"/>
-        <a:font script="Syre" typeface="Estrangelo Edessa"/>
-        <a:font script="Sora" typeface="Nirmala UI"/>
-        <a:font script="Tale" typeface="Microsoft Tai Le"/>
-        <a:font script="Talu" typeface="Microsoft New Tai Lue"/>
-        <a:font script="Tfng" typeface="Ebrima"/>
-      </a:majorFont>
-      <a:minorFont>
-        <a:latin typeface="Aptos" panose="02110004020202020204"/>
-        <a:ea typeface=""/>
-        <a:cs typeface=""/>
-        <a:font script="Jpan" typeface="游ゴシック"/>
-        <a:font script="Hang" typeface="맑은 고딕"/>
-        <a:font script="Hans" typeface="等线"/>
-        <a:font script="Hant" typeface="新細明體"/>
-        <a:font script="Arab" typeface="Arial"/>
-        <a:font script="Hebr" typeface="Arial"/>
-        <a:font script="Thai" typeface="Cordia New"/>
+        <a:font script="Arab" typeface="Tahoma"/>
+        <a:font script="Hebr" typeface="Gisha"/>
+        <a:font script="Thai" typeface="DilleniaUPC"/>
         <a:font script="Ethi" typeface="Nyala"/>
         <a:font script="Beng" typeface="Vrinda"/>
         <a:font script="Gujr" typeface="Shruti"/>
@@ -4379,29 +7978,47 @@
         <a:font script="Laoo" typeface="DokChampa"/>
         <a:font script="Sinh" typeface="Iskoola Pota"/>
         <a:font script="Mong" typeface="Mongolian Baiti"/>
-        <a:font script="Viet" typeface="Arial"/>
+        <a:font script="Viet" typeface="Tahoma"/>
         <a:font script="Uigh" typeface="Microsoft Uighur"/>
         <a:font script="Geor" typeface="Sylfaen"/>
-        <a:font script="Armn" typeface="Arial"/>
-        <a:font script="Bugi" typeface="Leelawadee UI"/>
-        <a:font script="Bopo" typeface="Microsoft JhengHei"/>
-        <a:font script="Java" typeface="Javanese Text"/>
-        <a:font script="Lisu" typeface="Segoe UI"/>
-        <a:font script="Mymr" typeface="Myanmar Text"/>
-        <a:font script="Nkoo" typeface="Ebrima"/>
-        <a:font script="Olck" typeface="Nirmala UI"/>
-        <a:font script="Osma" typeface="Ebrima"/>
-        <a:font script="Phag" typeface="Phagspa"/>
-        <a:font script="Syrn" typeface="Estrangelo Edessa"/>
-        <a:font script="Syrj" typeface="Estrangelo Edessa"/>
-        <a:font script="Syre" typeface="Estrangelo Edessa"/>
-        <a:font script="Sora" typeface="Nirmala UI"/>
-        <a:font script="Tale" typeface="Microsoft Tai Le"/>
-        <a:font script="Talu" typeface="Microsoft New Tai Lue"/>
-        <a:font script="Tfng" typeface="Ebrima"/>
+      </a:majorFont>
+      <a:minorFont>
+        <a:latin typeface="Century Gothic" panose="020B0502020202020204"/>
+        <a:ea typeface=""/>
+        <a:cs typeface=""/>
+        <a:font script="Jpan" typeface="ＭＳ ゴシック"/>
+        <a:font script="Hang" typeface="맑은 고딕"/>
+        <a:font script="Hans" typeface="宋体"/>
+        <a:font script="Hant" typeface="新細明體"/>
+        <a:font script="Arab" typeface="Tahoma"/>
+        <a:font script="Hebr" typeface="Gisha"/>
+        <a:font script="Thai" typeface="DilleniaUPC"/>
+        <a:font script="Ethi" typeface="Nyala"/>
+        <a:font script="Beng" typeface="Vrinda"/>
+        <a:font script="Gujr" typeface="Shruti"/>
+        <a:font script="Khmr" typeface="DaunPenh"/>
+        <a:font script="Knda" typeface="Tunga"/>
+        <a:font script="Guru" typeface="Raavi"/>
+        <a:font script="Cans" typeface="Euphemia"/>
+        <a:font script="Cher" typeface="Plantagenet Cherokee"/>
+        <a:font script="Yiii" typeface="Microsoft Yi Baiti"/>
+        <a:font script="Tibt" typeface="Microsoft Himalaya"/>
+        <a:font script="Thaa" typeface="MV Boli"/>
+        <a:font script="Deva" typeface="Mangal"/>
+        <a:font script="Telu" typeface="Gautami"/>
+        <a:font script="Taml" typeface="Latha"/>
+        <a:font script="Syrc" typeface="Estrangelo Edessa"/>
+        <a:font script="Orya" typeface="Kalinga"/>
+        <a:font script="Mlym" typeface="Kartika"/>
+        <a:font script="Laoo" typeface="DokChampa"/>
+        <a:font script="Sinh" typeface="Iskoola Pota"/>
+        <a:font script="Mong" typeface="Mongolian Baiti"/>
+        <a:font script="Viet" typeface="Verdana"/>
+        <a:font script="Uigh" typeface="Microsoft Uighur"/>
+        <a:font script="Geor" typeface="Sylfaen"/>
       </a:minorFont>
     </a:fontScheme>
-    <a:fmtScheme name="Office">
+    <a:fmtScheme name="Quotable">
       <a:fillStyleLst>
         <a:solidFill>
           <a:schemeClr val="phClr"/>
@@ -4410,76 +8027,52 @@
           <a:gsLst>
             <a:gs pos="0">
               <a:schemeClr val="phClr">
-                <a:lumMod val="110000"/>
-                <a:satMod val="105000"/>
-                <a:tint val="67000"/>
-              </a:schemeClr>
-            </a:gs>
-            <a:gs pos="50000">
-              <a:schemeClr val="phClr">
+                <a:tint val="80000"/>
                 <a:lumMod val="105000"/>
-                <a:satMod val="103000"/>
-                <a:tint val="73000"/>
               </a:schemeClr>
             </a:gs>
             <a:gs pos="100000">
               <a:schemeClr val="phClr">
-                <a:lumMod val="105000"/>
-                <a:satMod val="109000"/>
-                <a:tint val="81000"/>
+                <a:tint val="90000"/>
               </a:schemeClr>
             </a:gs>
           </a:gsLst>
           <a:lin ang="5400000" scaled="0"/>
         </a:gradFill>
-        <a:gradFill rotWithShape="1">
-          <a:gsLst>
-            <a:gs pos="0">
+        <a:blipFill rotWithShape="1">
+          <a:blip xmlns:r="http://schemas.openxmlformats.org/officeDocument/2006/relationships" r:embed="rId1">
+            <a:duotone>
               <a:schemeClr val="phClr">
-                <a:satMod val="103000"/>
+                <a:tint val="98000"/>
                 <a:lumMod val="102000"/>
-                <a:tint val="94000"/>
               </a:schemeClr>
-            </a:gs>
-            <a:gs pos="50000">
               <a:schemeClr val="phClr">
-                <a:satMod val="110000"/>
-                <a:lumMod val="100000"/>
-                <a:shade val="100000"/>
+                <a:shade val="98000"/>
+                <a:lumMod val="98000"/>
               </a:schemeClr>
-            </a:gs>
-            <a:gs pos="100000">
-              <a:schemeClr val="phClr">
-                <a:lumMod val="99000"/>
-                <a:satMod val="120000"/>
-                <a:shade val="78000"/>
-              </a:schemeClr>
-            </a:gs>
-          </a:gsLst>
-          <a:lin ang="5400000" scaled="0"/>
-        </a:gradFill>
+            </a:duotone>
+          </a:blip>
+          <a:tile tx="0" ty="0" sx="100000" sy="100000" flip="none" algn="tl"/>
+        </a:blipFill>
       </a:fillStyleLst>
       <a:lnStyleLst>
-        <a:ln w="12700" cap="flat" cmpd="sng" algn="ctr">
+        <a:ln w="9525" cap="rnd" cmpd="sng" algn="ctr">
           <a:solidFill>
             <a:schemeClr val="phClr"/>
           </a:solidFill>
           <a:prstDash val="solid"/>
-          <a:miter lim="800000"/>
         </a:ln>
-        <a:ln w="19050" cap="flat" cmpd="sng" algn="ctr">
+        <a:ln w="15875" cap="rnd" cmpd="sng" algn="ctr">
           <a:solidFill>
             <a:schemeClr val="phClr"/>
           </a:solidFill>
           <a:prstDash val="solid"/>
-          <a:miter lim="800000"/>
         </a:ln>
-        <a:ln w="25400" cap="flat" cmpd="sng" algn="ctr">
+        <a:ln w="25400" cap="rnd" cmpd="sng" algn="ctr">
           <a:solidFill>
             <a:schemeClr val="phClr"/>
           </a:solidFill>
           <a:prstDash val="solid"/>
-          <a:miter lim="800000"/>
         </a:ln>
       </a:lnStyleLst>
       <a:effectStyleLst>
@@ -4491,11 +8084,11 @@
         </a:effectStyle>
         <a:effectStyle>
           <a:effectLst>
-            <a:outerShdw blurRad="57150" dist="19050" dir="5400000" algn="ctr" rotWithShape="0">
+            <a:innerShdw blurRad="63500" dist="25400" dir="13500000">
               <a:srgbClr val="000000">
-                <a:alpha val="63000"/>
+                <a:alpha val="75000"/>
               </a:srgbClr>
-            </a:outerShdw>
+            </a:innerShdw>
           </a:effectLst>
         </a:effectStyle>
       </a:effectStyleLst>
@@ -4503,35 +8096,35 @@
         <a:solidFill>
           <a:schemeClr val="phClr"/>
         </a:solidFill>
-        <a:solidFill>
-          <a:schemeClr val="phClr">
-            <a:tint val="95000"/>
-            <a:satMod val="170000"/>
-          </a:schemeClr>
-        </a:solidFill>
         <a:gradFill rotWithShape="1">
           <a:gsLst>
             <a:gs pos="0">
               <a:schemeClr val="phClr">
-                <a:tint val="93000"/>
-                <a:satMod val="150000"/>
-                <a:shade val="98000"/>
-                <a:lumMod val="102000"/>
-              </a:schemeClr>
-            </a:gs>
-            <a:gs pos="50000">
-              <a:schemeClr val="phClr">
-                <a:tint val="98000"/>
-                <a:satMod val="130000"/>
-                <a:shade val="90000"/>
-                <a:lumMod val="103000"/>
+                <a:tint val="100000"/>
               </a:schemeClr>
             </a:gs>
             <a:gs pos="100000">
               <a:schemeClr val="phClr">
-                <a:shade val="63000"/>
+                <a:tint val="84000"/>
+                <a:shade val="84000"/>
+                <a:lumMod val="90000"/>
+              </a:schemeClr>
+            </a:gs>
+          </a:gsLst>
+          <a:lin ang="5400000" scaled="0"/>
+        </a:gradFill>
+        <a:gradFill rotWithShape="1">
+          <a:gsLst>
+            <a:gs pos="0">
+              <a:schemeClr val="phClr">
+                <a:tint val="84000"/>
+                <a:shade val="90000"/>
                 <a:satMod val="120000"/>
+                <a:lumMod val="90000"/>
               </a:schemeClr>
+            </a:gs>
+            <a:gs pos="100000">
+              <a:schemeClr val="phClr"/>
             </a:gs>
           </a:gsLst>
           <a:lin ang="5400000" scaled="0"/>
@@ -4539,31 +8132,11 @@
       </a:bgFillStyleLst>
     </a:fmtScheme>
   </a:themeElements>
-  <a:objectDefaults>
-    <a:lnDef>
-      <a:spPr/>
-      <a:bodyPr/>
-      <a:lstStyle/>
-      <a:style>
-        <a:lnRef idx="2">
-          <a:schemeClr val="accent1"/>
-        </a:lnRef>
-        <a:fillRef idx="0">
-          <a:schemeClr val="accent1"/>
-        </a:fillRef>
-        <a:effectRef idx="1">
-          <a:schemeClr val="accent1"/>
-        </a:effectRef>
-        <a:fontRef idx="minor">
-          <a:schemeClr val="tx1"/>
-        </a:fontRef>
-      </a:style>
-    </a:lnDef>
-  </a:objectDefaults>
+  <a:objectDefaults/>
   <a:extraClrSchemeLst/>
   <a:extLst>
     <a:ext uri="{05A4C25C-085E-4340-85A3-A5531E510DB2}">
-      <thm15:themeFamily xmlns:thm15="http://schemas.microsoft.com/office/thememl/2012/main" name="Office Theme" id="{2E142A2C-CD16-42D6-873A-C26D2A0506FA}" vid="{1BDDFF52-6CD6-40A5-AB3C-68EB2F1E4D0A}"/>
+      <thm15:themeFamily xmlns:thm15="http://schemas.microsoft.com/office/thememl/2012/main" name="Quotable" id="{39EC5628-30ED-4578-ACD8-9820EDB8E15A}" vid="{6F3559E9-1A4C-49D8-94D4-F41003531C49}"/>
     </a:ext>
   </a:extLst>
 </a:theme>

--- a/Explicacion.pptx
+++ b/Explicacion.pptx
@@ -12,8 +12,8 @@
     <p:sldId id="261" r:id="rId6"/>
     <p:sldId id="260" r:id="rId7"/>
     <p:sldId id="262" r:id="rId8"/>
-    <p:sldId id="263" r:id="rId9"/>
-    <p:sldId id="264" r:id="rId10"/>
+    <p:sldId id="264" r:id="rId9"/>
+    <p:sldId id="263" r:id="rId10"/>
     <p:sldId id="265" r:id="rId11"/>
   </p:sldIdLst>
   <p:sldSz cx="12192000" cy="6858000"/>
@@ -216,7 +216,7 @@
           <a:effectLst/>
           <a:extLst>
             <a:ext uri="{91240B29-F687-4f45-9708-019B960494DF}">
-              <a14:hiddenLine xmlns:a14="http://schemas.microsoft.com/office/drawing/2010/main" xmlns="" w="9525">
+              <a14:hiddenLine xmlns="" xmlns:a14="http://schemas.microsoft.com/office/drawing/2010/main" w="9525">
                 <a:solidFill>
                   <a:srgbClr val="000000"/>
                 </a:solidFill>
@@ -241,6 +241,13 @@
             <a:schemeClr val="lt1"/>
           </a:fontRef>
         </p:style>
+        <p:txBody>
+          <a:bodyPr/>
+          <a:lstStyle/>
+          <a:p>
+            <a:endParaRPr lang="en-PR"/>
+          </a:p>
+        </p:txBody>
       </p:sp>
       <p:sp>
         <p:nvSpPr>
@@ -1738,7 +1745,7 @@
           <a:ln/>
           <a:extLst>
             <a:ext uri="{91240B29-F687-4f45-9708-019B960494DF}">
-              <a14:hiddenLine xmlns:a14="http://schemas.microsoft.com/office/drawing/2010/main" xmlns="" w="9525">
+              <a14:hiddenLine xmlns="" xmlns:a14="http://schemas.microsoft.com/office/drawing/2010/main" w="9525">
                 <a:solidFill>
                   <a:srgbClr val="000000"/>
                 </a:solidFill>
@@ -2013,7 +2020,7 @@
           <a:ln/>
           <a:extLst>
             <a:ext uri="{91240B29-F687-4f45-9708-019B960494DF}">
-              <a14:hiddenLine xmlns:a14="http://schemas.microsoft.com/office/drawing/2010/main" xmlns="" w="9525">
+              <a14:hiddenLine xmlns="" xmlns:a14="http://schemas.microsoft.com/office/drawing/2010/main" w="9525">
                 <a:solidFill>
                   <a:srgbClr val="000000"/>
                 </a:solidFill>
@@ -2296,7 +2303,7 @@
           <a:ln/>
           <a:extLst>
             <a:ext uri="{91240B29-F687-4f45-9708-019B960494DF}">
-              <a14:hiddenLine xmlns:a14="http://schemas.microsoft.com/office/drawing/2010/main" xmlns="" w="9525">
+              <a14:hiddenLine xmlns="" xmlns:a14="http://schemas.microsoft.com/office/drawing/2010/main" w="9525">
                 <a:solidFill>
                   <a:srgbClr val="000000"/>
                 </a:solidFill>
@@ -2922,7 +2929,7 @@
           <a:ln/>
           <a:extLst>
             <a:ext uri="{91240B29-F687-4f45-9708-019B960494DF}">
-              <a14:hiddenLine xmlns:a14="http://schemas.microsoft.com/office/drawing/2010/main" xmlns="" w="9525">
+              <a14:hiddenLine xmlns="" xmlns:a14="http://schemas.microsoft.com/office/drawing/2010/main" w="9525">
                 <a:solidFill>
                   <a:srgbClr val="000000"/>
                 </a:solidFill>
@@ -3261,7 +3268,7 @@
           <a:ln/>
           <a:extLst>
             <a:ext uri="{91240B29-F687-4f45-9708-019B960494DF}">
-              <a14:hiddenLine xmlns:a14="http://schemas.microsoft.com/office/drawing/2010/main" xmlns="" w="9525">
+              <a14:hiddenLine xmlns="" xmlns:a14="http://schemas.microsoft.com/office/drawing/2010/main" w="9525">
                 <a:solidFill>
                   <a:srgbClr val="000000"/>
                 </a:solidFill>
@@ -3738,7 +3745,7 @@
           <a:ln/>
           <a:extLst>
             <a:ext uri="{91240B29-F687-4f45-9708-019B960494DF}">
-              <a14:hiddenLine xmlns:a14="http://schemas.microsoft.com/office/drawing/2010/main" xmlns="" w="9525">
+              <a14:hiddenLine xmlns="" xmlns:a14="http://schemas.microsoft.com/office/drawing/2010/main" w="9525">
                 <a:solidFill>
                   <a:srgbClr val="000000"/>
                 </a:solidFill>
@@ -4167,7 +4174,7 @@
           <a:ln/>
           <a:extLst>
             <a:ext uri="{91240B29-F687-4f45-9708-019B960494DF}">
-              <a14:hiddenLine xmlns:a14="http://schemas.microsoft.com/office/drawing/2010/main" xmlns="" w="9525">
+              <a14:hiddenLine xmlns="" xmlns:a14="http://schemas.microsoft.com/office/drawing/2010/main" w="9525">
                 <a:solidFill>
                   <a:srgbClr val="000000"/>
                 </a:solidFill>
@@ -5547,7 +5554,10 @@
           <a:lstStyle/>
           <a:p>
             <a:r>
-              <a:rPr lang="en-PR" dirty="0"/>
+              <a:rPr lang="en-PR" dirty="0">
+                <a:latin typeface="Times New Roman" panose="02020603050405020304" pitchFamily="18" charset="0"/>
+                <a:cs typeface="Times New Roman" panose="02020603050405020304" pitchFamily="18" charset="0"/>
+              </a:rPr>
               <a:t>Pausa del juego</a:t>
             </a:r>
           </a:p>
@@ -6229,19 +6239,19 @@
             </a:r>
             <a:r>
               <a:rPr lang="en-US" sz="2400" dirty="0" err="1"/>
+              <a:t>una</a:t>
+            </a:r>
+            <a:r>
+              <a:rPr lang="en-US" sz="2400" dirty="0"/>
+              <a:t> </a:t>
+            </a:r>
+            <a:r>
+              <a:rPr lang="en-US" sz="2400" dirty="0" err="1"/>
               <a:t>velocidad</a:t>
             </a:r>
             <a:r>
               <a:rPr lang="en-US" sz="2400" dirty="0"/>
-              <a:t> </a:t>
-            </a:r>
-            <a:r>
-              <a:rPr lang="en-US" sz="2400" dirty="0" err="1"/>
-              <a:t>lenta</a:t>
-            </a:r>
-            <a:r>
-              <a:rPr lang="en-US" sz="2400" dirty="0"/>
-              <a:t>.</a:t>
+              <a:t> lenta.</a:t>
             </a:r>
           </a:p>
           <a:p>
@@ -6767,6 +6777,62 @@
               <a:buChar char="•"/>
             </a:pPr>
             <a:r>
+              <a:rPr lang="en-US" sz="2400" dirty="0"/>
+              <a:t>Se </a:t>
+            </a:r>
+            <a:r>
+              <a:rPr lang="en-US" sz="2400" dirty="0" err="1"/>
+              <a:t>comprimio</a:t>
+            </a:r>
+            <a:r>
+              <a:rPr lang="en-US" sz="2400" dirty="0"/>
+              <a:t> </a:t>
+            </a:r>
+            <a:r>
+              <a:rPr lang="en-US" sz="2400" dirty="0" err="1"/>
+              <a:t>el</a:t>
+            </a:r>
+            <a:r>
+              <a:rPr lang="en-US" sz="2400" dirty="0"/>
+              <a:t> </a:t>
+            </a:r>
+            <a:r>
+              <a:rPr lang="en-US" sz="2400" dirty="0" err="1"/>
+              <a:t>mapa</a:t>
+            </a:r>
+            <a:r>
+              <a:rPr lang="en-US" sz="2400" dirty="0"/>
+              <a:t> </a:t>
+            </a:r>
+            <a:r>
+              <a:rPr lang="en-US" sz="2400" dirty="0" err="1"/>
+              <a:t>utilizando</a:t>
+            </a:r>
+            <a:r>
+              <a:rPr lang="en-US" sz="2400" dirty="0"/>
+              <a:t> un </a:t>
+            </a:r>
+            <a:r>
+              <a:rPr lang="en-US" sz="2400" dirty="0" err="1"/>
+              <a:t>metodo</a:t>
+            </a:r>
+            <a:endParaRPr lang="en-US" sz="2400" dirty="0"/>
+          </a:p>
+          <a:p>
+            <a:pPr marL="0" indent="0" algn="l">
+              <a:buNone/>
+            </a:pPr>
+            <a:r>
+              <a:rPr lang="en-US" sz="2400" dirty="0"/>
+              <a:t>	dos bits.</a:t>
+            </a:r>
+          </a:p>
+          <a:p>
+            <a:pPr algn="l">
+              <a:buFont typeface="Arial" panose="020B0604020202020204" pitchFamily="34" charset="0"/>
+              <a:buChar char="•"/>
+            </a:pPr>
+            <a:r>
               <a:rPr lang="en-US" sz="2400" b="0" i="0" u="none" strike="noStrike" dirty="0" err="1">
                 <a:effectLst/>
               </a:rPr>
@@ -6913,6 +6979,38 @@
           </a:prstGeom>
         </p:spPr>
       </p:pic>
+      <p:sp>
+        <p:nvSpPr>
+          <p:cNvPr id="4" name="TextBox 3">
+            <a:extLst>
+              <a:ext uri="{FF2B5EF4-FFF2-40B4-BE49-F238E27FC236}">
+                <a16:creationId xmlns:a16="http://schemas.microsoft.com/office/drawing/2014/main" id="{7B5122BF-73B4-05C5-9F93-7BEDF28C69CF}"/>
+              </a:ext>
+            </a:extLst>
+          </p:cNvPr>
+          <p:cNvSpPr txBox="1"/>
+          <p:nvPr/>
+        </p:nvSpPr>
+        <p:spPr>
+          <a:xfrm>
+            <a:off x="1782501" y="717630"/>
+            <a:ext cx="184731" cy="369332"/>
+          </a:xfrm>
+          <a:prstGeom prst="rect">
+            <a:avLst/>
+          </a:prstGeom>
+          <a:noFill/>
+        </p:spPr>
+        <p:txBody>
+          <a:bodyPr wrap="none" rtlCol="0">
+            <a:spAutoFit/>
+          </a:bodyPr>
+          <a:lstStyle/>
+          <a:p>
+            <a:endParaRPr lang="en-PR" dirty="0"/>
+          </a:p>
+        </p:txBody>
+      </p:sp>
     </p:spTree>
     <p:extLst>
       <p:ext uri="{BB962C8B-B14F-4D97-AF65-F5344CB8AC3E}">
@@ -7095,7 +7193,7 @@
             </a:r>
             <a:r>
               <a:rPr lang="en-US" sz="2400" dirty="0" err="1"/>
-              <a:t>vidaT</a:t>
+              <a:t>vida</a:t>
             </a:r>
             <a:r>
               <a:rPr lang="en-US" sz="2400" dirty="0"/>
@@ -7104,12 +7202,8 @@
           </a:p>
           <a:p>
             <a:r>
-              <a:rPr lang="en-US" sz="2400" dirty="0" err="1"/>
-              <a:t>iene</a:t>
-            </a:r>
-            <a:r>
-              <a:rPr lang="en-US" sz="2400" dirty="0"/>
-              <a:t> 3 </a:t>
+              <a:rPr lang="en-US" sz="2400" dirty="0"/>
+              <a:t>Tiene 3 </a:t>
             </a:r>
             <a:r>
               <a:rPr lang="en-US" sz="2400" dirty="0" err="1"/>
@@ -7259,6 +7353,363 @@
           <p:cNvPr id="2" name="Title 1">
             <a:extLst>
               <a:ext uri="{FF2B5EF4-FFF2-40B4-BE49-F238E27FC236}">
+                <a16:creationId xmlns:a16="http://schemas.microsoft.com/office/drawing/2014/main" id="{3C83909E-DEC4-E0E5-DA50-EB27143E56B8}"/>
+              </a:ext>
+            </a:extLst>
+          </p:cNvPr>
+          <p:cNvSpPr>
+            <a:spLocks noGrp="1"/>
+          </p:cNvSpPr>
+          <p:nvPr>
+            <p:ph type="title"/>
+          </p:nvPr>
+        </p:nvSpPr>
+        <p:spPr/>
+        <p:txBody>
+          <a:bodyPr/>
+          <a:lstStyle/>
+          <a:p>
+            <a:r>
+              <a:rPr lang="en-PR" dirty="0">
+                <a:solidFill>
+                  <a:schemeClr val="tx1"/>
+                </a:solidFill>
+                <a:latin typeface="Times New Roman" panose="02020603050405020304" pitchFamily="18" charset="0"/>
+                <a:cs typeface="Times New Roman" panose="02020603050405020304" pitchFamily="18" charset="0"/>
+              </a:rPr>
+              <a:t>Movimiento del enemigo</a:t>
+            </a:r>
+          </a:p>
+        </p:txBody>
+      </p:sp>
+      <p:sp>
+        <p:nvSpPr>
+          <p:cNvPr id="3" name="Content Placeholder 2">
+            <a:extLst>
+              <a:ext uri="{FF2B5EF4-FFF2-40B4-BE49-F238E27FC236}">
+                <a16:creationId xmlns:a16="http://schemas.microsoft.com/office/drawing/2014/main" id="{5B92CD4F-FCBC-C50A-392B-00A4B68F9446}"/>
+              </a:ext>
+            </a:extLst>
+          </p:cNvPr>
+          <p:cNvSpPr>
+            <a:spLocks noGrp="1"/>
+          </p:cNvSpPr>
+          <p:nvPr>
+            <p:ph idx="1"/>
+          </p:nvPr>
+        </p:nvSpPr>
+        <p:spPr/>
+        <p:txBody>
+          <a:bodyPr>
+            <a:normAutofit/>
+          </a:bodyPr>
+          <a:lstStyle/>
+          <a:p>
+            <a:pPr algn="l">
+              <a:buFont typeface="Arial" panose="020B0604020202020204" pitchFamily="34" charset="0"/>
+              <a:buChar char="•"/>
+            </a:pPr>
+            <a:r>
+              <a:rPr lang="en-US" sz="2400" b="0" i="0" u="none" strike="noStrike" dirty="0">
+                <a:effectLst/>
+                <a:cs typeface="Times New Roman" panose="02020603050405020304" pitchFamily="18" charset="0"/>
+              </a:rPr>
+              <a:t>El </a:t>
+            </a:r>
+            <a:r>
+              <a:rPr lang="en-US" sz="2400" b="0" i="0" u="none" strike="noStrike" dirty="0" err="1">
+                <a:effectLst/>
+                <a:cs typeface="Times New Roman" panose="02020603050405020304" pitchFamily="18" charset="0"/>
+              </a:rPr>
+              <a:t>enemigo</a:t>
+            </a:r>
+            <a:r>
+              <a:rPr lang="en-US" sz="2400" b="0" i="0" u="none" strike="noStrike" dirty="0">
+                <a:effectLst/>
+                <a:cs typeface="Times New Roman" panose="02020603050405020304" pitchFamily="18" charset="0"/>
+              </a:rPr>
+              <a:t> se </a:t>
+            </a:r>
+            <a:r>
+              <a:rPr lang="en-US" sz="2400" b="0" i="0" u="none" strike="noStrike" dirty="0" err="1">
+                <a:effectLst/>
+                <a:cs typeface="Times New Roman" panose="02020603050405020304" pitchFamily="18" charset="0"/>
+              </a:rPr>
+              <a:t>mueve</a:t>
+            </a:r>
+            <a:r>
+              <a:rPr lang="en-US" sz="2400" b="0" i="0" u="none" strike="noStrike" dirty="0">
+                <a:effectLst/>
+                <a:cs typeface="Times New Roman" panose="02020603050405020304" pitchFamily="18" charset="0"/>
+              </a:rPr>
+              <a:t> de forma continua.</a:t>
+            </a:r>
+          </a:p>
+          <a:p>
+            <a:pPr algn="l">
+              <a:buFont typeface="Arial" panose="020B0604020202020204" pitchFamily="34" charset="0"/>
+              <a:buChar char="•"/>
+            </a:pPr>
+            <a:r>
+              <a:rPr lang="en-US" sz="2400" dirty="0">
+                <a:cs typeface="Times New Roman" panose="02020603050405020304" pitchFamily="18" charset="0"/>
+              </a:rPr>
+              <a:t>Al </a:t>
+            </a:r>
+            <a:r>
+              <a:rPr lang="en-US" sz="2400" dirty="0" err="1">
+                <a:cs typeface="Times New Roman" panose="02020603050405020304" pitchFamily="18" charset="0"/>
+              </a:rPr>
+              <a:t>igual</a:t>
+            </a:r>
+            <a:r>
+              <a:rPr lang="en-US" sz="2400" dirty="0">
+                <a:cs typeface="Times New Roman" panose="02020603050405020304" pitchFamily="18" charset="0"/>
+              </a:rPr>
+              <a:t> que </a:t>
+            </a:r>
+            <a:r>
+              <a:rPr lang="en-US" sz="2400" dirty="0" err="1">
+                <a:cs typeface="Times New Roman" panose="02020603050405020304" pitchFamily="18" charset="0"/>
+              </a:rPr>
+              <a:t>el</a:t>
+            </a:r>
+            <a:r>
+              <a:rPr lang="en-US" sz="2400" dirty="0">
+                <a:cs typeface="Times New Roman" panose="02020603050405020304" pitchFamily="18" charset="0"/>
+              </a:rPr>
+              <a:t> </a:t>
+            </a:r>
+            <a:r>
+              <a:rPr lang="en-US" sz="2400" dirty="0" err="1">
+                <a:cs typeface="Times New Roman" panose="02020603050405020304" pitchFamily="18" charset="0"/>
+              </a:rPr>
+              <a:t>jugador</a:t>
+            </a:r>
+            <a:r>
+              <a:rPr lang="en-US" sz="2400" dirty="0">
+                <a:cs typeface="Times New Roman" panose="02020603050405020304" pitchFamily="18" charset="0"/>
+              </a:rPr>
+              <a:t>, la </a:t>
+            </a:r>
+            <a:r>
+              <a:rPr lang="en-US" sz="2400" dirty="0" err="1">
+                <a:cs typeface="Times New Roman" panose="02020603050405020304" pitchFamily="18" charset="0"/>
+              </a:rPr>
+              <a:t>velocidad</a:t>
+            </a:r>
+            <a:r>
+              <a:rPr lang="en-US" sz="2400" dirty="0">
+                <a:cs typeface="Times New Roman" panose="02020603050405020304" pitchFamily="18" charset="0"/>
+              </a:rPr>
+              <a:t> del </a:t>
+            </a:r>
+            <a:r>
+              <a:rPr lang="en-US" sz="2400" dirty="0" err="1">
+                <a:cs typeface="Times New Roman" panose="02020603050405020304" pitchFamily="18" charset="0"/>
+              </a:rPr>
+              <a:t>enemigo</a:t>
+            </a:r>
+            <a:r>
+              <a:rPr lang="en-US" sz="2400" dirty="0">
+                <a:cs typeface="Times New Roman" panose="02020603050405020304" pitchFamily="18" charset="0"/>
+              </a:rPr>
+              <a:t> es </a:t>
+            </a:r>
+            <a:r>
+              <a:rPr lang="en-US" sz="2400" dirty="0" err="1">
+                <a:cs typeface="Times New Roman" panose="02020603050405020304" pitchFamily="18" charset="0"/>
+              </a:rPr>
+              <a:t>controlada</a:t>
+            </a:r>
+            <a:r>
+              <a:rPr lang="en-US" sz="2400" dirty="0">
+                <a:cs typeface="Times New Roman" panose="02020603050405020304" pitchFamily="18" charset="0"/>
+              </a:rPr>
+              <a:t> a traves de un </a:t>
+            </a:r>
+            <a:r>
+              <a:rPr lang="en-US" sz="2400" dirty="0" err="1">
+                <a:cs typeface="Times New Roman" panose="02020603050405020304" pitchFamily="18" charset="0"/>
+              </a:rPr>
+              <a:t>sistema</a:t>
+            </a:r>
+            <a:r>
+              <a:rPr lang="en-US" sz="2400" dirty="0">
+                <a:cs typeface="Times New Roman" panose="02020603050405020304" pitchFamily="18" charset="0"/>
+              </a:rPr>
+              <a:t> de </a:t>
+            </a:r>
+            <a:r>
+              <a:rPr lang="en-US" sz="2400" dirty="0" err="1">
+                <a:cs typeface="Times New Roman" panose="02020603050405020304" pitchFamily="18" charset="0"/>
+              </a:rPr>
+              <a:t>retraso</a:t>
+            </a:r>
+            <a:r>
+              <a:rPr lang="en-US" sz="2400" dirty="0">
+                <a:cs typeface="Times New Roman" panose="02020603050405020304" pitchFamily="18" charset="0"/>
+              </a:rPr>
+              <a:t>.</a:t>
+            </a:r>
+          </a:p>
+          <a:p>
+            <a:pPr algn="l">
+              <a:buFont typeface="Arial" panose="020B0604020202020204" pitchFamily="34" charset="0"/>
+              <a:buChar char="•"/>
+            </a:pPr>
+            <a:r>
+              <a:rPr lang="en-US" sz="2400" b="0" i="0" u="none" strike="noStrike" dirty="0" err="1">
+                <a:effectLst/>
+                <a:cs typeface="Times New Roman" panose="02020603050405020304" pitchFamily="18" charset="0"/>
+              </a:rPr>
+              <a:t>Aumenta</a:t>
+            </a:r>
+            <a:r>
+              <a:rPr lang="en-US" sz="2400" b="0" i="0" u="none" strike="noStrike" dirty="0">
+                <a:effectLst/>
+                <a:cs typeface="Times New Roman" panose="02020603050405020304" pitchFamily="18" charset="0"/>
+              </a:rPr>
+              <a:t> </a:t>
+            </a:r>
+            <a:r>
+              <a:rPr lang="en-US" sz="2400" dirty="0">
+                <a:cs typeface="Times New Roman" panose="02020603050405020304" pitchFamily="18" charset="0"/>
+              </a:rPr>
+              <a:t>de </a:t>
+            </a:r>
+            <a:r>
+              <a:rPr lang="en-US" sz="2400" dirty="0" err="1">
+                <a:cs typeface="Times New Roman" panose="02020603050405020304" pitchFamily="18" charset="0"/>
+              </a:rPr>
+              <a:t>velocidad</a:t>
+            </a:r>
+            <a:r>
+              <a:rPr lang="en-US" sz="2400" dirty="0">
+                <a:cs typeface="Times New Roman" panose="02020603050405020304" pitchFamily="18" charset="0"/>
+              </a:rPr>
+              <a:t> </a:t>
+            </a:r>
+            <a:r>
+              <a:rPr lang="en-US" sz="2400" dirty="0" err="1">
+                <a:cs typeface="Times New Roman" panose="02020603050405020304" pitchFamily="18" charset="0"/>
+              </a:rPr>
+              <a:t>cuando</a:t>
+            </a:r>
+            <a:r>
+              <a:rPr lang="en-US" sz="2400" dirty="0">
+                <a:cs typeface="Times New Roman" panose="02020603050405020304" pitchFamily="18" charset="0"/>
+              </a:rPr>
+              <a:t> </a:t>
+            </a:r>
+            <a:r>
+              <a:rPr lang="en-US" sz="2400" dirty="0" err="1">
+                <a:cs typeface="Times New Roman" panose="02020603050405020304" pitchFamily="18" charset="0"/>
+              </a:rPr>
+              <a:t>el</a:t>
+            </a:r>
+            <a:r>
+              <a:rPr lang="en-US" sz="2400" dirty="0">
+                <a:cs typeface="Times New Roman" panose="02020603050405020304" pitchFamily="18" charset="0"/>
+              </a:rPr>
+              <a:t> </a:t>
+            </a:r>
+            <a:r>
+              <a:rPr lang="en-US" sz="2400" dirty="0" err="1">
+                <a:cs typeface="Times New Roman" panose="02020603050405020304" pitchFamily="18" charset="0"/>
+              </a:rPr>
+              <a:t>jugador</a:t>
+            </a:r>
+            <a:r>
+              <a:rPr lang="en-US" sz="2400" dirty="0">
+                <a:cs typeface="Times New Roman" panose="02020603050405020304" pitchFamily="18" charset="0"/>
+              </a:rPr>
+              <a:t> </a:t>
+            </a:r>
+            <a:r>
+              <a:rPr lang="en-US" sz="2400" dirty="0" err="1">
+                <a:cs typeface="Times New Roman" panose="02020603050405020304" pitchFamily="18" charset="0"/>
+              </a:rPr>
+              <a:t>mejora</a:t>
+            </a:r>
+            <a:r>
+              <a:rPr lang="en-US" sz="2400" dirty="0">
+                <a:cs typeface="Times New Roman" panose="02020603050405020304" pitchFamily="18" charset="0"/>
+              </a:rPr>
+              <a:t>.</a:t>
+            </a:r>
+            <a:endParaRPr lang="en-US" sz="2400" b="0" i="0" u="none" strike="noStrike" dirty="0">
+              <a:effectLst/>
+              <a:cs typeface="Times New Roman" panose="02020603050405020304" pitchFamily="18" charset="0"/>
+            </a:endParaRPr>
+          </a:p>
+        </p:txBody>
+      </p:sp>
+      <p:pic>
+        <p:nvPicPr>
+          <p:cNvPr id="7" name="Picture 6">
+            <a:extLst>
+              <a:ext uri="{FF2B5EF4-FFF2-40B4-BE49-F238E27FC236}">
+                <a16:creationId xmlns:a16="http://schemas.microsoft.com/office/drawing/2014/main" id="{76A8FF68-E5A7-C60E-7088-244026F9966B}"/>
+              </a:ext>
+            </a:extLst>
+          </p:cNvPr>
+          <p:cNvPicPr>
+            <a:picLocks noChangeAspect="1"/>
+          </p:cNvPicPr>
+          <p:nvPr/>
+        </p:nvPicPr>
+        <p:blipFill>
+          <a:blip r:embed="rId2"/>
+          <a:stretch>
+            <a:fillRect/>
+          </a:stretch>
+        </p:blipFill>
+        <p:spPr>
+          <a:xfrm>
+            <a:off x="11398250" y="5950857"/>
+            <a:ext cx="793750" cy="907143"/>
+          </a:xfrm>
+          <a:prstGeom prst="rect">
+            <a:avLst/>
+          </a:prstGeom>
+        </p:spPr>
+      </p:pic>
+    </p:spTree>
+    <p:extLst>
+      <p:ext uri="{BB962C8B-B14F-4D97-AF65-F5344CB8AC3E}">
+        <p14:creationId xmlns:p14="http://schemas.microsoft.com/office/powerpoint/2010/main" val="131115072"/>
+      </p:ext>
+    </p:extLst>
+  </p:cSld>
+  <p:clrMapOvr>
+    <a:masterClrMapping/>
+  </p:clrMapOvr>
+</p:sld>
+</file>
+
+<file path=ppt/slides/slide9.xml><?xml version="1.0" encoding="utf-8"?>
+<p:sld xmlns:a="http://schemas.openxmlformats.org/drawingml/2006/main" xmlns:r="http://schemas.openxmlformats.org/officeDocument/2006/relationships" xmlns:p="http://schemas.openxmlformats.org/presentationml/2006/main">
+  <p:cSld>
+    <p:spTree>
+      <p:nvGrpSpPr>
+        <p:cNvPr id="1" name=""/>
+        <p:cNvGrpSpPr/>
+        <p:nvPr/>
+      </p:nvGrpSpPr>
+      <p:grpSpPr>
+        <a:xfrm>
+          <a:off x="0" y="0"/>
+          <a:ext cx="0" cy="0"/>
+          <a:chOff x="0" y="0"/>
+          <a:chExt cx="0" cy="0"/>
+        </a:xfrm>
+      </p:grpSpPr>
+      <p:sp>
+        <p:nvSpPr>
+          <p:cNvPr id="2" name="Title 1">
+            <a:extLst>
+              <a:ext uri="{FF2B5EF4-FFF2-40B4-BE49-F238E27FC236}">
                 <a16:creationId xmlns:a16="http://schemas.microsoft.com/office/drawing/2014/main" id="{2E705086-1BA5-F7BC-48EE-50190EDBF4F1}"/>
               </a:ext>
             </a:extLst>
@@ -7403,32 +7854,6 @@
             <a:r>
               <a:rPr lang="en-US" sz="2400" dirty="0" err="1"/>
               <a:t>cercana</a:t>
-            </a:r>
-            <a:r>
-              <a:rPr lang="en-US" sz="2400" dirty="0"/>
-              <a:t>.</a:t>
-            </a:r>
-          </a:p>
-          <a:p>
-            <a:r>
-              <a:rPr lang="en-US" sz="2400" dirty="0" err="1"/>
-              <a:t>Verifica</a:t>
-            </a:r>
-            <a:r>
-              <a:rPr lang="en-US" sz="2400" dirty="0"/>
-              <a:t> que no </a:t>
-            </a:r>
-            <a:r>
-              <a:rPr lang="en-US" sz="2400" dirty="0" err="1"/>
-              <a:t>choque</a:t>
-            </a:r>
-            <a:r>
-              <a:rPr lang="en-US" sz="2400" dirty="0"/>
-              <a:t> con </a:t>
-            </a:r>
-            <a:r>
-              <a:rPr lang="en-US" sz="2400" dirty="0" err="1"/>
-              <a:t>paredes</a:t>
             </a:r>
             <a:r>
               <a:rPr lang="en-US" sz="2400" dirty="0"/>
@@ -7475,427 +7900,6 @@
     <p:extLst>
       <p:ext uri="{BB962C8B-B14F-4D97-AF65-F5344CB8AC3E}">
         <p14:creationId xmlns:p14="http://schemas.microsoft.com/office/powerpoint/2010/main" val="328842612"/>
-      </p:ext>
-    </p:extLst>
-  </p:cSld>
-  <p:clrMapOvr>
-    <a:masterClrMapping/>
-  </p:clrMapOvr>
-</p:sld>
-</file>
-
-<file path=ppt/slides/slide9.xml><?xml version="1.0" encoding="utf-8"?>
-<p:sld xmlns:a="http://schemas.openxmlformats.org/drawingml/2006/main" xmlns:r="http://schemas.openxmlformats.org/officeDocument/2006/relationships" xmlns:p="http://schemas.openxmlformats.org/presentationml/2006/main">
-  <p:cSld>
-    <p:spTree>
-      <p:nvGrpSpPr>
-        <p:cNvPr id="1" name=""/>
-        <p:cNvGrpSpPr/>
-        <p:nvPr/>
-      </p:nvGrpSpPr>
-      <p:grpSpPr>
-        <a:xfrm>
-          <a:off x="0" y="0"/>
-          <a:ext cx="0" cy="0"/>
-          <a:chOff x="0" y="0"/>
-          <a:chExt cx="0" cy="0"/>
-        </a:xfrm>
-      </p:grpSpPr>
-      <p:sp>
-        <p:nvSpPr>
-          <p:cNvPr id="2" name="Title 1">
-            <a:extLst>
-              <a:ext uri="{FF2B5EF4-FFF2-40B4-BE49-F238E27FC236}">
-                <a16:creationId xmlns:a16="http://schemas.microsoft.com/office/drawing/2014/main" id="{3C83909E-DEC4-E0E5-DA50-EB27143E56B8}"/>
-              </a:ext>
-            </a:extLst>
-          </p:cNvPr>
-          <p:cNvSpPr>
-            <a:spLocks noGrp="1"/>
-          </p:cNvSpPr>
-          <p:nvPr>
-            <p:ph type="title"/>
-          </p:nvPr>
-        </p:nvSpPr>
-        <p:spPr/>
-        <p:txBody>
-          <a:bodyPr/>
-          <a:lstStyle/>
-          <a:p>
-            <a:r>
-              <a:rPr lang="en-PR" dirty="0">
-                <a:solidFill>
-                  <a:schemeClr val="tx1"/>
-                </a:solidFill>
-                <a:latin typeface="Times New Roman" panose="02020603050405020304" pitchFamily="18" charset="0"/>
-                <a:cs typeface="Times New Roman" panose="02020603050405020304" pitchFamily="18" charset="0"/>
-              </a:rPr>
-              <a:t>Movimiento del enemigo</a:t>
-            </a:r>
-          </a:p>
-        </p:txBody>
-      </p:sp>
-      <p:sp>
-        <p:nvSpPr>
-          <p:cNvPr id="3" name="Content Placeholder 2">
-            <a:extLst>
-              <a:ext uri="{FF2B5EF4-FFF2-40B4-BE49-F238E27FC236}">
-                <a16:creationId xmlns:a16="http://schemas.microsoft.com/office/drawing/2014/main" id="{5B92CD4F-FCBC-C50A-392B-00A4B68F9446}"/>
-              </a:ext>
-            </a:extLst>
-          </p:cNvPr>
-          <p:cNvSpPr>
-            <a:spLocks noGrp="1"/>
-          </p:cNvSpPr>
-          <p:nvPr>
-            <p:ph idx="1"/>
-          </p:nvPr>
-        </p:nvSpPr>
-        <p:spPr/>
-        <p:txBody>
-          <a:bodyPr>
-            <a:normAutofit/>
-          </a:bodyPr>
-          <a:lstStyle/>
-          <a:p>
-            <a:pPr algn="l">
-              <a:buFont typeface="Arial" panose="020B0604020202020204" pitchFamily="34" charset="0"/>
-              <a:buChar char="•"/>
-            </a:pPr>
-            <a:r>
-              <a:rPr lang="en-US" sz="2400" b="0" i="0" u="none" strike="noStrike" dirty="0">
-                <a:effectLst/>
-                <a:latin typeface="Times New Roman" panose="02020603050405020304" pitchFamily="18" charset="0"/>
-                <a:cs typeface="Times New Roman" panose="02020603050405020304" pitchFamily="18" charset="0"/>
-              </a:rPr>
-              <a:t>El </a:t>
-            </a:r>
-            <a:r>
-              <a:rPr lang="en-US" sz="2400" b="0" i="0" u="none" strike="noStrike" dirty="0" err="1">
-                <a:effectLst/>
-                <a:latin typeface="Times New Roman" panose="02020603050405020304" pitchFamily="18" charset="0"/>
-                <a:cs typeface="Times New Roman" panose="02020603050405020304" pitchFamily="18" charset="0"/>
-              </a:rPr>
-              <a:t>enemigo</a:t>
-            </a:r>
-            <a:r>
-              <a:rPr lang="en-US" sz="2400" b="0" i="0" u="none" strike="noStrike" dirty="0">
-                <a:effectLst/>
-                <a:latin typeface="Times New Roman" panose="02020603050405020304" pitchFamily="18" charset="0"/>
-                <a:cs typeface="Times New Roman" panose="02020603050405020304" pitchFamily="18" charset="0"/>
-              </a:rPr>
-              <a:t> se </a:t>
-            </a:r>
-            <a:r>
-              <a:rPr lang="en-US" sz="2400" b="0" i="0" u="none" strike="noStrike" dirty="0" err="1">
-                <a:effectLst/>
-                <a:latin typeface="Times New Roman" panose="02020603050405020304" pitchFamily="18" charset="0"/>
-                <a:cs typeface="Times New Roman" panose="02020603050405020304" pitchFamily="18" charset="0"/>
-              </a:rPr>
-              <a:t>mueve</a:t>
-            </a:r>
-            <a:r>
-              <a:rPr lang="en-US" sz="2400" b="0" i="0" u="none" strike="noStrike" dirty="0">
-                <a:effectLst/>
-                <a:latin typeface="Times New Roman" panose="02020603050405020304" pitchFamily="18" charset="0"/>
-                <a:cs typeface="Times New Roman" panose="02020603050405020304" pitchFamily="18" charset="0"/>
-              </a:rPr>
-              <a:t> de forma continua.</a:t>
-            </a:r>
-          </a:p>
-          <a:p>
-            <a:pPr algn="l">
-              <a:buFont typeface="Arial" panose="020B0604020202020204" pitchFamily="34" charset="0"/>
-              <a:buChar char="•"/>
-            </a:pPr>
-            <a:r>
-              <a:rPr lang="en-US" sz="2400" dirty="0">
-                <a:latin typeface="Times New Roman" panose="02020603050405020304" pitchFamily="18" charset="0"/>
-                <a:cs typeface="Times New Roman" panose="02020603050405020304" pitchFamily="18" charset="0"/>
-              </a:rPr>
-              <a:t>Al </a:t>
-            </a:r>
-            <a:r>
-              <a:rPr lang="en-US" sz="2400" dirty="0" err="1">
-                <a:latin typeface="Times New Roman" panose="02020603050405020304" pitchFamily="18" charset="0"/>
-                <a:cs typeface="Times New Roman" panose="02020603050405020304" pitchFamily="18" charset="0"/>
-              </a:rPr>
-              <a:t>igual</a:t>
-            </a:r>
-            <a:r>
-              <a:rPr lang="en-US" sz="2400" dirty="0">
-                <a:latin typeface="Times New Roman" panose="02020603050405020304" pitchFamily="18" charset="0"/>
-                <a:cs typeface="Times New Roman" panose="02020603050405020304" pitchFamily="18" charset="0"/>
-              </a:rPr>
-              <a:t> que </a:t>
-            </a:r>
-            <a:r>
-              <a:rPr lang="en-US" sz="2400" dirty="0" err="1">
-                <a:latin typeface="Times New Roman" panose="02020603050405020304" pitchFamily="18" charset="0"/>
-                <a:cs typeface="Times New Roman" panose="02020603050405020304" pitchFamily="18" charset="0"/>
-              </a:rPr>
-              <a:t>el</a:t>
-            </a:r>
-            <a:r>
-              <a:rPr lang="en-US" sz="2400" dirty="0">
-                <a:latin typeface="Times New Roman" panose="02020603050405020304" pitchFamily="18" charset="0"/>
-                <a:cs typeface="Times New Roman" panose="02020603050405020304" pitchFamily="18" charset="0"/>
-              </a:rPr>
-              <a:t> </a:t>
-            </a:r>
-            <a:r>
-              <a:rPr lang="en-US" sz="2400" dirty="0" err="1">
-                <a:latin typeface="Times New Roman" panose="02020603050405020304" pitchFamily="18" charset="0"/>
-                <a:cs typeface="Times New Roman" panose="02020603050405020304" pitchFamily="18" charset="0"/>
-              </a:rPr>
-              <a:t>jugador</a:t>
-            </a:r>
-            <a:r>
-              <a:rPr lang="en-US" sz="2400" dirty="0">
-                <a:latin typeface="Times New Roman" panose="02020603050405020304" pitchFamily="18" charset="0"/>
-                <a:cs typeface="Times New Roman" panose="02020603050405020304" pitchFamily="18" charset="0"/>
-              </a:rPr>
-              <a:t>, </a:t>
-            </a:r>
-            <a:r>
-              <a:rPr lang="en-US" sz="2400" dirty="0" err="1">
-                <a:latin typeface="Times New Roman" panose="02020603050405020304" pitchFamily="18" charset="0"/>
-                <a:cs typeface="Times New Roman" panose="02020603050405020304" pitchFamily="18" charset="0"/>
-              </a:rPr>
-              <a:t>el</a:t>
-            </a:r>
-            <a:r>
-              <a:rPr lang="en-US" sz="2400" dirty="0">
-                <a:latin typeface="Times New Roman" panose="02020603050405020304" pitchFamily="18" charset="0"/>
-                <a:cs typeface="Times New Roman" panose="02020603050405020304" pitchFamily="18" charset="0"/>
-              </a:rPr>
-              <a:t> </a:t>
-            </a:r>
-            <a:r>
-              <a:rPr lang="en-US" sz="2400" dirty="0" err="1">
-                <a:latin typeface="Times New Roman" panose="02020603050405020304" pitchFamily="18" charset="0"/>
-                <a:cs typeface="Times New Roman" panose="02020603050405020304" pitchFamily="18" charset="0"/>
-              </a:rPr>
-              <a:t>enemigo</a:t>
-            </a:r>
-            <a:r>
-              <a:rPr lang="en-US" sz="2400" dirty="0">
-                <a:latin typeface="Times New Roman" panose="02020603050405020304" pitchFamily="18" charset="0"/>
-                <a:cs typeface="Times New Roman" panose="02020603050405020304" pitchFamily="18" charset="0"/>
-              </a:rPr>
-              <a:t> </a:t>
-            </a:r>
-            <a:r>
-              <a:rPr lang="en-US" sz="2400" dirty="0" err="1">
-                <a:latin typeface="Times New Roman" panose="02020603050405020304" pitchFamily="18" charset="0"/>
-                <a:cs typeface="Times New Roman" panose="02020603050405020304" pitchFamily="18" charset="0"/>
-              </a:rPr>
-              <a:t>controla</a:t>
-            </a:r>
-            <a:r>
-              <a:rPr lang="en-US" sz="2400" dirty="0">
-                <a:latin typeface="Times New Roman" panose="02020603050405020304" pitchFamily="18" charset="0"/>
-                <a:cs typeface="Times New Roman" panose="02020603050405020304" pitchFamily="18" charset="0"/>
-              </a:rPr>
-              <a:t> </a:t>
-            </a:r>
-            <a:r>
-              <a:rPr lang="en-US" sz="2400" dirty="0" err="1">
-                <a:latin typeface="Times New Roman" panose="02020603050405020304" pitchFamily="18" charset="0"/>
-                <a:cs typeface="Times New Roman" panose="02020603050405020304" pitchFamily="18" charset="0"/>
-              </a:rPr>
-              <a:t>su</a:t>
-            </a:r>
-            <a:r>
-              <a:rPr lang="en-US" sz="2400" dirty="0">
-                <a:latin typeface="Times New Roman" panose="02020603050405020304" pitchFamily="18" charset="0"/>
-                <a:cs typeface="Times New Roman" panose="02020603050405020304" pitchFamily="18" charset="0"/>
-              </a:rPr>
-              <a:t> </a:t>
-            </a:r>
-            <a:r>
-              <a:rPr lang="en-US" sz="2400" dirty="0" err="1">
-                <a:latin typeface="Times New Roman" panose="02020603050405020304" pitchFamily="18" charset="0"/>
-                <a:cs typeface="Times New Roman" panose="02020603050405020304" pitchFamily="18" charset="0"/>
-              </a:rPr>
-              <a:t>velocidad</a:t>
-            </a:r>
-            <a:r>
-              <a:rPr lang="en-US" sz="2400" dirty="0">
-                <a:latin typeface="Times New Roman" panose="02020603050405020304" pitchFamily="18" charset="0"/>
-                <a:cs typeface="Times New Roman" panose="02020603050405020304" pitchFamily="18" charset="0"/>
-              </a:rPr>
-              <a:t> a traves de un </a:t>
-            </a:r>
-            <a:r>
-              <a:rPr lang="en-US" sz="2400" dirty="0" err="1">
-                <a:latin typeface="Times New Roman" panose="02020603050405020304" pitchFamily="18" charset="0"/>
-                <a:cs typeface="Times New Roman" panose="02020603050405020304" pitchFamily="18" charset="0"/>
-              </a:rPr>
-              <a:t>sistema</a:t>
-            </a:r>
-            <a:r>
-              <a:rPr lang="en-US" sz="2400" dirty="0">
-                <a:latin typeface="Times New Roman" panose="02020603050405020304" pitchFamily="18" charset="0"/>
-                <a:cs typeface="Times New Roman" panose="02020603050405020304" pitchFamily="18" charset="0"/>
-              </a:rPr>
-              <a:t> de </a:t>
-            </a:r>
-            <a:r>
-              <a:rPr lang="en-US" sz="2400" dirty="0" err="1">
-                <a:latin typeface="Times New Roman" panose="02020603050405020304" pitchFamily="18" charset="0"/>
-                <a:cs typeface="Times New Roman" panose="02020603050405020304" pitchFamily="18" charset="0"/>
-              </a:rPr>
-              <a:t>retraso</a:t>
-            </a:r>
-            <a:r>
-              <a:rPr lang="en-US" sz="2400" dirty="0">
-                <a:latin typeface="Times New Roman" panose="02020603050405020304" pitchFamily="18" charset="0"/>
-                <a:cs typeface="Times New Roman" panose="02020603050405020304" pitchFamily="18" charset="0"/>
-              </a:rPr>
-              <a:t>.</a:t>
-            </a:r>
-          </a:p>
-          <a:p>
-            <a:pPr algn="l">
-              <a:buFont typeface="Arial" panose="020B0604020202020204" pitchFamily="34" charset="0"/>
-              <a:buChar char="•"/>
-            </a:pPr>
-            <a:r>
-              <a:rPr lang="en-US" sz="2400" b="0" i="0" u="none" strike="noStrike" dirty="0" err="1">
-                <a:effectLst/>
-                <a:latin typeface="Times New Roman" panose="02020603050405020304" pitchFamily="18" charset="0"/>
-                <a:cs typeface="Times New Roman" panose="02020603050405020304" pitchFamily="18" charset="0"/>
-              </a:rPr>
-              <a:t>Aumenta</a:t>
-            </a:r>
-            <a:r>
-              <a:rPr lang="en-US" sz="2400" b="0" i="0" u="none" strike="noStrike" dirty="0">
-                <a:effectLst/>
-                <a:latin typeface="Times New Roman" panose="02020603050405020304" pitchFamily="18" charset="0"/>
-                <a:cs typeface="Times New Roman" panose="02020603050405020304" pitchFamily="18" charset="0"/>
-              </a:rPr>
-              <a:t> </a:t>
-            </a:r>
-            <a:r>
-              <a:rPr lang="en-US" sz="2400" dirty="0">
-                <a:latin typeface="Times New Roman" panose="02020603050405020304" pitchFamily="18" charset="0"/>
-                <a:cs typeface="Times New Roman" panose="02020603050405020304" pitchFamily="18" charset="0"/>
-              </a:rPr>
-              <a:t>de </a:t>
-            </a:r>
-            <a:r>
-              <a:rPr lang="en-US" sz="2400" dirty="0" err="1">
-                <a:latin typeface="Times New Roman" panose="02020603050405020304" pitchFamily="18" charset="0"/>
-                <a:cs typeface="Times New Roman" panose="02020603050405020304" pitchFamily="18" charset="0"/>
-              </a:rPr>
-              <a:t>velocidad</a:t>
-            </a:r>
-            <a:r>
-              <a:rPr lang="en-US" sz="2400" dirty="0">
-                <a:latin typeface="Times New Roman" panose="02020603050405020304" pitchFamily="18" charset="0"/>
-                <a:cs typeface="Times New Roman" panose="02020603050405020304" pitchFamily="18" charset="0"/>
-              </a:rPr>
-              <a:t> </a:t>
-            </a:r>
-            <a:r>
-              <a:rPr lang="en-US" sz="2400" dirty="0" err="1">
-                <a:latin typeface="Times New Roman" panose="02020603050405020304" pitchFamily="18" charset="0"/>
-                <a:cs typeface="Times New Roman" panose="02020603050405020304" pitchFamily="18" charset="0"/>
-              </a:rPr>
-              <a:t>cuando</a:t>
-            </a:r>
-            <a:r>
-              <a:rPr lang="en-US" sz="2400" dirty="0">
-                <a:latin typeface="Times New Roman" panose="02020603050405020304" pitchFamily="18" charset="0"/>
-                <a:cs typeface="Times New Roman" panose="02020603050405020304" pitchFamily="18" charset="0"/>
-              </a:rPr>
-              <a:t> </a:t>
-            </a:r>
-            <a:r>
-              <a:rPr lang="en-US" sz="2400" dirty="0" err="1">
-                <a:latin typeface="Times New Roman" panose="02020603050405020304" pitchFamily="18" charset="0"/>
-                <a:cs typeface="Times New Roman" panose="02020603050405020304" pitchFamily="18" charset="0"/>
-              </a:rPr>
-              <a:t>el</a:t>
-            </a:r>
-            <a:r>
-              <a:rPr lang="en-US" sz="2400" dirty="0">
-                <a:latin typeface="Times New Roman" panose="02020603050405020304" pitchFamily="18" charset="0"/>
-                <a:cs typeface="Times New Roman" panose="02020603050405020304" pitchFamily="18" charset="0"/>
-              </a:rPr>
-              <a:t> </a:t>
-            </a:r>
-            <a:r>
-              <a:rPr lang="en-US" sz="2400" dirty="0" err="1">
-                <a:latin typeface="Times New Roman" panose="02020603050405020304" pitchFamily="18" charset="0"/>
-                <a:cs typeface="Times New Roman" panose="02020603050405020304" pitchFamily="18" charset="0"/>
-              </a:rPr>
-              <a:t>jugador</a:t>
-            </a:r>
-            <a:r>
-              <a:rPr lang="en-US" sz="2400" dirty="0">
-                <a:latin typeface="Times New Roman" panose="02020603050405020304" pitchFamily="18" charset="0"/>
-                <a:cs typeface="Times New Roman" panose="02020603050405020304" pitchFamily="18" charset="0"/>
-              </a:rPr>
-              <a:t> </a:t>
-            </a:r>
-            <a:r>
-              <a:rPr lang="en-US" sz="2400" dirty="0" err="1">
-                <a:latin typeface="Times New Roman" panose="02020603050405020304" pitchFamily="18" charset="0"/>
-                <a:cs typeface="Times New Roman" panose="02020603050405020304" pitchFamily="18" charset="0"/>
-              </a:rPr>
-              <a:t>mejora</a:t>
-            </a:r>
-            <a:r>
-              <a:rPr lang="en-US" sz="2400" dirty="0">
-                <a:latin typeface="Times New Roman" panose="02020603050405020304" pitchFamily="18" charset="0"/>
-                <a:cs typeface="Times New Roman" panose="02020603050405020304" pitchFamily="18" charset="0"/>
-              </a:rPr>
-              <a:t>.</a:t>
-            </a:r>
-            <a:endParaRPr lang="en-US" sz="2400" b="0" i="0" u="none" strike="noStrike" dirty="0">
-              <a:effectLst/>
-              <a:latin typeface="Times New Roman" panose="02020603050405020304" pitchFamily="18" charset="0"/>
-              <a:cs typeface="Times New Roman" panose="02020603050405020304" pitchFamily="18" charset="0"/>
-            </a:endParaRPr>
-          </a:p>
-        </p:txBody>
-      </p:sp>
-      <p:pic>
-        <p:nvPicPr>
-          <p:cNvPr id="7" name="Picture 6">
-            <a:extLst>
-              <a:ext uri="{FF2B5EF4-FFF2-40B4-BE49-F238E27FC236}">
-                <a16:creationId xmlns:a16="http://schemas.microsoft.com/office/drawing/2014/main" id="{76A8FF68-E5A7-C60E-7088-244026F9966B}"/>
-              </a:ext>
-            </a:extLst>
-          </p:cNvPr>
-          <p:cNvPicPr>
-            <a:picLocks noChangeAspect="1"/>
-          </p:cNvPicPr>
-          <p:nvPr/>
-        </p:nvPicPr>
-        <p:blipFill>
-          <a:blip r:embed="rId2"/>
-          <a:stretch>
-            <a:fillRect/>
-          </a:stretch>
-        </p:blipFill>
-        <p:spPr>
-          <a:xfrm>
-            <a:off x="11398250" y="5950857"/>
-            <a:ext cx="793750" cy="907143"/>
-          </a:xfrm>
-          <a:prstGeom prst="rect">
-            <a:avLst/>
-          </a:prstGeom>
-        </p:spPr>
-      </p:pic>
-    </p:spTree>
-    <p:extLst>
-      <p:ext uri="{BB962C8B-B14F-4D97-AF65-F5344CB8AC3E}">
-        <p14:creationId xmlns:p14="http://schemas.microsoft.com/office/powerpoint/2010/main" val="131115072"/>
       </p:ext>
     </p:extLst>
   </p:cSld>
